--- a/slides/CSC270-Lecture-28-MongoDB-Sharding-and-Replication.pptx
+++ b/slides/CSC270-Lecture-28-MongoDB-Sharding-and-Replication.pptx
@@ -7,19 +7,25 @@
   <p:sldIdLst>
     <p:sldId id="256" r:id="rId2"/>
     <p:sldId id="257" r:id="rId3"/>
+    <p:sldId id="271" r:id="rId22"/>
     <p:sldId id="258" r:id="rId4"/>
     <p:sldId id="259" r:id="rId5"/>
     <p:sldId id="260" r:id="rId6"/>
     <p:sldId id="261" r:id="rId7"/>
+    <p:sldId id="272" r:id="rId23"/>
     <p:sldId id="262" r:id="rId8"/>
     <p:sldId id="263" r:id="rId9"/>
     <p:sldId id="264" r:id="rId10"/>
     <p:sldId id="265" r:id="rId11"/>
+    <p:sldId id="273" r:id="rId24"/>
     <p:sldId id="266" r:id="rId12"/>
     <p:sldId id="267" r:id="rId13"/>
+    <p:sldId id="274" r:id="rId25"/>
     <p:sldId id="268" r:id="rId14"/>
+    <p:sldId id="275" r:id="rId26"/>
     <p:sldId id="269" r:id="rId15"/>
     <p:sldId id="270" r:id="rId16"/>
+    <p:sldId id="276" r:id="rId27"/>
   </p:sldIdLst>
   <p:notesMasterIdLst>
     <p:notesMasterId r:id="rId17"/>
@@ -2222,7 +2228,7 @@
               </a:rPr>
               <a:t>CSC270 · DATABASE SYSTEMS · LECTURE 28</a:t>
             </a:r>
-            <a:endParaRPr lang="en-US" sz="1400" dirty="0"/>
+            <a:endParaRPr lang="en-US" sz="1800" dirty="0"/>
           </a:p>
         </p:txBody>
       </p:sp>
@@ -2261,7 +2267,7 @@
               </a:rPr>
               <a:t>Scaling Beyond One Server</a:t>
             </a:r>
-            <a:endParaRPr lang="en-US" sz="1400" dirty="0"/>
+            <a:endParaRPr lang="en-US" sz="1800" dirty="0"/>
           </a:p>
         </p:txBody>
       </p:sp>
@@ -2329,7 +2335,7 @@
               <a:buNone/>
             </a:pPr>
             <a:r>
-              <a:rPr lang="en-US" sz="1600" dirty="0">
+              <a:rPr lang="en-US" sz="1800" dirty="0">
                 <a:solidFill>
                   <a:srgbClr val="8A939B"/>
                 </a:solidFill>
@@ -2339,7 +2345,7 @@
               </a:rPr>
               <a:t>CSC270 · Database Systems — COMSATS University Islamabad, Lahore Campus</a:t>
             </a:r>
-            <a:endParaRPr lang="en-US" sz="1600" dirty="0"/>
+            <a:endParaRPr lang="en-US" sz="1800" dirty="0"/>
           </a:p>
         </p:txBody>
       </p:sp>
@@ -2368,7 +2374,7 @@
               <a:buNone/>
             </a:pPr>
             <a:r>
-              <a:rPr lang="en-US" sz="1000" u="sng" dirty="0">
+              <a:rPr lang="en-US" sz="1200" u="sng" dirty="0">
                 <a:solidFill>
                   <a:srgbClr val="8A939B"/>
                 </a:solidFill>
@@ -2389,7 +2395,7 @@
               <a:buNone/>
             </a:pPr>
             <a:r>
-              <a:rPr lang="en-US" sz="1000" dirty="0">
+              <a:rPr lang="en-US" sz="1200" dirty="0">
                 <a:solidFill>
                   <a:srgbClr val="8A939B"/>
                 </a:solidFill>
@@ -2399,7 +2405,7 @@
               </a:rPr>
               <a:t>  ·  1</a:t>
             </a:r>
-            <a:endParaRPr lang="en-US" sz="1000" dirty="0"/>
+            <a:endParaRPr lang="en-US" sz="1200" dirty="0"/>
           </a:p>
         </p:txBody>
       </p:sp>
@@ -2538,7 +2544,7 @@
               <a:buNone/>
             </a:pPr>
             <a:r>
-              <a:rPr lang="en-US" sz="1000" u="sng" dirty="0">
+              <a:rPr lang="en-US" sz="1200" u="sng" dirty="0">
                 <a:solidFill>
                   <a:srgbClr val="8A939B"/>
                 </a:solidFill>
@@ -2559,7 +2565,7 @@
               <a:buNone/>
             </a:pPr>
             <a:r>
-              <a:rPr lang="en-US" sz="1000" dirty="0">
+              <a:rPr lang="en-US" sz="1200" dirty="0">
                 <a:solidFill>
                   <a:srgbClr val="8A939B"/>
                 </a:solidFill>
@@ -2567,9 +2573,9 @@
                 <a:ea typeface="Calibri" pitchFamily="34" charset="-122"/>
                 <a:cs typeface="Calibri" pitchFamily="34" charset="-120"/>
               </a:rPr>
-              <a:t>  ·  10</a:t>
-            </a:r>
-            <a:endParaRPr lang="en-US" sz="1000" dirty="0"/>
+              <a:t>  ·  12</a:t>
+            </a:r>
+            <a:endParaRPr lang="en-US" sz="1200" dirty="0"/>
           </a:p>
         </p:txBody>
       </p:sp>
@@ -2601,7 +2607,7 @@
               <a:buNone/>
             </a:pPr>
             <a:r>
-              <a:rPr lang="en-US" sz="1350" dirty="0">
+              <a:rPr lang="en-US" sz="1400" dirty="0">
                 <a:solidFill>
                   <a:srgbClr val="1F2429"/>
                 </a:solidFill>
@@ -2611,7 +2617,7 @@
               </a:rPr>
               <a:t>Every sharded collection needs a shard key — the field MongoDB uses to decide which chunk, and shard, a document belongs to:</a:t>
             </a:r>
-            <a:endParaRPr lang="en-US" sz="1350" dirty="0"/>
+            <a:endParaRPr lang="en-US" sz="1800" dirty="0"/>
           </a:p>
         </p:txBody>
       </p:sp>
@@ -2694,7 +2700,7 @@
               <a:buNone/>
             </a:pPr>
             <a:r>
-              <a:rPr lang="en-US" sz="1350" b="1" dirty="0">
+              <a:rPr lang="en-US" sz="1800" b="1" dirty="0">
                 <a:solidFill>
                   <a:srgbClr val="1F2429"/>
                 </a:solidFill>
@@ -2704,7 +2710,7 @@
               </a:rPr>
               <a:t>High cardinality</a:t>
             </a:r>
-            <a:endParaRPr lang="en-US" sz="1350" dirty="0"/>
+            <a:endParaRPr lang="en-US" sz="1800" dirty="0"/>
           </a:p>
         </p:txBody>
       </p:sp>
@@ -2736,7 +2742,7 @@
               <a:buNone/>
             </a:pPr>
             <a:r>
-              <a:rPr lang="en-US" sz="1050" dirty="0">
+              <a:rPr lang="en-US" sz="1200" dirty="0">
                 <a:solidFill>
                   <a:srgbClr val="6B7480"/>
                 </a:solidFill>
@@ -2746,7 +2752,7 @@
               </a:rPr>
               <a:t>Many distinct values, so data can split into many chunks. Five-value fields never produce more than five useful chunks.</a:t>
             </a:r>
-            <a:endParaRPr lang="en-US" sz="1050" dirty="0"/>
+            <a:endParaRPr lang="en-US" sz="1200" dirty="0"/>
           </a:p>
         </p:txBody>
       </p:sp>
@@ -2829,7 +2835,7 @@
               <a:buNone/>
             </a:pPr>
             <a:r>
-              <a:rPr lang="en-US" sz="1350" b="1" dirty="0">
+              <a:rPr lang="en-US" sz="1800" b="1" dirty="0">
                 <a:solidFill>
                   <a:srgbClr val="1F2429"/>
                 </a:solidFill>
@@ -2839,7 +2845,7 @@
               </a:rPr>
               <a:t>Even distribution</a:t>
             </a:r>
-            <a:endParaRPr lang="en-US" sz="1350" dirty="0"/>
+            <a:endParaRPr lang="en-US" sz="1800" dirty="0"/>
           </a:p>
         </p:txBody>
       </p:sp>
@@ -2871,7 +2877,7 @@
               <a:buNone/>
             </a:pPr>
             <a:r>
-              <a:rPr lang="en-US" sz="1050" dirty="0">
+              <a:rPr lang="en-US" sz="1200" dirty="0">
                 <a:solidFill>
                   <a:srgbClr val="6B7480"/>
                 </a:solidFill>
@@ -2881,7 +2887,7 @@
               </a:rPr>
               <a:t>Values spread roughly evenly across the range, so no one chunk (or shard) ends up disproportionately large or busy.</a:t>
             </a:r>
-            <a:endParaRPr lang="en-US" sz="1050" dirty="0"/>
+            <a:endParaRPr lang="en-US" sz="1200" dirty="0"/>
           </a:p>
         </p:txBody>
       </p:sp>
@@ -2964,7 +2970,7 @@
               <a:buNone/>
             </a:pPr>
             <a:r>
-              <a:rPr lang="en-US" sz="1350" b="1" dirty="0">
+              <a:rPr lang="en-US" sz="1800" b="1" dirty="0">
                 <a:solidFill>
                   <a:srgbClr val="1F2429"/>
                 </a:solidFill>
@@ -2974,7 +2980,7 @@
               </a:rPr>
               <a:t>Avoiding hotspots</a:t>
             </a:r>
-            <a:endParaRPr lang="en-US" sz="1350" dirty="0"/>
+            <a:endParaRPr lang="en-US" sz="1800" dirty="0"/>
           </a:p>
         </p:txBody>
       </p:sp>
@@ -3006,7 +3012,7 @@
               <a:buNone/>
             </a:pPr>
             <a:r>
-              <a:rPr lang="en-US" sz="1050" dirty="0">
+              <a:rPr lang="en-US" sz="1200" dirty="0">
                 <a:solidFill>
                   <a:srgbClr val="6B7480"/>
                 </a:solidFill>
@@ -3016,7 +3022,7 @@
               </a:rPr>
               <a:t>A monotonically increasing key sends every new write to the shard owning the highest-value chunk — a bottleneck.</a:t>
             </a:r>
-            <a:endParaRPr lang="en-US" sz="1050" dirty="0"/>
+            <a:endParaRPr lang="en-US" sz="1200" dirty="0"/>
           </a:p>
         </p:txBody>
       </p:sp>
@@ -3099,7 +3105,7 @@
               <a:buNone/>
             </a:pPr>
             <a:r>
-              <a:rPr lang="en-US" sz="1050" b="1" spc="100" kern="0" dirty="0">
+              <a:rPr lang="en-US" sz="1200" b="1" spc="100" kern="0" dirty="0">
                 <a:solidFill>
                   <a:srgbClr val="E8A33D"/>
                 </a:solidFill>
@@ -3109,7 +3115,7 @@
               </a:rPr>
               <a:t>A TIMESTAMP OR AUTO-INCREMENT ID IS A CLASSIC BAD SHARD KEY</a:t>
             </a:r>
-            <a:endParaRPr lang="en-US" sz="1050" dirty="0"/>
+            <a:endParaRPr lang="en-US" sz="1200" dirty="0"/>
           </a:p>
         </p:txBody>
       </p:sp>
@@ -3290,7 +3296,7 @@
               <a:buNone/>
             </a:pPr>
             <a:r>
-              <a:rPr lang="en-US" sz="1000" u="sng" dirty="0">
+              <a:rPr lang="en-US" sz="1200" u="sng" dirty="0">
                 <a:solidFill>
                   <a:srgbClr val="8A939B"/>
                 </a:solidFill>
@@ -3311,7 +3317,7 @@
               <a:buNone/>
             </a:pPr>
             <a:r>
-              <a:rPr lang="en-US" sz="1000" dirty="0">
+              <a:rPr lang="en-US" sz="1200" dirty="0">
                 <a:solidFill>
                   <a:srgbClr val="8A939B"/>
                 </a:solidFill>
@@ -3319,9 +3325,9 @@
                 <a:ea typeface="Calibri" pitchFamily="34" charset="-122"/>
                 <a:cs typeface="Calibri" pitchFamily="34" charset="-120"/>
               </a:rPr>
-              <a:t>  ·  11</a:t>
-            </a:r>
-            <a:endParaRPr lang="en-US" sz="1000" dirty="0"/>
+              <a:t>  ·  14</a:t>
+            </a:r>
+            <a:endParaRPr lang="en-US" sz="1200" dirty="0"/>
           </a:p>
         </p:txBody>
       </p:sp>
@@ -3443,7 +3449,7 @@
               <a:buNone/>
             </a:pPr>
             <a:r>
-              <a:rPr lang="en-US" sz="1400" b="1" dirty="0">
+              <a:rPr lang="en-US" sz="1800" b="1" dirty="0">
                 <a:solidFill>
                   <a:srgbClr val="1F2429"/>
                 </a:solidFill>
@@ -3453,7 +3459,7 @@
               </a:rPr>
               <a:t>Filter includes the shard key</a:t>
             </a:r>
-            <a:endParaRPr lang="en-US" sz="1400" dirty="0"/>
+            <a:endParaRPr lang="en-US" sz="1800" dirty="0"/>
           </a:p>
         </p:txBody>
       </p:sp>
@@ -3485,7 +3491,7 @@
               <a:buNone/>
             </a:pPr>
             <a:r>
-              <a:rPr lang="en-US" sz="1100" dirty="0">
+              <a:rPr lang="en-US" sz="1200" dirty="0">
                 <a:solidFill>
                   <a:srgbClr val="6B7480"/>
                 </a:solidFill>
@@ -3495,7 +3501,7 @@
               </a:rPr>
               <a:t>mongos computes exactly which shard(s) hold the answer</a:t>
             </a:r>
-            <a:endParaRPr lang="en-US" sz="1100" dirty="0"/>
+            <a:endParaRPr lang="en-US" sz="1200" dirty="0"/>
           </a:p>
         </p:txBody>
       </p:sp>
@@ -3602,7 +3608,7 @@
               <a:buNone/>
             </a:pPr>
             <a:r>
-              <a:rPr lang="en-US" sz="1400" b="1" dirty="0">
+              <a:rPr lang="en-US" sz="1800" b="1" dirty="0">
                 <a:solidFill>
                   <a:srgbClr val="1F2429"/>
                 </a:solidFill>
@@ -3612,7 +3618,7 @@
               </a:rPr>
               <a:t>Forwards only there</a:t>
             </a:r>
-            <a:endParaRPr lang="en-US" sz="1400" dirty="0"/>
+            <a:endParaRPr lang="en-US" sz="1800" dirty="0"/>
           </a:p>
         </p:txBody>
       </p:sp>
@@ -3644,7 +3650,7 @@
               <a:buNone/>
             </a:pPr>
             <a:r>
-              <a:rPr lang="en-US" sz="1100" dirty="0">
+              <a:rPr lang="en-US" sz="1200" dirty="0">
                 <a:solidFill>
                   <a:srgbClr val="6B7480"/>
                 </a:solidFill>
@@ -3654,7 +3660,7 @@
               </a:rPr>
               <a:t>Cheap — touches only the relevant shard(s)</a:t>
             </a:r>
-            <a:endParaRPr lang="en-US" sz="1100" dirty="0"/>
+            <a:endParaRPr lang="en-US" sz="1200" dirty="0"/>
           </a:p>
         </p:txBody>
       </p:sp>
@@ -3776,7 +3782,7 @@
               <a:buNone/>
             </a:pPr>
             <a:r>
-              <a:rPr lang="en-US" sz="1400" b="1" dirty="0">
+              <a:rPr lang="en-US" sz="1800" b="1" dirty="0">
                 <a:solidFill>
                   <a:srgbClr val="1F2429"/>
                 </a:solidFill>
@@ -3786,7 +3792,7 @@
               </a:rPr>
               <a:t>Filter omits the shard key</a:t>
             </a:r>
-            <a:endParaRPr lang="en-US" sz="1400" dirty="0"/>
+            <a:endParaRPr lang="en-US" sz="1800" dirty="0"/>
           </a:p>
         </p:txBody>
       </p:sp>
@@ -3818,7 +3824,7 @@
               <a:buNone/>
             </a:pPr>
             <a:r>
-              <a:rPr lang="en-US" sz="1100" dirty="0">
+              <a:rPr lang="en-US" sz="1200" dirty="0">
                 <a:solidFill>
                   <a:srgbClr val="6B7480"/>
                 </a:solidFill>
@@ -3828,7 +3834,7 @@
               </a:rPr>
               <a:t>mongos can't tell which shard has the answer</a:t>
             </a:r>
-            <a:endParaRPr lang="en-US" sz="1100" dirty="0"/>
+            <a:endParaRPr lang="en-US" sz="1200" dirty="0"/>
           </a:p>
         </p:txBody>
       </p:sp>
@@ -3935,7 +3941,7 @@
               <a:buNone/>
             </a:pPr>
             <a:r>
-              <a:rPr lang="en-US" sz="1400" b="1" dirty="0">
+              <a:rPr lang="en-US" sz="1800" b="1" dirty="0">
                 <a:solidFill>
                   <a:srgbClr val="1F2429"/>
                 </a:solidFill>
@@ -3945,7 +3951,7 @@
               </a:rPr>
               <a:t>Sends to every shard, merges results</a:t>
             </a:r>
-            <a:endParaRPr lang="en-US" sz="1400" dirty="0"/>
+            <a:endParaRPr lang="en-US" sz="1800" dirty="0"/>
           </a:p>
         </p:txBody>
       </p:sp>
@@ -3977,7 +3983,7 @@
               <a:buNone/>
             </a:pPr>
             <a:r>
-              <a:rPr lang="en-US" sz="1100" dirty="0">
+              <a:rPr lang="en-US" sz="1200" dirty="0">
                 <a:solidFill>
                   <a:srgbClr val="6B7480"/>
                 </a:solidFill>
@@ -3987,7 +3993,7 @@
               </a:rPr>
               <a:t>Far more expensive</a:t>
             </a:r>
-            <a:endParaRPr lang="en-US" sz="1100" dirty="0"/>
+            <a:endParaRPr lang="en-US" sz="1200" dirty="0"/>
           </a:p>
         </p:txBody>
       </p:sp>
@@ -4070,7 +4076,7 @@
               <a:buNone/>
             </a:pPr>
             <a:r>
-              <a:rPr lang="en-US" sz="1050" b="1" spc="100" kern="0" dirty="0">
+              <a:rPr lang="en-US" sz="1200" b="1" spc="100" kern="0" dirty="0">
                 <a:solidFill>
                   <a:srgbClr val="2FE6C4"/>
                 </a:solidFill>
@@ -4080,7 +4086,7 @@
               </a:rPr>
               <a:t>KNOW YOUR WORKLOAD FIRST</a:t>
             </a:r>
-            <a:endParaRPr lang="en-US" sz="1050" dirty="0"/>
+            <a:endParaRPr lang="en-US" sz="1200" dirty="0"/>
           </a:p>
         </p:txBody>
       </p:sp>
@@ -4261,7 +4267,7 @@
               <a:buNone/>
             </a:pPr>
             <a:r>
-              <a:rPr lang="en-US" sz="1000" u="sng" dirty="0">
+              <a:rPr lang="en-US" sz="1200" u="sng" dirty="0">
                 <a:solidFill>
                   <a:srgbClr val="8A939B"/>
                 </a:solidFill>
@@ -4282,7 +4288,7 @@
               <a:buNone/>
             </a:pPr>
             <a:r>
-              <a:rPr lang="en-US" sz="1000" dirty="0">
+              <a:rPr lang="en-US" sz="1200" dirty="0">
                 <a:solidFill>
                   <a:srgbClr val="8A939B"/>
                 </a:solidFill>
@@ -4290,9 +4296,9 @@
                 <a:ea typeface="Calibri" pitchFamily="34" charset="-122"/>
                 <a:cs typeface="Calibri" pitchFamily="34" charset="-120"/>
               </a:rPr>
-              <a:t>  ·  12</a:t>
-            </a:r>
-            <a:endParaRPr lang="en-US" sz="1000" dirty="0"/>
+              <a:t>  ·  15</a:t>
+            </a:r>
+            <a:endParaRPr lang="en-US" sz="1200" dirty="0"/>
           </a:p>
         </p:txBody>
       </p:sp>
@@ -4375,7 +4381,7 @@
               <a:buNone/>
             </a:pPr>
             <a:r>
-              <a:rPr lang="en-US" sz="1350" b="1" dirty="0">
+              <a:rPr lang="en-US" sz="1800" b="1" dirty="0">
                 <a:solidFill>
                   <a:srgbClr val="1F2429"/>
                 </a:solidFill>
@@ -4385,7 +4391,7 @@
               </a:rPr>
               <a:t>Chunks grow unevenly</a:t>
             </a:r>
-            <a:endParaRPr lang="en-US" sz="1350" dirty="0"/>
+            <a:endParaRPr lang="en-US" sz="1800" dirty="0"/>
           </a:p>
         </p:txBody>
       </p:sp>
@@ -4417,7 +4423,7 @@
               <a:buNone/>
             </a:pPr>
             <a:r>
-              <a:rPr lang="en-US" sz="1050" dirty="0">
+              <a:rPr lang="en-US" sz="1200" dirty="0">
                 <a:solidFill>
                   <a:srgbClr val="6B7480"/>
                 </a:solidFill>
@@ -4427,7 +4433,7 @@
               </a:rPr>
               <a:t>Inserts, updates, deletes skew one range of the shard key</a:t>
             </a:r>
-            <a:endParaRPr lang="en-US" sz="1050" dirty="0"/>
+            <a:endParaRPr lang="en-US" sz="1200" dirty="0"/>
           </a:p>
         </p:txBody>
       </p:sp>
@@ -4534,7 +4540,7 @@
               <a:buNone/>
             </a:pPr>
             <a:r>
-              <a:rPr lang="en-US" sz="1350" b="1" dirty="0">
+              <a:rPr lang="en-US" sz="1800" b="1" dirty="0">
                 <a:solidFill>
                   <a:srgbClr val="1F2429"/>
                 </a:solidFill>
@@ -4544,7 +4550,7 @@
               </a:rPr>
               <a:t>Balancer detects imbalance</a:t>
             </a:r>
-            <a:endParaRPr lang="en-US" sz="1350" dirty="0"/>
+            <a:endParaRPr lang="en-US" sz="1800" dirty="0"/>
           </a:p>
         </p:txBody>
       </p:sp>
@@ -4576,7 +4582,7 @@
               <a:buNone/>
             </a:pPr>
             <a:r>
-              <a:rPr lang="en-US" sz="1050" dirty="0">
+              <a:rPr lang="en-US" sz="1200" dirty="0">
                 <a:solidFill>
                   <a:srgbClr val="6B7480"/>
                 </a:solidFill>
@@ -4586,7 +4592,7 @@
               </a:rPr>
               <a:t>A background process watches chunk distribution across shards</a:t>
             </a:r>
-            <a:endParaRPr lang="en-US" sz="1050" dirty="0"/>
+            <a:endParaRPr lang="en-US" sz="1200" dirty="0"/>
           </a:p>
         </p:txBody>
       </p:sp>
@@ -4693,7 +4699,7 @@
               <a:buNone/>
             </a:pPr>
             <a:r>
-              <a:rPr lang="en-US" sz="1350" b="1" dirty="0">
+              <a:rPr lang="en-US" sz="1800" b="1" dirty="0">
                 <a:solidFill>
                   <a:srgbClr val="1F2429"/>
                 </a:solidFill>
@@ -4703,7 +4709,7 @@
               </a:rPr>
               <a:t>Migrates / splits chunks</a:t>
             </a:r>
-            <a:endParaRPr lang="en-US" sz="1350" dirty="0"/>
+            <a:endParaRPr lang="en-US" sz="1800" dirty="0"/>
           </a:p>
         </p:txBody>
       </p:sp>
@@ -4735,7 +4741,7 @@
               <a:buNone/>
             </a:pPr>
             <a:r>
-              <a:rPr lang="en-US" sz="1050" dirty="0">
+              <a:rPr lang="en-US" sz="1200" dirty="0">
                 <a:solidFill>
                   <a:srgbClr val="6B7480"/>
                 </a:solidFill>
@@ -4745,7 +4751,7 @@
               </a:rPr>
               <a:t>Moves chunks between shards, splitting oversized ones</a:t>
             </a:r>
-            <a:endParaRPr lang="en-US" sz="1050" dirty="0"/>
+            <a:endParaRPr lang="en-US" sz="1200" dirty="0"/>
           </a:p>
         </p:txBody>
       </p:sp>
@@ -4828,7 +4834,7 @@
               <a:buNone/>
             </a:pPr>
             <a:r>
-              <a:rPr lang="en-US" sz="1050" b="1" spc="100" kern="0" dirty="0">
+              <a:rPr lang="en-US" sz="1200" b="1" spc="100" kern="0" dirty="0">
                 <a:solidFill>
                   <a:srgbClr val="8B7FD9"/>
                 </a:solidFill>
@@ -4838,7 +4844,7 @@
               </a:rPr>
               <a:t>LARGELY INVISIBLE TO THE APPLICATION</a:t>
             </a:r>
-            <a:endParaRPr lang="en-US" sz="1050" dirty="0"/>
+            <a:endParaRPr lang="en-US" sz="1200" dirty="0"/>
           </a:p>
         </p:txBody>
       </p:sp>
@@ -5019,7 +5025,7 @@
               <a:buNone/>
             </a:pPr>
             <a:r>
-              <a:rPr lang="en-US" sz="1000" u="sng" dirty="0">
+              <a:rPr lang="en-US" sz="1200" u="sng" dirty="0">
                 <a:solidFill>
                   <a:srgbClr val="8A939B"/>
                 </a:solidFill>
@@ -5040,7 +5046,7 @@
               <a:buNone/>
             </a:pPr>
             <a:r>
-              <a:rPr lang="en-US" sz="1000" dirty="0">
+              <a:rPr lang="en-US" sz="1200" dirty="0">
                 <a:solidFill>
                   <a:srgbClr val="8A939B"/>
                 </a:solidFill>
@@ -5048,9 +5054,9 @@
                 <a:ea typeface="Calibri" pitchFamily="34" charset="-122"/>
                 <a:cs typeface="Calibri" pitchFamily="34" charset="-120"/>
               </a:rPr>
-              <a:t>  ·  13</a:t>
-            </a:r>
-            <a:endParaRPr lang="en-US" sz="1000" dirty="0"/>
+              <a:t>  ·  17</a:t>
+            </a:r>
+            <a:endParaRPr lang="en-US" sz="1200" dirty="0"/>
           </a:p>
         </p:txBody>
       </p:sp>
@@ -5091,7 +5097,7 @@
                         <a:buNone/>
                       </a:pPr>
                       <a:r>
-                        <a:rPr lang="en-US" sz="1200" b="1" dirty="0">
+                        <a:rPr lang="en-US" sz="1400" b="1" dirty="0">
                           <a:solidFill>
                             <a:srgbClr val="FFFFFF"/>
                           </a:solidFill>
@@ -5101,7 +5107,7 @@
                         </a:rPr>
                         <a:t>Aspect</a:t>
                       </a:r>
-                      <a:endParaRPr lang="en-US" sz="1200" dirty="0">
+                      <a:endParaRPr lang="en-US" sz="1400" dirty="0">
                         <a:latin typeface="Calibri" charset="0"/>
                         <a:ea typeface="Calibri" charset="0"/>
                         <a:cs typeface="Calibri" charset="0"/>
@@ -5159,7 +5165,7 @@
                         <a:buNone/>
                       </a:pPr>
                       <a:r>
-                        <a:rPr lang="en-US" sz="1200" b="1" dirty="0">
+                        <a:rPr lang="en-US" sz="1400" b="1" dirty="0">
                           <a:solidFill>
                             <a:srgbClr val="FFFFFF"/>
                           </a:solidFill>
@@ -5169,7 +5175,7 @@
                         </a:rPr>
                         <a:t>Replication</a:t>
                       </a:r>
-                      <a:endParaRPr lang="en-US" sz="1200" dirty="0">
+                      <a:endParaRPr lang="en-US" sz="1400" dirty="0">
                         <a:latin typeface="Calibri" charset="0"/>
                         <a:ea typeface="Calibri" charset="0"/>
                         <a:cs typeface="Calibri" charset="0"/>
@@ -5227,7 +5233,7 @@
                         <a:buNone/>
                       </a:pPr>
                       <a:r>
-                        <a:rPr lang="en-US" sz="1200" b="1" dirty="0">
+                        <a:rPr lang="en-US" sz="1400" b="1" dirty="0">
                           <a:solidFill>
                             <a:srgbClr val="FFFFFF"/>
                           </a:solidFill>
@@ -5237,7 +5243,7 @@
                         </a:rPr>
                         <a:t>Sharding</a:t>
                       </a:r>
-                      <a:endParaRPr lang="en-US" sz="1200" dirty="0">
+                      <a:endParaRPr lang="en-US" sz="1400" dirty="0">
                         <a:latin typeface="Calibri" charset="0"/>
                         <a:ea typeface="Calibri" charset="0"/>
                         <a:cs typeface="Calibri" charset="0"/>
@@ -5297,7 +5303,7 @@
                         <a:buNone/>
                       </a:pPr>
                       <a:r>
-                        <a:rPr lang="en-US" sz="1200" dirty="0">
+                        <a:rPr lang="en-US" sz="1400" dirty="0">
                           <a:solidFill>
                             <a:srgbClr val="1F2429"/>
                           </a:solidFill>
@@ -5307,7 +5313,7 @@
                         </a:rPr>
                         <a:t>Problem solved</a:t>
                       </a:r>
-                      <a:endParaRPr lang="en-US" sz="1200" dirty="0">
+                      <a:endParaRPr lang="en-US" sz="1400" dirty="0">
                         <a:latin typeface="Calibri" charset="0"/>
                         <a:ea typeface="Calibri" charset="0"/>
                         <a:cs typeface="Calibri" charset="0"/>
@@ -5365,7 +5371,7 @@
                         <a:buNone/>
                       </a:pPr>
                       <a:r>
-                        <a:rPr lang="en-US" sz="1200" dirty="0">
+                        <a:rPr lang="en-US" sz="1400" dirty="0">
                           <a:solidFill>
                             <a:srgbClr val="1F2429"/>
                           </a:solidFill>
@@ -5375,7 +5381,7 @@
                         </a:rPr>
                         <a:t>High availability, read scaling</a:t>
                       </a:r>
-                      <a:endParaRPr lang="en-US" sz="1200" dirty="0">
+                      <a:endParaRPr lang="en-US" sz="1400" dirty="0">
                         <a:latin typeface="Calibri" charset="0"/>
                         <a:ea typeface="Calibri" charset="0"/>
                         <a:cs typeface="Calibri" charset="0"/>
@@ -5433,7 +5439,7 @@
                         <a:buNone/>
                       </a:pPr>
                       <a:r>
-                        <a:rPr lang="en-US" sz="1200" dirty="0">
+                        <a:rPr lang="en-US" sz="1400" dirty="0">
                           <a:solidFill>
                             <a:srgbClr val="1F2429"/>
                           </a:solidFill>
@@ -5443,7 +5449,7 @@
                         </a:rPr>
                         <a:t>Horizontal write and storage scaling</a:t>
                       </a:r>
-                      <a:endParaRPr lang="en-US" sz="1200" dirty="0">
+                      <a:endParaRPr lang="en-US" sz="1400" dirty="0">
                         <a:latin typeface="Calibri" charset="0"/>
                         <a:ea typeface="Calibri" charset="0"/>
                         <a:cs typeface="Calibri" charset="0"/>
@@ -5503,7 +5509,7 @@
                         <a:buNone/>
                       </a:pPr>
                       <a:r>
-                        <a:rPr lang="en-US" sz="1200" dirty="0">
+                        <a:rPr lang="en-US" sz="1400" dirty="0">
                           <a:solidFill>
                             <a:srgbClr val="1F2429"/>
                           </a:solidFill>
@@ -5513,7 +5519,7 @@
                         </a:rPr>
                         <a:t>What each node holds</a:t>
                       </a:r>
-                      <a:endParaRPr lang="en-US" sz="1200" dirty="0">
+                      <a:endParaRPr lang="en-US" sz="1400" dirty="0">
                         <a:latin typeface="Calibri" charset="0"/>
                         <a:ea typeface="Calibri" charset="0"/>
                         <a:cs typeface="Calibri" charset="0"/>
@@ -5571,7 +5577,7 @@
                         <a:buNone/>
                       </a:pPr>
                       <a:r>
-                        <a:rPr lang="en-US" sz="1200" dirty="0">
+                        <a:rPr lang="en-US" sz="1400" dirty="0">
                           <a:solidFill>
                             <a:srgbClr val="1F2429"/>
                           </a:solidFill>
@@ -5581,7 +5587,7 @@
                         </a:rPr>
                         <a:t>The same complete dataset</a:t>
                       </a:r>
-                      <a:endParaRPr lang="en-US" sz="1200" dirty="0">
+                      <a:endParaRPr lang="en-US" sz="1400" dirty="0">
                         <a:latin typeface="Calibri" charset="0"/>
                         <a:ea typeface="Calibri" charset="0"/>
                         <a:cs typeface="Calibri" charset="0"/>
@@ -5639,7 +5645,7 @@
                         <a:buNone/>
                       </a:pPr>
                       <a:r>
-                        <a:rPr lang="en-US" sz="1200" dirty="0">
+                        <a:rPr lang="en-US" sz="1400" dirty="0">
                           <a:solidFill>
                             <a:srgbClr val="1F2429"/>
                           </a:solidFill>
@@ -5649,7 +5655,7 @@
                         </a:rPr>
                         <a:t>A different slice of the dataset</a:t>
                       </a:r>
-                      <a:endParaRPr lang="en-US" sz="1200" dirty="0">
+                      <a:endParaRPr lang="en-US" sz="1400" dirty="0">
                         <a:latin typeface="Calibri" charset="0"/>
                         <a:ea typeface="Calibri" charset="0"/>
                         <a:cs typeface="Calibri" charset="0"/>
@@ -5709,7 +5715,7 @@
                         <a:buNone/>
                       </a:pPr>
                       <a:r>
-                        <a:rPr lang="en-US" sz="1200" dirty="0">
+                        <a:rPr lang="en-US" sz="1400" dirty="0">
                           <a:solidFill>
                             <a:srgbClr val="1F2429"/>
                           </a:solidFill>
@@ -5719,7 +5725,7 @@
                         </a:rPr>
                         <a:t>Failure it protects against</a:t>
                       </a:r>
-                      <a:endParaRPr lang="en-US" sz="1200" dirty="0">
+                      <a:endParaRPr lang="en-US" sz="1400" dirty="0">
                         <a:latin typeface="Calibri" charset="0"/>
                         <a:ea typeface="Calibri" charset="0"/>
                         <a:cs typeface="Calibri" charset="0"/>
@@ -5777,7 +5783,7 @@
                         <a:buNone/>
                       </a:pPr>
                       <a:r>
-                        <a:rPr lang="en-US" sz="1200" dirty="0">
+                        <a:rPr lang="en-US" sz="1400" dirty="0">
                           <a:solidFill>
                             <a:srgbClr val="1F2429"/>
                           </a:solidFill>
@@ -5787,7 +5793,7 @@
                         </a:rPr>
                         <a:t>Losing a single server</a:t>
                       </a:r>
-                      <a:endParaRPr lang="en-US" sz="1200" dirty="0">
+                      <a:endParaRPr lang="en-US" sz="1400" dirty="0">
                         <a:latin typeface="Calibri" charset="0"/>
                         <a:ea typeface="Calibri" charset="0"/>
                         <a:cs typeface="Calibri" charset="0"/>
@@ -5845,7 +5851,7 @@
                         <a:buNone/>
                       </a:pPr>
                       <a:r>
-                        <a:rPr lang="en-US" sz="1200" dirty="0">
+                        <a:rPr lang="en-US" sz="1400" dirty="0">
                           <a:solidFill>
                             <a:srgbClr val="1F2429"/>
                           </a:solidFill>
@@ -5855,7 +5861,7 @@
                         </a:rPr>
                         <a:t>Running out of capacity on a single server</a:t>
                       </a:r>
-                      <a:endParaRPr lang="en-US" sz="1200" dirty="0">
+                      <a:endParaRPr lang="en-US" sz="1400" dirty="0">
                         <a:latin typeface="Calibri" charset="0"/>
                         <a:ea typeface="Calibri" charset="0"/>
                         <a:cs typeface="Calibri" charset="0"/>
@@ -5915,7 +5921,7 @@
                         <a:buNone/>
                       </a:pPr>
                       <a:r>
-                        <a:rPr lang="en-US" sz="1200" dirty="0">
+                        <a:rPr lang="en-US" sz="1400" dirty="0">
                           <a:solidFill>
                             <a:srgbClr val="1F2429"/>
                           </a:solidFill>
@@ -5925,7 +5931,7 @@
                         </a:rPr>
                         <a:t>Key components</a:t>
                       </a:r>
-                      <a:endParaRPr lang="en-US" sz="1200" dirty="0">
+                      <a:endParaRPr lang="en-US" sz="1400" dirty="0">
                         <a:latin typeface="Calibri" charset="0"/>
                         <a:ea typeface="Calibri" charset="0"/>
                         <a:cs typeface="Calibri" charset="0"/>
@@ -5983,7 +5989,7 @@
                         <a:buNone/>
                       </a:pPr>
                       <a:r>
-                        <a:rPr lang="en-US" sz="1200" dirty="0">
+                        <a:rPr lang="en-US" sz="1400" dirty="0">
                           <a:solidFill>
                             <a:srgbClr val="1F2429"/>
                           </a:solidFill>
@@ -5993,7 +5999,7 @@
                         </a:rPr>
                         <a:t>Primary, secondaries</a:t>
                       </a:r>
-                      <a:endParaRPr lang="en-US" sz="1200" dirty="0">
+                      <a:endParaRPr lang="en-US" sz="1400" dirty="0">
                         <a:latin typeface="Calibri" charset="0"/>
                         <a:ea typeface="Calibri" charset="0"/>
                         <a:cs typeface="Calibri" charset="0"/>
@@ -6051,7 +6057,7 @@
                         <a:buNone/>
                       </a:pPr>
                       <a:r>
-                        <a:rPr lang="en-US" sz="1200" dirty="0">
+                        <a:rPr lang="en-US" sz="1400" dirty="0">
                           <a:solidFill>
                             <a:srgbClr val="1F2429"/>
                           </a:solidFill>
@@ -6061,7 +6067,7 @@
                         </a:rPr>
                         <a:t>Shards, config servers, mongos</a:t>
                       </a:r>
-                      <a:endParaRPr lang="en-US" sz="1200" dirty="0">
+                      <a:endParaRPr lang="en-US" sz="1400" dirty="0">
                         <a:latin typeface="Calibri" charset="0"/>
                         <a:ea typeface="Calibri" charset="0"/>
                         <a:cs typeface="Calibri" charset="0"/>
@@ -6121,7 +6127,7 @@
                         <a:buNone/>
                       </a:pPr>
                       <a:r>
-                        <a:rPr lang="en-US" sz="1200" dirty="0">
+                        <a:rPr lang="en-US" sz="1400" dirty="0">
                           <a:solidFill>
                             <a:srgbClr val="1F2429"/>
                           </a:solidFill>
@@ -6131,7 +6137,7 @@
                         </a:rPr>
                         <a:t>Typical unit</a:t>
                       </a:r>
-                      <a:endParaRPr lang="en-US" sz="1200" dirty="0">
+                      <a:endParaRPr lang="en-US" sz="1400" dirty="0">
                         <a:latin typeface="Calibri" charset="0"/>
                         <a:ea typeface="Calibri" charset="0"/>
                         <a:cs typeface="Calibri" charset="0"/>
@@ -6189,7 +6195,7 @@
                         <a:buNone/>
                       </a:pPr>
                       <a:r>
-                        <a:rPr lang="en-US" sz="1200" dirty="0">
+                        <a:rPr lang="en-US" sz="1400" dirty="0">
                           <a:solidFill>
                             <a:srgbClr val="1F2429"/>
                           </a:solidFill>
@@ -6199,7 +6205,7 @@
                         </a:rPr>
                         <a:t>A replica set</a:t>
                       </a:r>
-                      <a:endParaRPr lang="en-US" sz="1200" dirty="0">
+                      <a:endParaRPr lang="en-US" sz="1400" dirty="0">
                         <a:latin typeface="Calibri" charset="0"/>
                         <a:ea typeface="Calibri" charset="0"/>
                         <a:cs typeface="Calibri" charset="0"/>
@@ -6257,7 +6263,7 @@
                         <a:buNone/>
                       </a:pPr>
                       <a:r>
-                        <a:rPr lang="en-US" sz="1200" dirty="0">
+                        <a:rPr lang="en-US" sz="1400" dirty="0">
                           <a:solidFill>
                             <a:srgbClr val="1F2429"/>
                           </a:solidFill>
@@ -6267,7 +6273,7 @@
                         </a:rPr>
                         <a:t>A sharded cluster (built from multiple replica sets)</a:t>
                       </a:r>
-                      <a:endParaRPr lang="en-US" sz="1200" dirty="0">
+                      <a:endParaRPr lang="en-US" sz="1400" dirty="0">
                         <a:latin typeface="Calibri" charset="0"/>
                         <a:ea typeface="Calibri" charset="0"/>
                         <a:cs typeface="Calibri" charset="0"/>
@@ -6400,7 +6406,7 @@
               <a:buNone/>
             </a:pPr>
             <a:r>
-              <a:rPr lang="en-US" sz="1050" b="1" spc="100" kern="0" dirty="0">
+              <a:rPr lang="en-US" sz="1200" b="1" spc="100" kern="0" dirty="0">
                 <a:solidFill>
                   <a:srgbClr val="2FE6C4"/>
                 </a:solidFill>
@@ -6410,7 +6416,7 @@
               </a:rPr>
               <a:t>NOT COMPETING TECHNIQUES</a:t>
             </a:r>
-            <a:endParaRPr lang="en-US" sz="1050" dirty="0"/>
+            <a:endParaRPr lang="en-US" sz="1200" dirty="0"/>
           </a:p>
         </p:txBody>
       </p:sp>
@@ -6591,7 +6597,7 @@
               <a:buNone/>
             </a:pPr>
             <a:r>
-              <a:rPr lang="en-US" sz="1000" u="sng" dirty="0">
+              <a:rPr lang="en-US" sz="1200" u="sng" dirty="0">
                 <a:solidFill>
                   <a:srgbClr val="8A939B"/>
                 </a:solidFill>
@@ -6612,7 +6618,7 @@
               <a:buNone/>
             </a:pPr>
             <a:r>
-              <a:rPr lang="en-US" sz="1000" dirty="0">
+              <a:rPr lang="en-US" sz="1200" dirty="0">
                 <a:solidFill>
                   <a:srgbClr val="8A939B"/>
                 </a:solidFill>
@@ -6620,9 +6626,9 @@
                 <a:ea typeface="Calibri" pitchFamily="34" charset="-122"/>
                 <a:cs typeface="Calibri" pitchFamily="34" charset="-120"/>
               </a:rPr>
-              <a:t>  ·  14</a:t>
-            </a:r>
-            <a:endParaRPr lang="en-US" sz="1000" dirty="0"/>
+              <a:t>  ·  19</a:t>
+            </a:r>
+            <a:endParaRPr lang="en-US" sz="1200" dirty="0"/>
           </a:p>
         </p:txBody>
       </p:sp>
@@ -6705,7 +6711,7 @@
               <a:buNone/>
             </a:pPr>
             <a:r>
-              <a:rPr lang="en-US" sz="1450" b="1" dirty="0">
+              <a:rPr lang="en-US" sz="1800" b="1" dirty="0">
                 <a:solidFill>
                   <a:srgbClr val="1F2429"/>
                 </a:solidFill>
@@ -6715,7 +6721,7 @@
               </a:rPr>
               <a:t>mongos query router(s)</a:t>
             </a:r>
-            <a:endParaRPr lang="en-US" sz="1450" dirty="0"/>
+            <a:endParaRPr lang="en-US" sz="1800" dirty="0"/>
           </a:p>
         </p:txBody>
       </p:sp>
@@ -6747,7 +6753,7 @@
               <a:buNone/>
             </a:pPr>
             <a:r>
-              <a:rPr lang="en-US" sz="1100" dirty="0">
+              <a:rPr lang="en-US" sz="1200" dirty="0">
                 <a:solidFill>
                   <a:srgbClr val="6B7480"/>
                 </a:solidFill>
@@ -6757,7 +6763,7 @@
               </a:rPr>
               <a:t>What the application actually connects to</a:t>
             </a:r>
-            <a:endParaRPr lang="en-US" sz="1100" dirty="0"/>
+            <a:endParaRPr lang="en-US" sz="1200" dirty="0"/>
           </a:p>
         </p:txBody>
       </p:sp>
@@ -6840,7 +6846,7 @@
               <a:buNone/>
             </a:pPr>
             <a:r>
-              <a:rPr lang="en-US" sz="1450" b="1" dirty="0">
+              <a:rPr lang="en-US" sz="1800" b="1" dirty="0">
                 <a:solidFill>
                   <a:srgbClr val="1F2429"/>
                 </a:solidFill>
@@ -6850,7 +6856,7 @@
               </a:rPr>
               <a:t>Config server replica set</a:t>
             </a:r>
-            <a:endParaRPr lang="en-US" sz="1450" dirty="0"/>
+            <a:endParaRPr lang="en-US" sz="1800" dirty="0"/>
           </a:p>
         </p:txBody>
       </p:sp>
@@ -6882,7 +6888,7 @@
               <a:buNone/>
             </a:pPr>
             <a:r>
-              <a:rPr lang="en-US" sz="1100" dirty="0">
+              <a:rPr lang="en-US" sz="1200" dirty="0">
                 <a:solidFill>
                   <a:srgbClr val="6B7480"/>
                 </a:solidFill>
@@ -6892,7 +6898,7 @@
               </a:rPr>
               <a:t>Cluster metadata, itself replicated for availability</a:t>
             </a:r>
-            <a:endParaRPr lang="en-US" sz="1100" dirty="0"/>
+            <a:endParaRPr lang="en-US" sz="1200" dirty="0"/>
           </a:p>
         </p:txBody>
       </p:sp>
@@ -6975,7 +6981,7 @@
               <a:buNone/>
             </a:pPr>
             <a:r>
-              <a:rPr lang="en-US" sz="1450" b="1" dirty="0">
+              <a:rPr lang="en-US" sz="1800" b="1" dirty="0">
                 <a:solidFill>
                   <a:srgbClr val="1F2429"/>
                 </a:solidFill>
@@ -6985,7 +6991,7 @@
               </a:rPr>
               <a:t>Shard 1 = its own replica set</a:t>
             </a:r>
-            <a:endParaRPr lang="en-US" sz="1450" dirty="0"/>
+            <a:endParaRPr lang="en-US" sz="1800" dirty="0"/>
           </a:p>
         </p:txBody>
       </p:sp>
@@ -7017,7 +7023,7 @@
               <a:buNone/>
             </a:pPr>
             <a:r>
-              <a:rPr lang="en-US" sz="1100" dirty="0">
+              <a:rPr lang="en-US" sz="1200" dirty="0">
                 <a:solidFill>
                   <a:srgbClr val="6B7480"/>
                 </a:solidFill>
@@ -7027,7 +7033,7 @@
               </a:rPr>
               <a:t>Primary + secondaries, holding one slice of the data</a:t>
             </a:r>
-            <a:endParaRPr lang="en-US" sz="1100" dirty="0"/>
+            <a:endParaRPr lang="en-US" sz="1200" dirty="0"/>
           </a:p>
         </p:txBody>
       </p:sp>
@@ -7110,7 +7116,7 @@
               <a:buNone/>
             </a:pPr>
             <a:r>
-              <a:rPr lang="en-US" sz="1450" b="1" dirty="0">
+              <a:rPr lang="en-US" sz="1800" b="1" dirty="0">
                 <a:solidFill>
                   <a:srgbClr val="1F2429"/>
                 </a:solidFill>
@@ -7120,7 +7126,7 @@
               </a:rPr>
               <a:t>Shard 2 = its own replica set</a:t>
             </a:r>
-            <a:endParaRPr lang="en-US" sz="1450" dirty="0"/>
+            <a:endParaRPr lang="en-US" sz="1800" dirty="0"/>
           </a:p>
         </p:txBody>
       </p:sp>
@@ -7152,7 +7158,7 @@
               <a:buNone/>
             </a:pPr>
             <a:r>
-              <a:rPr lang="en-US" sz="1100" dirty="0">
+              <a:rPr lang="en-US" sz="1200" dirty="0">
                 <a:solidFill>
                   <a:srgbClr val="6B7480"/>
                 </a:solidFill>
@@ -7162,7 +7168,7 @@
               </a:rPr>
               <a:t>Primary + secondaries, holding another slice</a:t>
             </a:r>
-            <a:endParaRPr lang="en-US" sz="1100" dirty="0"/>
+            <a:endParaRPr lang="en-US" sz="1200" dirty="0"/>
           </a:p>
         </p:txBody>
       </p:sp>
@@ -7304,7 +7310,7 @@
               <a:buNone/>
             </a:pPr>
             <a:r>
-              <a:rPr lang="en-US" sz="1550" dirty="0">
+              <a:rPr lang="en-US" sz="1800" dirty="0">
                 <a:solidFill>
                   <a:srgbClr val="FFFFFF"/>
                 </a:solidFill>
@@ -7314,7 +7320,7 @@
               </a:rPr>
               <a:t>Replication copies the same data across a replica set — solving availability and read scaling. Writes go to the primary; reads can route to secondaries via a read preference.</a:t>
             </a:r>
-            <a:endParaRPr lang="en-US" sz="1550" dirty="0"/>
+            <a:endParaRPr lang="en-US" sz="1800" dirty="0"/>
           </a:p>
         </p:txBody>
       </p:sp>
@@ -7363,7 +7369,7 @@
               <a:buNone/>
             </a:pPr>
             <a:r>
-              <a:rPr lang="en-US" sz="1550" dirty="0">
+              <a:rPr lang="en-US" sz="1800" dirty="0">
                 <a:solidFill>
                   <a:srgbClr val="FFFFFF"/>
                 </a:solidFill>
@@ -7373,7 +7379,7 @@
               </a:rPr>
               <a:t>Automatic failover elects a new primary from surviving secondaries, requiring a majority (quorum) to agree.</a:t>
             </a:r>
-            <a:endParaRPr lang="en-US" sz="1550" dirty="0"/>
+            <a:endParaRPr lang="en-US" sz="1800" dirty="0"/>
           </a:p>
         </p:txBody>
       </p:sp>
@@ -7422,7 +7428,7 @@
               <a:buNone/>
             </a:pPr>
             <a:r>
-              <a:rPr lang="en-US" sz="1550" dirty="0">
+              <a:rPr lang="en-US" sz="1800" dirty="0">
                 <a:solidFill>
                   <a:srgbClr val="FFFFFF"/>
                 </a:solidFill>
@@ -7432,7 +7438,7 @@
               </a:rPr>
               <a:t>Sharding splits different slices of a collection across shards — solving horizontal write and storage capacity, a different problem from replication.</a:t>
             </a:r>
-            <a:endParaRPr lang="en-US" sz="1550" dirty="0"/>
+            <a:endParaRPr lang="en-US" sz="1800" dirty="0"/>
           </a:p>
         </p:txBody>
       </p:sp>
@@ -7481,7 +7487,7 @@
               <a:buNone/>
             </a:pPr>
             <a:r>
-              <a:rPr lang="en-US" sz="1550" dirty="0">
+              <a:rPr lang="en-US" sz="1800" dirty="0">
                 <a:solidFill>
                   <a:srgbClr val="FFFFFF"/>
                 </a:solidFill>
@@ -7491,7 +7497,7 @@
               </a:rPr>
               <a:t>A sharded cluster routes every query through mongos, using config-server metadata to send a targeted query or an expensive scatter-gather.</a:t>
             </a:r>
-            <a:endParaRPr lang="en-US" sz="1550" dirty="0"/>
+            <a:endParaRPr lang="en-US" sz="1800" dirty="0"/>
           </a:p>
         </p:txBody>
       </p:sp>
@@ -7540,7 +7546,7 @@
               <a:buNone/>
             </a:pPr>
             <a:r>
-              <a:rPr lang="en-US" sz="1550" dirty="0">
+              <a:rPr lang="en-US" sz="1800" dirty="0">
                 <a:solidFill>
                   <a:srgbClr val="FFFFFF"/>
                 </a:solidFill>
@@ -7550,7 +7556,7 @@
               </a:rPr>
               <a:t>Shard key choice — high cardinality, even distribution, no monotonic hotspot — is the single most consequential sharding decision, echoing Lecture 25's index selection.</a:t>
             </a:r>
-            <a:endParaRPr lang="en-US" sz="1550" dirty="0"/>
+            <a:endParaRPr lang="en-US" sz="1800" dirty="0"/>
           </a:p>
         </p:txBody>
       </p:sp>
@@ -7599,7 +7605,7 @@
               <a:buNone/>
             </a:pPr>
             <a:r>
-              <a:rPr lang="en-US" sz="1550" dirty="0">
+              <a:rPr lang="en-US" sz="1800" dirty="0">
                 <a:solidFill>
                   <a:srgbClr val="FFFFFF"/>
                 </a:solidFill>
@@ -7609,7 +7615,7 @@
               </a:rPr>
               <a:t>In production, both techniques combine: a sharded cluster's individual shards are themselves replica sets.</a:t>
             </a:r>
-            <a:endParaRPr lang="en-US" sz="1550" dirty="0"/>
+            <a:endParaRPr lang="en-US" sz="1800" dirty="0"/>
           </a:p>
         </p:txBody>
       </p:sp>
@@ -7638,7 +7644,7 @@
               <a:buNone/>
             </a:pPr>
             <a:r>
-              <a:rPr lang="en-US" sz="1000" u="sng" dirty="0">
+              <a:rPr lang="en-US" sz="1200" u="sng" dirty="0">
                 <a:solidFill>
                   <a:srgbClr val="8A939B"/>
                 </a:solidFill>
@@ -7659,7 +7665,7 @@
               <a:buNone/>
             </a:pPr>
             <a:r>
-              <a:rPr lang="en-US" sz="1000" dirty="0">
+              <a:rPr lang="en-US" sz="1200" dirty="0">
                 <a:solidFill>
                   <a:srgbClr val="8A939B"/>
                 </a:solidFill>
@@ -7667,9 +7673,2508 @@
                 <a:ea typeface="Calibri" pitchFamily="34" charset="-122"/>
                 <a:cs typeface="Calibri" pitchFamily="34" charset="-120"/>
               </a:rPr>
-              <a:t>  ·  15</a:t>
-            </a:r>
-            <a:endParaRPr lang="en-US" sz="1000" dirty="0"/>
+              <a:t>  ·  20</a:t>
+            </a:r>
+            <a:endParaRPr lang="en-US" sz="1200" dirty="0"/>
+          </a:p>
+        </p:txBody>
+      </p:sp>
+    </p:spTree>
+  </p:cSld>
+  <p:clrMapOvr>
+    <a:masterClrMapping/>
+  </p:clrMapOvr>
+</p:sld>
+</file>
+
+<file path=ppt/slides/slide16.xml><?xml version="1.0" encoding="utf-8"?>
+<p:sld xmlns:a="http://schemas.openxmlformats.org/drawingml/2006/main" xmlns:r="http://schemas.openxmlformats.org/officeDocument/2006/relationships" xmlns:p="http://schemas.openxmlformats.org/presentationml/2006/main">
+  <p:cSld name="Slide 15">
+    <p:bg>
+      <p:bgPr>
+        <a:solidFill>
+          <a:srgbClr val="14181C"/>
+        </a:solidFill>
+      </p:bgPr>
+    </p:bg>
+    <p:spTree>
+      <p:nvGrpSpPr>
+        <p:cNvPr id="1" name=""/>
+        <p:cNvGrpSpPr/>
+        <p:nvPr/>
+      </p:nvGrpSpPr>
+      <p:grpSpPr>
+        <a:xfrm>
+          <a:off x="0" y="0"/>
+          <a:ext cx="0" cy="0"/>
+          <a:chOff x="0" y="0"/>
+          <a:chExt cx="0" cy="0"/>
+        </a:xfrm>
+      </p:grpSpPr>
+      <p:sp>
+        <p:nvSpPr>
+          <p:cNvPr id="2" name="Shape 0"/>
+          <p:cNvSpPr/>
+          <p:nvPr/>
+        </p:nvSpPr>
+        <p:spPr>
+          <a:xfrm>
+            <a:off x="9265615" y="3931920"/>
+            <a:ext cx="3840480" cy="3840480"/>
+          </a:xfrm>
+          <a:prstGeom prst="ellipse">
+            <a:avLst/>
+          </a:prstGeom>
+          <a:solidFill>
+            <a:srgbClr val="2FE6C4">
+              <a:alpha val="10000"/>
+            </a:srgbClr>
+          </a:solidFill>
+          <a:ln/>
+        </p:spPr>
+      </p:sp>
+      <p:sp>
+        <p:nvSpPr>
+          <p:cNvPr id="3" name="Text 1"/>
+          <p:cNvSpPr txBox="1"/>
+          <p:nvPr/>
+        </p:nvSpPr>
+        <p:spPr>
+          <a:xfrm>
+            <a:off x="822960" y="548640"/>
+            <a:ext cx="10058400" cy="731520"/>
+          </a:xfrm>
+          <a:prstGeom prst="rect">
+            <a:avLst/>
+          </a:prstGeom>
+          <a:noFill/>
+          <a:ln/>
+        </p:spPr>
+        <p:txBody>
+          <a:bodyPr wrap="square" rtlCol="0" anchor="ctr"/>
+          <a:lstStyle/>
+          <a:p>
+            <a:pPr indent="0" marL="0">
+              <a:buNone/>
+            </a:pPr>
+            <a:r>
+              <a:rPr lang="en-US" sz="3200" b="1" dirty="0">
+                <a:solidFill>
+                  <a:srgbClr val="FFFFFF"/>
+                </a:solidFill>
+                <a:latin typeface="Calibri" pitchFamily="34" charset="0"/>
+                <a:ea typeface="Calibri" pitchFamily="34" charset="-122"/>
+                <a:cs typeface="Calibri" pitchFamily="34" charset="-120"/>
+              </a:rPr>
+              <a:t>Recap: One Server Is Not Enough</a:t>
+            </a:r>
+            <a:endParaRPr lang="en-US" sz="3200" dirty="0"/>
+          </a:p>
+        </p:txBody>
+      </p:sp>
+      <p:sp>
+        <p:nvSpPr>
+          <p:cNvPr id="4" name="Shape 2"/>
+          <p:cNvSpPr/>
+          <p:nvPr/>
+        </p:nvSpPr>
+        <p:spPr>
+          <a:xfrm>
+            <a:off x="822960" y="1946910"/>
+            <a:ext cx="109728" cy="109728"/>
+          </a:xfrm>
+          <a:prstGeom prst="rect">
+            <a:avLst/>
+          </a:prstGeom>
+          <a:solidFill>
+            <a:srgbClr val="2FE6C4"/>
+          </a:solidFill>
+          <a:ln/>
+        </p:spPr>
+      </p:sp>
+      <p:sp>
+        <p:nvSpPr>
+          <p:cNvPr id="5" name="Text 3"/>
+          <p:cNvSpPr txBox="1"/>
+          <p:nvPr/>
+        </p:nvSpPr>
+        <p:spPr>
+          <a:xfrm>
+            <a:off x="1143000" y="1600200"/>
+            <a:ext cx="9875520" cy="784860"/>
+          </a:xfrm>
+          <a:prstGeom prst="rect">
+            <a:avLst/>
+          </a:prstGeom>
+          <a:noFill/>
+          <a:ln/>
+        </p:spPr>
+        <p:txBody>
+          <a:bodyPr wrap="square" rtlCol="0" anchor="ctr"/>
+          <a:lstStyle/>
+          <a:p>
+            <a:pPr indent="0" marL="0">
+              <a:buNone/>
+            </a:pPr>
+            <a:r>
+              <a:rPr lang="en-US" sz="1800" dirty="0">
+                <a:solidFill>
+                  <a:srgbClr val="FFFFFF"/>
+                </a:solidFill>
+                <a:latin typeface="Calibri" pitchFamily="34" charset="0"/>
+                <a:ea typeface="Calibri" pitchFamily="34" charset="-122"/>
+                <a:cs typeface="Calibri" pitchFamily="34" charset="-120"/>
+              </a:rPr>
+              <a:t>Replication copies the same data to a replica set — solving availability and read scaling.</a:t>
+            </a:r>
+            <a:endParaRPr lang="en-US" sz="1800" dirty="0"/>
+          </a:p>
+        </p:txBody>
+      </p:sp>
+      <p:sp>
+        <p:nvSpPr>
+          <p:cNvPr id="6" name="Shape 4"/>
+          <p:cNvSpPr/>
+          <p:nvPr/>
+        </p:nvSpPr>
+        <p:spPr>
+          <a:xfrm>
+            <a:off x="822960" y="2731770"/>
+            <a:ext cx="109728" cy="109728"/>
+          </a:xfrm>
+          <a:prstGeom prst="rect">
+            <a:avLst/>
+          </a:prstGeom>
+          <a:solidFill>
+            <a:srgbClr val="8B7FD9"/>
+          </a:solidFill>
+          <a:ln/>
+        </p:spPr>
+      </p:sp>
+      <p:sp>
+        <p:nvSpPr>
+          <p:cNvPr id="7" name="Text 5"/>
+          <p:cNvSpPr txBox="1"/>
+          <p:nvPr/>
+        </p:nvSpPr>
+        <p:spPr>
+          <a:xfrm>
+            <a:off x="1143000" y="2385060"/>
+            <a:ext cx="9875520" cy="784860"/>
+          </a:xfrm>
+          <a:prstGeom prst="rect">
+            <a:avLst/>
+          </a:prstGeom>
+          <a:noFill/>
+          <a:ln/>
+        </p:spPr>
+        <p:txBody>
+          <a:bodyPr wrap="square" rtlCol="0" anchor="ctr"/>
+          <a:lstStyle/>
+          <a:p>
+            <a:pPr indent="0" marL="0">
+              <a:buNone/>
+            </a:pPr>
+            <a:r>
+              <a:rPr lang="en-US" sz="1800" dirty="0">
+                <a:solidFill>
+                  <a:srgbClr val="FFFFFF"/>
+                </a:solidFill>
+                <a:latin typeface="Calibri" pitchFamily="34" charset="0"/>
+                <a:ea typeface="Calibri" pitchFamily="34" charset="-122"/>
+                <a:cs typeface="Calibri" pitchFamily="34" charset="-120"/>
+              </a:rPr>
+              <a:t>Writes always go to the primary; reads can go to secondaries, at the cost of possible staleness.</a:t>
+            </a:r>
+            <a:endParaRPr lang="en-US" sz="1800" dirty="0"/>
+          </a:p>
+        </p:txBody>
+      </p:sp>
+      <p:sp>
+        <p:nvSpPr>
+          <p:cNvPr id="8" name="Shape 6"/>
+          <p:cNvSpPr/>
+          <p:nvPr/>
+        </p:nvSpPr>
+        <p:spPr>
+          <a:xfrm>
+            <a:off x="822960" y="3516630"/>
+            <a:ext cx="109728" cy="109728"/>
+          </a:xfrm>
+          <a:prstGeom prst="rect">
+            <a:avLst/>
+          </a:prstGeom>
+          <a:solidFill>
+            <a:srgbClr val="E8A33D"/>
+          </a:solidFill>
+          <a:ln/>
+        </p:spPr>
+      </p:sp>
+      <p:sp>
+        <p:nvSpPr>
+          <p:cNvPr id="9" name="Text 7"/>
+          <p:cNvSpPr txBox="1"/>
+          <p:nvPr/>
+        </p:nvSpPr>
+        <p:spPr>
+          <a:xfrm>
+            <a:off x="1143000" y="3169920"/>
+            <a:ext cx="9875520" cy="784860"/>
+          </a:xfrm>
+          <a:prstGeom prst="rect">
+            <a:avLst/>
+          </a:prstGeom>
+          <a:noFill/>
+          <a:ln/>
+        </p:spPr>
+        <p:txBody>
+          <a:bodyPr wrap="square" rtlCol="0" anchor="ctr"/>
+          <a:lstStyle/>
+          <a:p>
+            <a:pPr indent="0" marL="0">
+              <a:buNone/>
+            </a:pPr>
+            <a:r>
+              <a:rPr lang="en-US" sz="1800" dirty="0">
+                <a:solidFill>
+                  <a:srgbClr val="FFFFFF"/>
+                </a:solidFill>
+                <a:latin typeface="Calibri" pitchFamily="34" charset="0"/>
+                <a:ea typeface="Calibri" pitchFamily="34" charset="-122"/>
+                <a:cs typeface="Calibri" pitchFamily="34" charset="-120"/>
+              </a:rPr>
+              <a:t>Sharding splits different slices of a collection across shards — solving write and storage capacity.</a:t>
+            </a:r>
+            <a:endParaRPr lang="en-US" sz="1800" dirty="0"/>
+          </a:p>
+        </p:txBody>
+      </p:sp>
+      <p:sp>
+        <p:nvSpPr>
+          <p:cNvPr id="10" name="Shape 8"/>
+          <p:cNvSpPr/>
+          <p:nvPr/>
+        </p:nvSpPr>
+        <p:spPr>
+          <a:xfrm>
+            <a:off x="822960" y="4301490"/>
+            <a:ext cx="109728" cy="109728"/>
+          </a:xfrm>
+          <a:prstGeom prst="rect">
+            <a:avLst/>
+          </a:prstGeom>
+          <a:solidFill>
+            <a:srgbClr val="2FE6C4"/>
+          </a:solidFill>
+          <a:ln/>
+        </p:spPr>
+      </p:sp>
+      <p:sp>
+        <p:nvSpPr>
+          <p:cNvPr id="11" name="Text 9"/>
+          <p:cNvSpPr txBox="1"/>
+          <p:nvPr/>
+        </p:nvSpPr>
+        <p:spPr>
+          <a:xfrm>
+            <a:off x="1143000" y="3954780"/>
+            <a:ext cx="9875520" cy="784860"/>
+          </a:xfrm>
+          <a:prstGeom prst="rect">
+            <a:avLst/>
+          </a:prstGeom>
+          <a:noFill/>
+          <a:ln/>
+        </p:spPr>
+        <p:txBody>
+          <a:bodyPr wrap="square" rtlCol="0" anchor="ctr"/>
+          <a:lstStyle/>
+          <a:p>
+            <a:pPr indent="0" marL="0">
+              <a:buNone/>
+            </a:pPr>
+            <a:r>
+              <a:rPr lang="en-US" sz="1800" dirty="0">
+                <a:solidFill>
+                  <a:srgbClr val="FFFFFF"/>
+                </a:solidFill>
+                <a:latin typeface="Calibri" pitchFamily="34" charset="0"/>
+                <a:ea typeface="Calibri" pitchFamily="34" charset="-122"/>
+                <a:cs typeface="Calibri" pitchFamily="34" charset="-120"/>
+              </a:rPr>
+              <a:t>Every query enters through mongos, which uses config-server metadata to route it.</a:t>
+            </a:r>
+            <a:endParaRPr lang="en-US" sz="1800" dirty="0"/>
+          </a:p>
+        </p:txBody>
+      </p:sp>
+      <p:sp>
+        <p:nvSpPr>
+          <p:cNvPr id="12" name="Shape 10"/>
+          <p:cNvSpPr/>
+          <p:nvPr/>
+        </p:nvSpPr>
+        <p:spPr>
+          <a:xfrm>
+            <a:off x="822960" y="5086350"/>
+            <a:ext cx="109728" cy="109728"/>
+          </a:xfrm>
+          <a:prstGeom prst="rect">
+            <a:avLst/>
+          </a:prstGeom>
+          <a:solidFill>
+            <a:srgbClr val="8B7FD9"/>
+          </a:solidFill>
+          <a:ln/>
+        </p:spPr>
+      </p:sp>
+      <p:sp>
+        <p:nvSpPr>
+          <p:cNvPr id="13" name="Text 11"/>
+          <p:cNvSpPr txBox="1"/>
+          <p:nvPr/>
+        </p:nvSpPr>
+        <p:spPr>
+          <a:xfrm>
+            <a:off x="1143000" y="4739640"/>
+            <a:ext cx="9875520" cy="784860"/>
+          </a:xfrm>
+          <a:prstGeom prst="rect">
+            <a:avLst/>
+          </a:prstGeom>
+          <a:noFill/>
+          <a:ln/>
+        </p:spPr>
+        <p:txBody>
+          <a:bodyPr wrap="square" rtlCol="0" anchor="ctr"/>
+          <a:lstStyle/>
+          <a:p>
+            <a:pPr indent="0" marL="0">
+              <a:buNone/>
+            </a:pPr>
+            <a:r>
+              <a:rPr lang="en-US" sz="1800" dirty="0">
+                <a:solidFill>
+                  <a:srgbClr val="FFFFFF"/>
+                </a:solidFill>
+                <a:latin typeface="Calibri" pitchFamily="34" charset="0"/>
+                <a:ea typeface="Calibri" pitchFamily="34" charset="-122"/>
+                <a:cs typeface="Calibri" pitchFamily="34" charset="-120"/>
+              </a:rPr>
+              <a:t>The shard key decides whether capacity really scales.</a:t>
+            </a:r>
+            <a:endParaRPr lang="en-US" sz="1800" dirty="0"/>
+          </a:p>
+        </p:txBody>
+      </p:sp>
+      <p:sp>
+        <p:nvSpPr>
+          <p:cNvPr id="14" name="Shape 12"/>
+          <p:cNvSpPr/>
+          <p:nvPr/>
+        </p:nvSpPr>
+        <p:spPr>
+          <a:xfrm>
+            <a:off x="822960" y="5871210"/>
+            <a:ext cx="109728" cy="109728"/>
+          </a:xfrm>
+          <a:prstGeom prst="rect">
+            <a:avLst/>
+          </a:prstGeom>
+          <a:solidFill>
+            <a:srgbClr val="E8A33D"/>
+          </a:solidFill>
+          <a:ln/>
+        </p:spPr>
+      </p:sp>
+      <p:sp>
+        <p:nvSpPr>
+          <p:cNvPr id="15" name="Text 13"/>
+          <p:cNvSpPr txBox="1"/>
+          <p:nvPr/>
+        </p:nvSpPr>
+        <p:spPr>
+          <a:xfrm>
+            <a:off x="1143000" y="5524500"/>
+            <a:ext cx="9875520" cy="784860"/>
+          </a:xfrm>
+          <a:prstGeom prst="rect">
+            <a:avLst/>
+          </a:prstGeom>
+          <a:noFill/>
+          <a:ln/>
+        </p:spPr>
+        <p:txBody>
+          <a:bodyPr wrap="square" rtlCol="0" anchor="ctr"/>
+          <a:lstStyle/>
+          <a:p>
+            <a:pPr indent="0" marL="0">
+              <a:buNone/>
+            </a:pPr>
+            <a:r>
+              <a:rPr lang="en-US" sz="1800" dirty="0">
+                <a:solidFill>
+                  <a:srgbClr val="FFFFFF"/>
+                </a:solidFill>
+                <a:latin typeface="Calibri" pitchFamily="34" charset="0"/>
+                <a:ea typeface="Calibri" pitchFamily="34" charset="-122"/>
+                <a:cs typeface="Calibri" pitchFamily="34" charset="-120"/>
+              </a:rPr>
+              <a:t>Production clusters use both techniques together.</a:t>
+            </a:r>
+            <a:endParaRPr lang="en-US" sz="1800" dirty="0"/>
+          </a:p>
+        </p:txBody>
+      </p:sp>
+      <p:sp>
+        <p:nvSpPr>
+          <p:cNvPr id="16" name="Text 14"/>
+          <p:cNvSpPr txBox="1"/>
+          <p:nvPr/>
+        </p:nvSpPr>
+        <p:spPr>
+          <a:xfrm>
+            <a:off x="9951415" y="6455664"/>
+            <a:ext cx="2011680" cy="292608"/>
+          </a:xfrm>
+          <a:prstGeom prst="rect">
+            <a:avLst/>
+          </a:prstGeom>
+          <a:noFill/>
+          <a:ln/>
+        </p:spPr>
+        <p:txBody>
+          <a:bodyPr wrap="square" rtlCol="0" anchor="ctr"/>
+          <a:lstStyle/>
+          <a:p>
+            <a:pPr algn="r" indent="0" marL="0">
+              <a:buNone/>
+            </a:pPr>
+            <a:r>
+              <a:rPr lang="en-US" sz="1200" u="sng" dirty="0">
+                <a:solidFill>
+                  <a:srgbClr val="8A939B"/>
+                </a:solidFill>
+                <a:latin typeface="Calibri" pitchFamily="34" charset="0"/>
+                <a:ea typeface="Calibri" pitchFamily="34" charset="-122"/>
+                <a:cs typeface="Calibri" pitchFamily="34" charset="-120"/>
+                <a:hlinkClick r:id="rId1" invalidUrl="" action="" tgtFrame="" tooltip="" history="1" highlightClick="0" endSnd="0">
+                  <a:extLst>
+                    <a:ext uri="{A12FA001-AC4F-418D-AE19-62706E023703}">
+                      <ahyp:hlinkClr xmlns:ahyp="http://schemas.microsoft.com/office/drawing/2018/hyperlinkcolor" val="tx"/>
+                    </a:ext>
+                  </a:extLst>
+                </a:hlinkClick>
+              </a:rPr>
+              <a:t>cuinotes.com</a:t>
+            </a:r>
+            <a:pPr algn="r" indent="0" marL="0">
+              <a:buNone/>
+            </a:pPr>
+            <a:r>
+              <a:rPr lang="en-US" sz="1200" dirty="0">
+                <a:solidFill>
+                  <a:srgbClr val="8A939B"/>
+                </a:solidFill>
+                <a:latin typeface="Calibri" pitchFamily="34" charset="0"/>
+                <a:ea typeface="Calibri" pitchFamily="34" charset="-122"/>
+                <a:cs typeface="Calibri" pitchFamily="34" charset="-120"/>
+              </a:rPr>
+              <a:t>  ·  3</a:t>
+            </a:r>
+            <a:endParaRPr lang="en-US" sz="1200" dirty="0"/>
+          </a:p>
+        </p:txBody>
+      </p:sp>
+    </p:spTree>
+  </p:cSld>
+  <p:clrMapOvr>
+    <a:masterClrMapping/>
+  </p:clrMapOvr>
+</p:sld>
+</file>
+
+<file path=ppt/slides/slide17.xml><?xml version="1.0" encoding="utf-8"?>
+<p:sld xmlns:a="http://schemas.openxmlformats.org/drawingml/2006/main" xmlns:r="http://schemas.openxmlformats.org/officeDocument/2006/relationships" xmlns:p="http://schemas.openxmlformats.org/presentationml/2006/main">
+  <p:cSld name="Slide 3">
+    <p:bg>
+      <p:bgPr>
+        <a:solidFill>
+          <a:srgbClr val="F7F8F9"/>
+        </a:solidFill>
+      </p:bgPr>
+    </p:bg>
+    <p:spTree>
+      <p:nvGrpSpPr>
+        <p:cNvPr id="1" name=""/>
+        <p:cNvGrpSpPr/>
+        <p:nvPr/>
+      </p:nvGrpSpPr>
+      <p:grpSpPr>
+        <a:xfrm>
+          <a:off x="0" y="0"/>
+          <a:ext cx="0" cy="0"/>
+          <a:chOff x="0" y="0"/>
+          <a:chExt cx="0" cy="0"/>
+        </a:xfrm>
+      </p:grpSpPr>
+      <p:sp>
+        <p:nvSpPr>
+          <p:cNvPr id="2" name="Text 0"/>
+          <p:cNvSpPr txBox="1"/>
+          <p:nvPr/>
+        </p:nvSpPr>
+        <p:spPr>
+          <a:xfrm>
+            <a:off x="548640" y="320040"/>
+            <a:ext cx="9144000" cy="292608"/>
+          </a:xfrm>
+          <a:prstGeom prst="rect">
+            <a:avLst/>
+          </a:prstGeom>
+          <a:noFill/>
+          <a:ln/>
+        </p:spPr>
+        <p:txBody>
+          <a:bodyPr wrap="square" rtlCol="0" anchor="ctr"/>
+          <a:lstStyle/>
+          <a:p>
+            <a:pPr indent="0" marL="0">
+              <a:buNone/>
+            </a:pPr>
+            <a:r>
+              <a:rPr lang="en-US" sz="1200" b="1" spc="150" kern="0" dirty="0">
+                <a:solidFill>
+                  <a:srgbClr val="8B7FD9"/>
+                </a:solidFill>
+                <a:latin typeface="Calibri" pitchFamily="34" charset="0"/>
+                <a:ea typeface="Calibri" pitchFamily="34" charset="-122"/>
+                <a:cs typeface="Calibri" pitchFamily="34" charset="-120"/>
+              </a:rPr>
+              <a:t>WORKED EXAMPLE</a:t>
+            </a:r>
+            <a:endParaRPr lang="en-US" sz="1200" dirty="0"/>
+          </a:p>
+        </p:txBody>
+      </p:sp>
+      <p:sp>
+        <p:nvSpPr>
+          <p:cNvPr id="3" name="Text 1"/>
+          <p:cNvSpPr txBox="1"/>
+          <p:nvPr/>
+        </p:nvSpPr>
+        <p:spPr>
+          <a:xfrm>
+            <a:off x="548640" y="566928"/>
+            <a:ext cx="11064240" cy="640080"/>
+          </a:xfrm>
+          <a:prstGeom prst="rect">
+            <a:avLst/>
+          </a:prstGeom>
+          <a:noFill/>
+          <a:ln/>
+        </p:spPr>
+        <p:txBody>
+          <a:bodyPr wrap="square" rtlCol="0" anchor="ctr"/>
+          <a:lstStyle/>
+          <a:p>
+            <a:pPr indent="0" marL="0">
+              <a:buNone/>
+            </a:pPr>
+            <a:r>
+              <a:rPr lang="en-US" sz="2500" b="1" dirty="0">
+                <a:solidFill>
+                  <a:srgbClr val="1F2429"/>
+                </a:solidFill>
+                <a:latin typeface="Calibri" pitchFamily="34" charset="0"/>
+                <a:ea typeface="Calibri" pitchFamily="34" charset="-122"/>
+                <a:cs typeface="Calibri" pitchFamily="34" charset="-120"/>
+              </a:rPr>
+              <a:t>Failover, Step by Step: Three-Member Replica Set</a:t>
+            </a:r>
+            <a:endParaRPr lang="en-US" sz="2500" dirty="0"/>
+          </a:p>
+        </p:txBody>
+      </p:sp>
+      <p:sp>
+        <p:nvSpPr>
+          <p:cNvPr id="4" name="Text 2"/>
+          <p:cNvSpPr txBox="1"/>
+          <p:nvPr/>
+        </p:nvSpPr>
+        <p:spPr>
+          <a:xfrm>
+            <a:off x="9951415" y="6455664"/>
+            <a:ext cx="2011680" cy="292608"/>
+          </a:xfrm>
+          <a:prstGeom prst="rect">
+            <a:avLst/>
+          </a:prstGeom>
+          <a:noFill/>
+          <a:ln/>
+        </p:spPr>
+        <p:txBody>
+          <a:bodyPr wrap="square" rtlCol="0" anchor="ctr"/>
+          <a:lstStyle/>
+          <a:p>
+            <a:pPr algn="r" indent="0" marL="0">
+              <a:buNone/>
+            </a:pPr>
+            <a:r>
+              <a:rPr lang="en-US" sz="1200" u="sng" dirty="0">
+                <a:solidFill>
+                  <a:srgbClr val="8A939B"/>
+                </a:solidFill>
+                <a:latin typeface="Calibri" pitchFamily="34" charset="0"/>
+                <a:ea typeface="Calibri" pitchFamily="34" charset="-122"/>
+                <a:cs typeface="Calibri" pitchFamily="34" charset="-120"/>
+                <a:hlinkClick r:id="rId1" invalidUrl="" action="" tgtFrame="" tooltip="" history="1" highlightClick="0" endSnd="0">
+                  <a:extLst>
+                    <a:ext uri="{A12FA001-AC4F-418D-AE19-62706E023703}">
+                      <ahyp:hlinkClr xmlns:ahyp="http://schemas.microsoft.com/office/drawing/2018/hyperlinkcolor" val="tx"/>
+                    </a:ext>
+                  </a:extLst>
+                </a:hlinkClick>
+              </a:rPr>
+              <a:t>cuinotes.com</a:t>
+            </a:r>
+            <a:pPr algn="r" indent="0" marL="0">
+              <a:buNone/>
+            </a:pPr>
+            <a:r>
+              <a:rPr lang="en-US" sz="1200" dirty="0">
+                <a:solidFill>
+                  <a:srgbClr val="8A939B"/>
+                </a:solidFill>
+                <a:latin typeface="Calibri" pitchFamily="34" charset="0"/>
+                <a:ea typeface="Calibri" pitchFamily="34" charset="-122"/>
+                <a:cs typeface="Calibri" pitchFamily="34" charset="-120"/>
+              </a:rPr>
+              <a:t>  ·  8</a:t>
+            </a:r>
+            <a:endParaRPr lang="en-US" sz="1200" dirty="0"/>
+          </a:p>
+        </p:txBody>
+      </p:sp>
+      <p:sp>
+        <p:nvSpPr>
+          <p:cNvPr id="5" name="Text 3"/>
+          <p:cNvSpPr txBox="1"/>
+          <p:nvPr/>
+        </p:nvSpPr>
+        <p:spPr>
+          <a:xfrm>
+            <a:off x="548640" y="1188720"/>
+            <a:ext cx="11064240" cy="640080"/>
+          </a:xfrm>
+          <a:prstGeom prst="rect">
+            <a:avLst/>
+          </a:prstGeom>
+          <a:noFill/>
+          <a:ln/>
+        </p:spPr>
+        <p:txBody>
+          <a:bodyPr wrap="square" rtlCol="0" anchor="ctr"/>
+          <a:lstStyle/>
+          <a:p>
+            <a:pPr indent="0" marL="0">
+              <a:lnSpc>
+                <a:spcPct val="120000"/>
+              </a:lnSpc>
+              <a:buNone/>
+            </a:pPr>
+            <a:r>
+              <a:rPr lang="en-US" sz="1800" dirty="0">
+                <a:solidFill>
+                  <a:srgbClr val="1F2429"/>
+                </a:solidFill>
+                <a:latin typeface="Calibri" pitchFamily="34" charset="0"/>
+                <a:ea typeface="Calibri" pitchFamily="34" charset="-122"/>
+                <a:cs typeface="Calibri" pitchFamily="34" charset="-120"/>
+              </a:rPr>
+              <a:t>Members P (primary), S1 and S2 (secondaries). At 10:00, P crashes. Here is what happens next.</a:t>
+            </a:r>
+            <a:endParaRPr lang="en-US" sz="1800" dirty="0"/>
+          </a:p>
+        </p:txBody>
+      </p:sp>
+      <p:sp>
+        <p:nvSpPr>
+          <p:cNvPr id="6" name="Shape 4"/>
+          <p:cNvSpPr/>
+          <p:nvPr/>
+        </p:nvSpPr>
+        <p:spPr>
+          <a:xfrm>
+            <a:off x="548640" y="2057400"/>
+            <a:ext cx="5372100" cy="2103120"/>
+          </a:xfrm>
+          <a:prstGeom prst="roundRect">
+            <a:avLst>
+              <a:gd name="adj" fmla="val 3478"/>
+            </a:avLst>
+          </a:prstGeom>
+          <a:solidFill>
+            <a:srgbClr val="FFFFFF"/>
+          </a:solidFill>
+          <a:ln w="22225">
+            <a:solidFill>
+              <a:srgbClr val="2FE6C4"/>
+            </a:solidFill>
+            <a:prstDash val="solid"/>
+          </a:ln>
+          <a:effectLst>
+            <a:outerShdw sx="100000" sy="100000" kx="0" ky="0" algn="bl" rotWithShape="0" blurRad="63500" dist="25400" dir="5400000">
+              <a:srgbClr val="1F2429">
+                <a:alpha val="15000"/>
+              </a:srgbClr>
+            </a:outerShdw>
+          </a:effectLst>
+        </p:spPr>
+      </p:sp>
+      <p:sp>
+        <p:nvSpPr>
+          <p:cNvPr id="7" name="Shape 5"/>
+          <p:cNvSpPr/>
+          <p:nvPr/>
+        </p:nvSpPr>
+        <p:spPr>
+          <a:xfrm>
+            <a:off x="713232" y="2203704"/>
+            <a:ext cx="201168" cy="201168"/>
+          </a:xfrm>
+          <a:prstGeom prst="ellipse">
+            <a:avLst/>
+          </a:prstGeom>
+          <a:solidFill>
+            <a:srgbClr val="2FE6C4"/>
+          </a:solidFill>
+          <a:ln/>
+        </p:spPr>
+      </p:sp>
+      <p:sp>
+        <p:nvSpPr>
+          <p:cNvPr id="8" name="Text 6"/>
+          <p:cNvSpPr txBox="1"/>
+          <p:nvPr/>
+        </p:nvSpPr>
+        <p:spPr>
+          <a:xfrm>
+            <a:off x="1005840" y="2148840"/>
+            <a:ext cx="4732020" cy="365760"/>
+          </a:xfrm>
+          <a:prstGeom prst="rect">
+            <a:avLst/>
+          </a:prstGeom>
+          <a:noFill/>
+          <a:ln/>
+        </p:spPr>
+        <p:txBody>
+          <a:bodyPr wrap="square" rtlCol="0" anchor="t"/>
+          <a:lstStyle/>
+          <a:p>
+            <a:pPr indent="0" marL="0">
+              <a:buNone/>
+            </a:pPr>
+            <a:r>
+              <a:rPr lang="en-US" sz="1800" b="1" dirty="0">
+                <a:solidFill>
+                  <a:srgbClr val="1F2429"/>
+                </a:solidFill>
+                <a:latin typeface="Calibri" pitchFamily="34" charset="0"/>
+                <a:ea typeface="Calibri" pitchFamily="34" charset="-122"/>
+                <a:cs typeface="Calibri" pitchFamily="34" charset="-120"/>
+              </a:rPr>
+              <a:t>Step 1 — Heartbeats time out</a:t>
+            </a:r>
+            <a:endParaRPr lang="en-US" sz="1800" dirty="0"/>
+          </a:p>
+        </p:txBody>
+      </p:sp>
+      <p:sp>
+        <p:nvSpPr>
+          <p:cNvPr id="9" name="Text 7"/>
+          <p:cNvSpPr txBox="1"/>
+          <p:nvPr/>
+        </p:nvSpPr>
+        <p:spPr>
+          <a:xfrm>
+            <a:off x="749808" y="2560320"/>
+            <a:ext cx="4969764" cy="1508760"/>
+          </a:xfrm>
+          <a:prstGeom prst="rect">
+            <a:avLst/>
+          </a:prstGeom>
+          <a:noFill/>
+          <a:ln/>
+        </p:spPr>
+        <p:txBody>
+          <a:bodyPr wrap="square" rtlCol="0" anchor="t"/>
+          <a:lstStyle/>
+          <a:p>
+            <a:pPr indent="0" marL="0">
+              <a:lnSpc>
+                <a:spcPct val="112000"/>
+              </a:lnSpc>
+              <a:buNone/>
+            </a:pPr>
+            <a:r>
+              <a:rPr lang="en-US" sz="1200" dirty="0">
+                <a:solidFill>
+                  <a:srgbClr val="6B7480"/>
+                </a:solidFill>
+                <a:latin typeface="Calibri" pitchFamily="34" charset="0"/>
+                <a:ea typeface="Calibri" pitchFamily="34" charset="-122"/>
+                <a:cs typeface="Calibri" pitchFamily="34" charset="-120"/>
+              </a:rPr>
+              <a:t>S1 and S2 stop hearing from P and mark it unreachable within seconds.</a:t>
+            </a:r>
+            <a:endParaRPr lang="en-US" sz="1200" dirty="0"/>
+          </a:p>
+        </p:txBody>
+      </p:sp>
+      <p:sp>
+        <p:nvSpPr>
+          <p:cNvPr id="10" name="Shape 8"/>
+          <p:cNvSpPr/>
+          <p:nvPr/>
+        </p:nvSpPr>
+        <p:spPr>
+          <a:xfrm>
+            <a:off x="6240780" y="2057400"/>
+            <a:ext cx="5372100" cy="2103120"/>
+          </a:xfrm>
+          <a:prstGeom prst="roundRect">
+            <a:avLst>
+              <a:gd name="adj" fmla="val 3478"/>
+            </a:avLst>
+          </a:prstGeom>
+          <a:solidFill>
+            <a:srgbClr val="FFFFFF"/>
+          </a:solidFill>
+          <a:ln w="22225">
+            <a:solidFill>
+              <a:srgbClr val="8B7FD9"/>
+            </a:solidFill>
+            <a:prstDash val="solid"/>
+          </a:ln>
+          <a:effectLst>
+            <a:outerShdw sx="100000" sy="100000" kx="0" ky="0" algn="bl" rotWithShape="0" blurRad="63500" dist="25400" dir="5400000">
+              <a:srgbClr val="1F2429">
+                <a:alpha val="15000"/>
+              </a:srgbClr>
+            </a:outerShdw>
+          </a:effectLst>
+        </p:spPr>
+      </p:sp>
+      <p:sp>
+        <p:nvSpPr>
+          <p:cNvPr id="11" name="Shape 9"/>
+          <p:cNvSpPr/>
+          <p:nvPr/>
+        </p:nvSpPr>
+        <p:spPr>
+          <a:xfrm>
+            <a:off x="6405372" y="2203704"/>
+            <a:ext cx="201168" cy="201168"/>
+          </a:xfrm>
+          <a:prstGeom prst="ellipse">
+            <a:avLst/>
+          </a:prstGeom>
+          <a:solidFill>
+            <a:srgbClr val="8B7FD9"/>
+          </a:solidFill>
+          <a:ln/>
+        </p:spPr>
+      </p:sp>
+      <p:sp>
+        <p:nvSpPr>
+          <p:cNvPr id="12" name="Text 10"/>
+          <p:cNvSpPr txBox="1"/>
+          <p:nvPr/>
+        </p:nvSpPr>
+        <p:spPr>
+          <a:xfrm>
+            <a:off x="6697980" y="2148840"/>
+            <a:ext cx="4732020" cy="365760"/>
+          </a:xfrm>
+          <a:prstGeom prst="rect">
+            <a:avLst/>
+          </a:prstGeom>
+          <a:noFill/>
+          <a:ln/>
+        </p:spPr>
+        <p:txBody>
+          <a:bodyPr wrap="square" rtlCol="0" anchor="t"/>
+          <a:lstStyle/>
+          <a:p>
+            <a:pPr indent="0" marL="0">
+              <a:buNone/>
+            </a:pPr>
+            <a:r>
+              <a:rPr lang="en-US" sz="1800" b="1" dirty="0">
+                <a:solidFill>
+                  <a:srgbClr val="1F2429"/>
+                </a:solidFill>
+                <a:latin typeface="Calibri" pitchFamily="34" charset="0"/>
+                <a:ea typeface="Calibri" pitchFamily="34" charset="-122"/>
+                <a:cs typeface="Calibri" pitchFamily="34" charset="-120"/>
+              </a:rPr>
+              <a:t>Step 2 — Election</a:t>
+            </a:r>
+            <a:endParaRPr lang="en-US" sz="1800" dirty="0"/>
+          </a:p>
+        </p:txBody>
+      </p:sp>
+      <p:sp>
+        <p:nvSpPr>
+          <p:cNvPr id="13" name="Text 11"/>
+          <p:cNvSpPr txBox="1"/>
+          <p:nvPr/>
+        </p:nvSpPr>
+        <p:spPr>
+          <a:xfrm>
+            <a:off x="6441948" y="2560320"/>
+            <a:ext cx="4969764" cy="1508760"/>
+          </a:xfrm>
+          <a:prstGeom prst="rect">
+            <a:avLst/>
+          </a:prstGeom>
+          <a:noFill/>
+          <a:ln/>
+        </p:spPr>
+        <p:txBody>
+          <a:bodyPr wrap="square" rtlCol="0" anchor="t"/>
+          <a:lstStyle/>
+          <a:p>
+            <a:pPr indent="0" marL="0">
+              <a:lnSpc>
+                <a:spcPct val="112000"/>
+              </a:lnSpc>
+              <a:buNone/>
+            </a:pPr>
+            <a:r>
+              <a:rPr lang="en-US" sz="1200" dirty="0">
+                <a:solidFill>
+                  <a:srgbClr val="6B7480"/>
+                </a:solidFill>
+                <a:latin typeface="Calibri" pitchFamily="34" charset="0"/>
+                <a:ea typeface="Calibri" pitchFamily="34" charset="-122"/>
+                <a:cs typeface="Calibri" pitchFamily="34" charset="-120"/>
+              </a:rPr>
+              <a:t>S1 and S2 vote. Two of three votes is a majority, so the election succeeds.</a:t>
+            </a:r>
+            <a:endParaRPr lang="en-US" sz="1200" dirty="0"/>
+          </a:p>
+        </p:txBody>
+      </p:sp>
+    </p:spTree>
+  </p:cSld>
+  <p:clrMapOvr>
+    <a:masterClrMapping/>
+  </p:clrMapOvr>
+</p:sld>
+</file>
+
+<file path=ppt/slides/slide18.xml><?xml version="1.0" encoding="utf-8"?>
+<p:sld xmlns:a="http://schemas.openxmlformats.org/drawingml/2006/main" xmlns:r="http://schemas.openxmlformats.org/officeDocument/2006/relationships" xmlns:p="http://schemas.openxmlformats.org/presentationml/2006/main">
+  <p:cSld name="Slide 10">
+    <p:bg>
+      <p:bgPr>
+        <a:solidFill>
+          <a:srgbClr val="F7F8F9"/>
+        </a:solidFill>
+      </p:bgPr>
+    </p:bg>
+    <p:spTree>
+      <p:nvGrpSpPr>
+        <p:cNvPr id="1" name=""/>
+        <p:cNvGrpSpPr/>
+        <p:nvPr/>
+      </p:nvGrpSpPr>
+      <p:grpSpPr>
+        <a:xfrm>
+          <a:off x="0" y="0"/>
+          <a:ext cx="0" cy="0"/>
+          <a:chOff x="0" y="0"/>
+          <a:chExt cx="0" cy="0"/>
+        </a:xfrm>
+      </p:grpSpPr>
+      <p:sp>
+        <p:nvSpPr>
+          <p:cNvPr id="2" name="Text 0"/>
+          <p:cNvSpPr txBox="1"/>
+          <p:nvPr/>
+        </p:nvSpPr>
+        <p:spPr>
+          <a:xfrm>
+            <a:off x="548640" y="320040"/>
+            <a:ext cx="9144000" cy="292608"/>
+          </a:xfrm>
+          <a:prstGeom prst="rect">
+            <a:avLst/>
+          </a:prstGeom>
+          <a:noFill/>
+          <a:ln/>
+        </p:spPr>
+        <p:txBody>
+          <a:bodyPr wrap="square" rtlCol="0" anchor="ctr"/>
+          <a:lstStyle/>
+          <a:p>
+            <a:pPr indent="0" marL="0">
+              <a:buNone/>
+            </a:pPr>
+            <a:r>
+              <a:rPr lang="en-US" sz="1200" b="1" spc="150" kern="0" dirty="0">
+                <a:solidFill>
+                  <a:srgbClr val="8B7FD9"/>
+                </a:solidFill>
+                <a:latin typeface="Calibri" pitchFamily="34" charset="0"/>
+                <a:ea typeface="Calibri" pitchFamily="34" charset="-122"/>
+                <a:cs typeface="Calibri" pitchFamily="34" charset="-120"/>
+              </a:rPr>
+              <a:t>WORKED EXAMPLE</a:t>
+            </a:r>
+            <a:endParaRPr lang="en-US" sz="1200" dirty="0"/>
+          </a:p>
+        </p:txBody>
+      </p:sp>
+      <p:sp>
+        <p:nvSpPr>
+          <p:cNvPr id="3" name="Text 1"/>
+          <p:cNvSpPr txBox="1"/>
+          <p:nvPr/>
+        </p:nvSpPr>
+        <p:spPr>
+          <a:xfrm>
+            <a:off x="548640" y="566928"/>
+            <a:ext cx="11064240" cy="640080"/>
+          </a:xfrm>
+          <a:prstGeom prst="rect">
+            <a:avLst/>
+          </a:prstGeom>
+          <a:noFill/>
+          <a:ln/>
+        </p:spPr>
+        <p:txBody>
+          <a:bodyPr wrap="square" rtlCol="0" anchor="ctr"/>
+          <a:lstStyle/>
+          <a:p>
+            <a:pPr indent="0" marL="0">
+              <a:buNone/>
+            </a:pPr>
+            <a:r>
+              <a:rPr lang="en-US" sz="2500" b="1" dirty="0">
+                <a:solidFill>
+                  <a:srgbClr val="1F2429"/>
+                </a:solidFill>
+                <a:latin typeface="Calibri" pitchFamily="34" charset="0"/>
+                <a:ea typeface="Calibri" pitchFamily="34" charset="-122"/>
+                <a:cs typeface="Calibri" pitchFamily="34" charset="-120"/>
+              </a:rPr>
+              <a:t>Choosing a Shard Key: studentId vs. Enrollment Year</a:t>
+            </a:r>
+            <a:endParaRPr lang="en-US" sz="2500" dirty="0"/>
+          </a:p>
+        </p:txBody>
+      </p:sp>
+      <p:sp>
+        <p:nvSpPr>
+          <p:cNvPr id="4" name="Text 2"/>
+          <p:cNvSpPr txBox="1"/>
+          <p:nvPr/>
+        </p:nvSpPr>
+        <p:spPr>
+          <a:xfrm>
+            <a:off x="9951415" y="6455664"/>
+            <a:ext cx="2011680" cy="292608"/>
+          </a:xfrm>
+          <a:prstGeom prst="rect">
+            <a:avLst/>
+          </a:prstGeom>
+          <a:noFill/>
+          <a:ln/>
+        </p:spPr>
+        <p:txBody>
+          <a:bodyPr wrap="square" rtlCol="0" anchor="ctr"/>
+          <a:lstStyle/>
+          <a:p>
+            <a:pPr algn="r" indent="0" marL="0">
+              <a:buNone/>
+            </a:pPr>
+            <a:r>
+              <a:rPr lang="en-US" sz="1200" u="sng" dirty="0">
+                <a:solidFill>
+                  <a:srgbClr val="8A939B"/>
+                </a:solidFill>
+                <a:latin typeface="Calibri" pitchFamily="34" charset="0"/>
+                <a:ea typeface="Calibri" pitchFamily="34" charset="-122"/>
+                <a:cs typeface="Calibri" pitchFamily="34" charset="-120"/>
+                <a:hlinkClick r:id="rId1" invalidUrl="" action="" tgtFrame="" tooltip="" history="1" highlightClick="0" endSnd="0">
+                  <a:extLst>
+                    <a:ext uri="{A12FA001-AC4F-418D-AE19-62706E023703}">
+                      <ahyp:hlinkClr xmlns:ahyp="http://schemas.microsoft.com/office/drawing/2018/hyperlinkcolor" val="tx"/>
+                    </a:ext>
+                  </a:extLst>
+                </a:hlinkClick>
+              </a:rPr>
+              <a:t>cuinotes.com</a:t>
+            </a:r>
+            <a:pPr algn="r" indent="0" marL="0">
+              <a:buNone/>
+            </a:pPr>
+            <a:r>
+              <a:rPr lang="en-US" sz="1200" dirty="0">
+                <a:solidFill>
+                  <a:srgbClr val="8A939B"/>
+                </a:solidFill>
+                <a:latin typeface="Calibri" pitchFamily="34" charset="0"/>
+                <a:ea typeface="Calibri" pitchFamily="34" charset="-122"/>
+                <a:cs typeface="Calibri" pitchFamily="34" charset="-120"/>
+              </a:rPr>
+              <a:t>  ·  13</a:t>
+            </a:r>
+            <a:endParaRPr lang="en-US" sz="1200" dirty="0"/>
+          </a:p>
+        </p:txBody>
+      </p:sp>
+      <p:sp>
+        <p:nvSpPr>
+          <p:cNvPr id="5" name="Text 3"/>
+          <p:cNvSpPr txBox="1"/>
+          <p:nvPr/>
+        </p:nvSpPr>
+        <p:spPr>
+          <a:xfrm>
+            <a:off x="548640" y="1188720"/>
+            <a:ext cx="11064240" cy="411480"/>
+          </a:xfrm>
+          <a:prstGeom prst="rect">
+            <a:avLst/>
+          </a:prstGeom>
+          <a:noFill/>
+          <a:ln/>
+        </p:spPr>
+        <p:txBody>
+          <a:bodyPr wrap="square" rtlCol="0" anchor="ctr"/>
+          <a:lstStyle/>
+          <a:p>
+            <a:pPr indent="0" marL="0">
+              <a:lnSpc>
+                <a:spcPct val="120000"/>
+              </a:lnSpc>
+              <a:buNone/>
+            </a:pPr>
+            <a:r>
+              <a:rPr lang="en-US" sz="1800" dirty="0">
+                <a:solidFill>
+                  <a:srgbClr val="1F2429"/>
+                </a:solidFill>
+                <a:latin typeface="Calibri" pitchFamily="34" charset="0"/>
+                <a:ea typeface="Calibri" pitchFamily="34" charset="-122"/>
+                <a:cs typeface="Calibri" pitchFamily="34" charset="-120"/>
+              </a:rPr>
+              <a:t>Same students collection, three shards. Compare two candidate shard keys on the three criteria.</a:t>
+            </a:r>
+            <a:endParaRPr lang="en-US" sz="1800" dirty="0"/>
+          </a:p>
+        </p:txBody>
+      </p:sp>
+      <p:sp>
+        <p:nvSpPr>
+          <p:cNvPr id="6" name="Shape 4"/>
+          <p:cNvSpPr/>
+          <p:nvPr/>
+        </p:nvSpPr>
+        <p:spPr>
+          <a:xfrm>
+            <a:off x="548640" y="1691640"/>
+            <a:ext cx="3474720" cy="1965960"/>
+          </a:xfrm>
+          <a:prstGeom prst="roundRect">
+            <a:avLst>
+              <a:gd name="adj" fmla="val 3721"/>
+            </a:avLst>
+          </a:prstGeom>
+          <a:solidFill>
+            <a:srgbClr val="FFFFFF"/>
+          </a:solidFill>
+          <a:ln w="22225">
+            <a:solidFill>
+              <a:srgbClr val="2FE6C4"/>
+            </a:solidFill>
+            <a:prstDash val="solid"/>
+          </a:ln>
+          <a:effectLst>
+            <a:outerShdw sx="100000" sy="100000" kx="0" ky="0" algn="bl" rotWithShape="0" blurRad="63500" dist="25400" dir="5400000">
+              <a:srgbClr val="1F2429">
+                <a:alpha val="15000"/>
+              </a:srgbClr>
+            </a:outerShdw>
+          </a:effectLst>
+        </p:spPr>
+      </p:sp>
+      <p:sp>
+        <p:nvSpPr>
+          <p:cNvPr id="7" name="Shape 5"/>
+          <p:cNvSpPr/>
+          <p:nvPr/>
+        </p:nvSpPr>
+        <p:spPr>
+          <a:xfrm>
+            <a:off x="713232" y="1837944"/>
+            <a:ext cx="201168" cy="201168"/>
+          </a:xfrm>
+          <a:prstGeom prst="ellipse">
+            <a:avLst/>
+          </a:prstGeom>
+          <a:solidFill>
+            <a:srgbClr val="2FE6C4"/>
+          </a:solidFill>
+          <a:ln/>
+        </p:spPr>
+      </p:sp>
+      <p:sp>
+        <p:nvSpPr>
+          <p:cNvPr id="8" name="Text 6"/>
+          <p:cNvSpPr txBox="1"/>
+          <p:nvPr/>
+        </p:nvSpPr>
+        <p:spPr>
+          <a:xfrm>
+            <a:off x="1005840" y="1783080"/>
+            <a:ext cx="2834640" cy="365760"/>
+          </a:xfrm>
+          <a:prstGeom prst="rect">
+            <a:avLst/>
+          </a:prstGeom>
+          <a:noFill/>
+          <a:ln/>
+        </p:spPr>
+        <p:txBody>
+          <a:bodyPr wrap="square" rtlCol="0" anchor="t"/>
+          <a:lstStyle/>
+          <a:p>
+            <a:pPr indent="0" marL="0">
+              <a:buNone/>
+            </a:pPr>
+            <a:r>
+              <a:rPr lang="en-US" sz="1800" b="1" dirty="0">
+                <a:solidFill>
+                  <a:srgbClr val="1F2429"/>
+                </a:solidFill>
+                <a:latin typeface="Calibri" pitchFamily="34" charset="0"/>
+                <a:ea typeface="Calibri" pitchFamily="34" charset="-122"/>
+                <a:cs typeface="Calibri" pitchFamily="34" charset="-120"/>
+              </a:rPr>
+              <a:t>High cardinality</a:t>
+            </a:r>
+            <a:endParaRPr lang="en-US" sz="1800" dirty="0"/>
+          </a:p>
+        </p:txBody>
+      </p:sp>
+      <p:sp>
+        <p:nvSpPr>
+          <p:cNvPr id="9" name="Text 7"/>
+          <p:cNvSpPr txBox="1"/>
+          <p:nvPr/>
+        </p:nvSpPr>
+        <p:spPr>
+          <a:xfrm>
+            <a:off x="749808" y="2194560"/>
+            <a:ext cx="3072384" cy="1371600"/>
+          </a:xfrm>
+          <a:prstGeom prst="rect">
+            <a:avLst/>
+          </a:prstGeom>
+          <a:noFill/>
+          <a:ln/>
+        </p:spPr>
+        <p:txBody>
+          <a:bodyPr wrap="square" rtlCol="0" anchor="t"/>
+          <a:lstStyle/>
+          <a:p>
+            <a:pPr indent="0" marL="0">
+              <a:lnSpc>
+                <a:spcPct val="112000"/>
+              </a:lnSpc>
+              <a:buNone/>
+            </a:pPr>
+            <a:r>
+              <a:rPr lang="en-US" sz="1200" dirty="0">
+                <a:solidFill>
+                  <a:srgbClr val="6B7480"/>
+                </a:solidFill>
+                <a:latin typeface="Calibri" pitchFamily="34" charset="0"/>
+                <a:ea typeface="Calibri" pitchFamily="34" charset="-122"/>
+                <a:cs typeface="Calibri" pitchFamily="34" charset="-120"/>
+              </a:rPr>
+              <a:t>studentId has ~100,000 values, so many chunks. Enrollment year has 4 values, so few chunks.</a:t>
+            </a:r>
+            <a:endParaRPr lang="en-US" sz="1200" dirty="0"/>
+          </a:p>
+        </p:txBody>
+      </p:sp>
+      <p:sp>
+        <p:nvSpPr>
+          <p:cNvPr id="10" name="Shape 8"/>
+          <p:cNvSpPr/>
+          <p:nvPr/>
+        </p:nvSpPr>
+        <p:spPr>
+          <a:xfrm>
+            <a:off x="4343400" y="1691640"/>
+            <a:ext cx="3474720" cy="1965960"/>
+          </a:xfrm>
+          <a:prstGeom prst="roundRect">
+            <a:avLst>
+              <a:gd name="adj" fmla="val 3721"/>
+            </a:avLst>
+          </a:prstGeom>
+          <a:solidFill>
+            <a:srgbClr val="FFFFFF"/>
+          </a:solidFill>
+          <a:ln w="22225">
+            <a:solidFill>
+              <a:srgbClr val="8B7FD9"/>
+            </a:solidFill>
+            <a:prstDash val="solid"/>
+          </a:ln>
+          <a:effectLst>
+            <a:outerShdw sx="100000" sy="100000" kx="0" ky="0" algn="bl" rotWithShape="0" blurRad="63500" dist="25400" dir="5400000">
+              <a:srgbClr val="1F2429">
+                <a:alpha val="15000"/>
+              </a:srgbClr>
+            </a:outerShdw>
+          </a:effectLst>
+        </p:spPr>
+      </p:sp>
+      <p:sp>
+        <p:nvSpPr>
+          <p:cNvPr id="11" name="Shape 9"/>
+          <p:cNvSpPr/>
+          <p:nvPr/>
+        </p:nvSpPr>
+        <p:spPr>
+          <a:xfrm>
+            <a:off x="4507992" y="1837944"/>
+            <a:ext cx="201168" cy="201168"/>
+          </a:xfrm>
+          <a:prstGeom prst="ellipse">
+            <a:avLst/>
+          </a:prstGeom>
+          <a:solidFill>
+            <a:srgbClr val="8B7FD9"/>
+          </a:solidFill>
+          <a:ln/>
+        </p:spPr>
+      </p:sp>
+      <p:sp>
+        <p:nvSpPr>
+          <p:cNvPr id="12" name="Text 10"/>
+          <p:cNvSpPr txBox="1"/>
+          <p:nvPr/>
+        </p:nvSpPr>
+        <p:spPr>
+          <a:xfrm>
+            <a:off x="4800600" y="1783080"/>
+            <a:ext cx="2834640" cy="365760"/>
+          </a:xfrm>
+          <a:prstGeom prst="rect">
+            <a:avLst/>
+          </a:prstGeom>
+          <a:noFill/>
+          <a:ln/>
+        </p:spPr>
+        <p:txBody>
+          <a:bodyPr wrap="square" rtlCol="0" anchor="t"/>
+          <a:lstStyle/>
+          <a:p>
+            <a:pPr indent="0" marL="0">
+              <a:buNone/>
+            </a:pPr>
+            <a:r>
+              <a:rPr lang="en-US" sz="1800" b="1" dirty="0">
+                <a:solidFill>
+                  <a:srgbClr val="1F2429"/>
+                </a:solidFill>
+                <a:latin typeface="Calibri" pitchFamily="34" charset="0"/>
+                <a:ea typeface="Calibri" pitchFamily="34" charset="-122"/>
+                <a:cs typeface="Calibri" pitchFamily="34" charset="-120"/>
+              </a:rPr>
+              <a:t>Even distribution</a:t>
+            </a:r>
+            <a:endParaRPr lang="en-US" sz="1800" dirty="0"/>
+          </a:p>
+        </p:txBody>
+      </p:sp>
+      <p:sp>
+        <p:nvSpPr>
+          <p:cNvPr id="13" name="Text 11"/>
+          <p:cNvSpPr txBox="1"/>
+          <p:nvPr/>
+        </p:nvSpPr>
+        <p:spPr>
+          <a:xfrm>
+            <a:off x="4544568" y="2194560"/>
+            <a:ext cx="3072384" cy="1371600"/>
+          </a:xfrm>
+          <a:prstGeom prst="rect">
+            <a:avLst/>
+          </a:prstGeom>
+          <a:noFill/>
+          <a:ln/>
+        </p:spPr>
+        <p:txBody>
+          <a:bodyPr wrap="square" rtlCol="0" anchor="t"/>
+          <a:lstStyle/>
+          <a:p>
+            <a:pPr indent="0" marL="0">
+              <a:lnSpc>
+                <a:spcPct val="112000"/>
+              </a:lnSpc>
+              <a:buNone/>
+            </a:pPr>
+            <a:r>
+              <a:rPr lang="en-US" sz="1200" dirty="0">
+                <a:solidFill>
+                  <a:srgbClr val="6B7480"/>
+                </a:solidFill>
+                <a:latin typeface="Calibri" pitchFamily="34" charset="0"/>
+                <a:ea typeface="Calibri" pitchFamily="34" charset="-122"/>
+                <a:cs typeface="Calibri" pitchFamily="34" charset="-120"/>
+              </a:rPr>
+              <a:t>studentId spreads evenly across the range. Enrollment year puts whole cohorts on one shard.</a:t>
+            </a:r>
+            <a:endParaRPr lang="en-US" sz="1200" dirty="0"/>
+          </a:p>
+        </p:txBody>
+      </p:sp>
+      <p:sp>
+        <p:nvSpPr>
+          <p:cNvPr id="14" name="Shape 12"/>
+          <p:cNvSpPr/>
+          <p:nvPr/>
+        </p:nvSpPr>
+        <p:spPr>
+          <a:xfrm>
+            <a:off x="8138160" y="1691640"/>
+            <a:ext cx="3474720" cy="1965960"/>
+          </a:xfrm>
+          <a:prstGeom prst="roundRect">
+            <a:avLst>
+              <a:gd name="adj" fmla="val 3721"/>
+            </a:avLst>
+          </a:prstGeom>
+          <a:solidFill>
+            <a:srgbClr val="FFFFFF"/>
+          </a:solidFill>
+          <a:ln w="22225">
+            <a:solidFill>
+              <a:srgbClr val="E8A33D"/>
+            </a:solidFill>
+            <a:prstDash val="solid"/>
+          </a:ln>
+          <a:effectLst>
+            <a:outerShdw sx="100000" sy="100000" kx="0" ky="0" algn="bl" rotWithShape="0" blurRad="63500" dist="25400" dir="5400000">
+              <a:srgbClr val="1F2429">
+                <a:alpha val="15000"/>
+              </a:srgbClr>
+            </a:outerShdw>
+          </a:effectLst>
+        </p:spPr>
+      </p:sp>
+      <p:sp>
+        <p:nvSpPr>
+          <p:cNvPr id="15" name="Shape 13"/>
+          <p:cNvSpPr/>
+          <p:nvPr/>
+        </p:nvSpPr>
+        <p:spPr>
+          <a:xfrm>
+            <a:off x="8302752" y="1837944"/>
+            <a:ext cx="201168" cy="201168"/>
+          </a:xfrm>
+          <a:prstGeom prst="ellipse">
+            <a:avLst/>
+          </a:prstGeom>
+          <a:solidFill>
+            <a:srgbClr val="E8A33D"/>
+          </a:solidFill>
+          <a:ln/>
+        </p:spPr>
+      </p:sp>
+      <p:sp>
+        <p:nvSpPr>
+          <p:cNvPr id="16" name="Text 14"/>
+          <p:cNvSpPr txBox="1"/>
+          <p:nvPr/>
+        </p:nvSpPr>
+        <p:spPr>
+          <a:xfrm>
+            <a:off x="8595360" y="1783080"/>
+            <a:ext cx="2834640" cy="365760"/>
+          </a:xfrm>
+          <a:prstGeom prst="rect">
+            <a:avLst/>
+          </a:prstGeom>
+          <a:noFill/>
+          <a:ln/>
+        </p:spPr>
+        <p:txBody>
+          <a:bodyPr wrap="square" rtlCol="0" anchor="t"/>
+          <a:lstStyle/>
+          <a:p>
+            <a:pPr indent="0" marL="0">
+              <a:buNone/>
+            </a:pPr>
+            <a:r>
+              <a:rPr lang="en-US" sz="1800" b="1" dirty="0">
+                <a:solidFill>
+                  <a:srgbClr val="1F2429"/>
+                </a:solidFill>
+                <a:latin typeface="Calibri" pitchFamily="34" charset="0"/>
+                <a:ea typeface="Calibri" pitchFamily="34" charset="-122"/>
+                <a:cs typeface="Calibri" pitchFamily="34" charset="-120"/>
+              </a:rPr>
+              <a:t>Avoiding hotspots</a:t>
+            </a:r>
+            <a:endParaRPr lang="en-US" sz="1800" dirty="0"/>
+          </a:p>
+        </p:txBody>
+      </p:sp>
+      <p:sp>
+        <p:nvSpPr>
+          <p:cNvPr id="17" name="Text 15"/>
+          <p:cNvSpPr txBox="1"/>
+          <p:nvPr/>
+        </p:nvSpPr>
+        <p:spPr>
+          <a:xfrm>
+            <a:off x="8339328" y="2194560"/>
+            <a:ext cx="3072384" cy="1371600"/>
+          </a:xfrm>
+          <a:prstGeom prst="rect">
+            <a:avLst/>
+          </a:prstGeom>
+          <a:noFill/>
+          <a:ln/>
+        </p:spPr>
+        <p:txBody>
+          <a:bodyPr wrap="square" rtlCol="0" anchor="t"/>
+          <a:lstStyle/>
+          <a:p>
+            <a:pPr indent="0" marL="0">
+              <a:lnSpc>
+                <a:spcPct val="112000"/>
+              </a:lnSpc>
+              <a:buNone/>
+            </a:pPr>
+            <a:r>
+              <a:rPr lang="en-US" sz="1200" dirty="0">
+                <a:solidFill>
+                  <a:srgbClr val="6B7480"/>
+                </a:solidFill>
+                <a:latin typeface="Calibri" pitchFamily="34" charset="0"/>
+                <a:ea typeface="Calibri" pitchFamily="34" charset="-122"/>
+                <a:cs typeface="Calibri" pitchFamily="34" charset="-120"/>
+              </a:rPr>
+              <a:t>A sequential numeric ID hot-spots the top chunk; a hashed studentId spreads new inserts.</a:t>
+            </a:r>
+            <a:endParaRPr lang="en-US" sz="1200" dirty="0"/>
+          </a:p>
+        </p:txBody>
+      </p:sp>
+      <p:sp>
+        <p:nvSpPr>
+          <p:cNvPr id="18" name="Shape 16"/>
+          <p:cNvSpPr/>
+          <p:nvPr/>
+        </p:nvSpPr>
+        <p:spPr>
+          <a:xfrm>
+            <a:off x="548640" y="3840480"/>
+            <a:ext cx="11064240" cy="1828800"/>
+          </a:xfrm>
+          <a:prstGeom prst="roundRect">
+            <a:avLst>
+              <a:gd name="adj" fmla="val 3500"/>
+            </a:avLst>
+          </a:prstGeom>
+          <a:solidFill>
+            <a:srgbClr val="FFFFFF"/>
+          </a:solidFill>
+          <a:ln w="19050">
+            <a:solidFill>
+              <a:srgbClr val="E8A33D"/>
+            </a:solidFill>
+            <a:prstDash val="solid"/>
+          </a:ln>
+          <a:effectLst>
+            <a:outerShdw sx="100000" sy="100000" kx="0" ky="0" algn="bl" rotWithShape="0" blurRad="50800" dist="12700" dir="5400000">
+              <a:srgbClr val="1F2429">
+                <a:alpha val="12000"/>
+              </a:srgbClr>
+            </a:outerShdw>
+          </a:effectLst>
+        </p:spPr>
+      </p:sp>
+      <p:sp>
+        <p:nvSpPr>
+          <p:cNvPr id="19" name="Shape 17"/>
+          <p:cNvSpPr/>
+          <p:nvPr/>
+        </p:nvSpPr>
+        <p:spPr>
+          <a:xfrm>
+            <a:off x="731520" y="4005072"/>
+            <a:ext cx="274320" cy="82296"/>
+          </a:xfrm>
+          <a:prstGeom prst="rect">
+            <a:avLst/>
+          </a:prstGeom>
+          <a:solidFill>
+            <a:srgbClr val="E8A33D"/>
+          </a:solidFill>
+          <a:ln/>
+        </p:spPr>
+      </p:sp>
+      <p:sp>
+        <p:nvSpPr>
+          <p:cNvPr id="20" name="Text 18"/>
+          <p:cNvSpPr txBox="1"/>
+          <p:nvPr/>
+        </p:nvSpPr>
+        <p:spPr>
+          <a:xfrm>
+            <a:off x="731520" y="4133088"/>
+            <a:ext cx="10698480" cy="237744"/>
+          </a:xfrm>
+          <a:prstGeom prst="rect">
+            <a:avLst/>
+          </a:prstGeom>
+          <a:noFill/>
+          <a:ln/>
+        </p:spPr>
+        <p:txBody>
+          <a:bodyPr wrap="square" rtlCol="0" anchor="ctr"/>
+          <a:lstStyle/>
+          <a:p>
+            <a:pPr indent="0" marL="0">
+              <a:buNone/>
+            </a:pPr>
+            <a:r>
+              <a:rPr lang="en-US" sz="1200" b="1" spc="100" kern="0" dirty="0">
+                <a:solidFill>
+                  <a:srgbClr val="E8A33D"/>
+                </a:solidFill>
+                <a:latin typeface="Calibri" pitchFamily="34" charset="0"/>
+                <a:ea typeface="Calibri" pitchFamily="34" charset="-122"/>
+                <a:cs typeface="Calibri" pitchFamily="34" charset="-120"/>
+              </a:rPr>
+              <a:t>VERDICT</a:t>
+            </a:r>
+            <a:endParaRPr lang="en-US" sz="1200" dirty="0"/>
+          </a:p>
+        </p:txBody>
+      </p:sp>
+      <p:sp>
+        <p:nvSpPr>
+          <p:cNvPr id="21" name="Text 19"/>
+          <p:cNvSpPr txBox="1"/>
+          <p:nvPr/>
+        </p:nvSpPr>
+        <p:spPr>
+          <a:xfrm>
+            <a:off x="731520" y="4389120"/>
+            <a:ext cx="10698480" cy="1143000"/>
+          </a:xfrm>
+          <a:prstGeom prst="rect">
+            <a:avLst/>
+          </a:prstGeom>
+          <a:noFill/>
+          <a:ln/>
+        </p:spPr>
+        <p:txBody>
+          <a:bodyPr wrap="square" rtlCol="0" anchor="t"/>
+          <a:lstStyle/>
+          <a:p>
+            <a:pPr indent="0" marL="0">
+              <a:lnSpc>
+                <a:spcPct val="118000"/>
+              </a:lnSpc>
+              <a:buNone/>
+            </a:pPr>
+            <a:r>
+              <a:rPr lang="en-US" sz="1200" dirty="0">
+                <a:solidFill>
+                  <a:srgbClr val="1F2429"/>
+                </a:solidFill>
+                <a:latin typeface="Calibri" pitchFamily="34" charset="0"/>
+                <a:ea typeface="Calibri" pitchFamily="34" charset="-122"/>
+                <a:cs typeface="Calibri" pitchFamily="34" charset="-120"/>
+              </a:rPr>
+              <a:t>Hashed studentId is the better key. Enrollment year has too few values and clusters new writes.</a:t>
+            </a:r>
+            <a:endParaRPr lang="en-US" sz="1200" dirty="0"/>
+          </a:p>
+        </p:txBody>
+      </p:sp>
+    </p:spTree>
+  </p:cSld>
+  <p:clrMapOvr>
+    <a:masterClrMapping/>
+  </p:clrMapOvr>
+</p:sld>
+</file>
+
+<file path=ppt/slides/slide19.xml><?xml version="1.0" encoding="utf-8"?>
+<p:sld xmlns:a="http://schemas.openxmlformats.org/drawingml/2006/main" xmlns:r="http://schemas.openxmlformats.org/officeDocument/2006/relationships" xmlns:p="http://schemas.openxmlformats.org/presentationml/2006/main">
+  <p:cSld name="Slide 12">
+    <p:bg>
+      <p:bgPr>
+        <a:solidFill>
+          <a:srgbClr val="F7F8F9"/>
+        </a:solidFill>
+      </p:bgPr>
+    </p:bg>
+    <p:spTree>
+      <p:nvGrpSpPr>
+        <p:cNvPr id="1" name=""/>
+        <p:cNvGrpSpPr/>
+        <p:nvPr/>
+      </p:nvGrpSpPr>
+      <p:grpSpPr>
+        <a:xfrm>
+          <a:off x="0" y="0"/>
+          <a:ext cx="0" cy="0"/>
+          <a:chOff x="0" y="0"/>
+          <a:chExt cx="0" cy="0"/>
+        </a:xfrm>
+      </p:grpSpPr>
+      <p:sp>
+        <p:nvSpPr>
+          <p:cNvPr id="2" name="Text 0"/>
+          <p:cNvSpPr txBox="1"/>
+          <p:nvPr/>
+        </p:nvSpPr>
+        <p:spPr>
+          <a:xfrm>
+            <a:off x="548640" y="320040"/>
+            <a:ext cx="9144000" cy="292608"/>
+          </a:xfrm>
+          <a:prstGeom prst="rect">
+            <a:avLst/>
+          </a:prstGeom>
+          <a:noFill/>
+          <a:ln/>
+        </p:spPr>
+        <p:txBody>
+          <a:bodyPr wrap="square" rtlCol="0" anchor="ctr"/>
+          <a:lstStyle/>
+          <a:p>
+            <a:pPr indent="0" marL="0">
+              <a:buNone/>
+            </a:pPr>
+            <a:r>
+              <a:rPr lang="en-US" sz="1200" b="1" spc="150" kern="0" dirty="0">
+                <a:solidFill>
+                  <a:srgbClr val="8B7FD9"/>
+                </a:solidFill>
+                <a:latin typeface="Calibri" pitchFamily="34" charset="0"/>
+                <a:ea typeface="Calibri" pitchFamily="34" charset="-122"/>
+                <a:cs typeface="Calibri" pitchFamily="34" charset="-120"/>
+              </a:rPr>
+              <a:t>QUERY ROUTING</a:t>
+            </a:r>
+            <a:endParaRPr lang="en-US" sz="1200" dirty="0"/>
+          </a:p>
+        </p:txBody>
+      </p:sp>
+      <p:sp>
+        <p:nvSpPr>
+          <p:cNvPr id="3" name="Text 1"/>
+          <p:cNvSpPr txBox="1"/>
+          <p:nvPr/>
+        </p:nvSpPr>
+        <p:spPr>
+          <a:xfrm>
+            <a:off x="548640" y="566928"/>
+            <a:ext cx="11064240" cy="640080"/>
+          </a:xfrm>
+          <a:prstGeom prst="rect">
+            <a:avLst/>
+          </a:prstGeom>
+          <a:noFill/>
+          <a:ln/>
+        </p:spPr>
+        <p:txBody>
+          <a:bodyPr wrap="square" rtlCol="0" anchor="ctr"/>
+          <a:lstStyle/>
+          <a:p>
+            <a:pPr indent="0" marL="0">
+              <a:buNone/>
+            </a:pPr>
+            <a:r>
+              <a:rPr lang="en-US" sz="2500" b="1" dirty="0">
+                <a:solidFill>
+                  <a:srgbClr val="1F2429"/>
+                </a:solidFill>
+                <a:latin typeface="Calibri" pitchFamily="34" charset="0"/>
+                <a:ea typeface="Calibri" pitchFamily="34" charset="-122"/>
+                <a:cs typeface="Calibri" pitchFamily="34" charset="-120"/>
+              </a:rPr>
+              <a:t>Targeted vs. Scatter-Gather Queries</a:t>
+            </a:r>
+            <a:endParaRPr lang="en-US" sz="2500" dirty="0"/>
+          </a:p>
+        </p:txBody>
+      </p:sp>
+      <p:sp>
+        <p:nvSpPr>
+          <p:cNvPr id="4" name="Text 2"/>
+          <p:cNvSpPr txBox="1"/>
+          <p:nvPr/>
+        </p:nvSpPr>
+        <p:spPr>
+          <a:xfrm>
+            <a:off x="9951415" y="6455664"/>
+            <a:ext cx="2011680" cy="292608"/>
+          </a:xfrm>
+          <a:prstGeom prst="rect">
+            <a:avLst/>
+          </a:prstGeom>
+          <a:noFill/>
+          <a:ln/>
+        </p:spPr>
+        <p:txBody>
+          <a:bodyPr wrap="square" rtlCol="0" anchor="ctr"/>
+          <a:lstStyle/>
+          <a:p>
+            <a:pPr algn="r" indent="0" marL="0">
+              <a:buNone/>
+            </a:pPr>
+            <a:r>
+              <a:rPr lang="en-US" sz="1200" u="sng" dirty="0">
+                <a:solidFill>
+                  <a:srgbClr val="8A939B"/>
+                </a:solidFill>
+                <a:latin typeface="Calibri" pitchFamily="34" charset="0"/>
+                <a:ea typeface="Calibri" pitchFamily="34" charset="-122"/>
+                <a:cs typeface="Calibri" pitchFamily="34" charset="-120"/>
+                <a:hlinkClick r:id="rId1" invalidUrl="" action="" tgtFrame="" tooltip="" history="1" highlightClick="0" endSnd="0">
+                  <a:extLst>
+                    <a:ext uri="{A12FA001-AC4F-418D-AE19-62706E023703}">
+                      <ahyp:hlinkClr xmlns:ahyp="http://schemas.microsoft.com/office/drawing/2018/hyperlinkcolor" val="tx"/>
+                    </a:ext>
+                  </a:extLst>
+                </a:hlinkClick>
+              </a:rPr>
+              <a:t>cuinotes.com</a:t>
+            </a:r>
+            <a:pPr algn="r" indent="0" marL="0">
+              <a:buNone/>
+            </a:pPr>
+            <a:r>
+              <a:rPr lang="en-US" sz="1200" dirty="0">
+                <a:solidFill>
+                  <a:srgbClr val="8A939B"/>
+                </a:solidFill>
+                <a:latin typeface="Calibri" pitchFamily="34" charset="0"/>
+                <a:ea typeface="Calibri" pitchFamily="34" charset="-122"/>
+                <a:cs typeface="Calibri" pitchFamily="34" charset="-120"/>
+              </a:rPr>
+              <a:t>  ·  16</a:t>
+            </a:r>
+            <a:endParaRPr lang="en-US" sz="1200" dirty="0"/>
+          </a:p>
+        </p:txBody>
+      </p:sp>
+      <p:sp>
+        <p:nvSpPr>
+          <p:cNvPr id="5" name="Shape 3"/>
+          <p:cNvSpPr/>
+          <p:nvPr/>
+        </p:nvSpPr>
+        <p:spPr>
+          <a:xfrm>
+            <a:off x="548640" y="1463040"/>
+            <a:ext cx="3413760" cy="1920240"/>
+          </a:xfrm>
+          <a:prstGeom prst="roundRect">
+            <a:avLst>
+              <a:gd name="adj" fmla="val 3810"/>
+            </a:avLst>
+          </a:prstGeom>
+          <a:solidFill>
+            <a:srgbClr val="FFFFFF"/>
+          </a:solidFill>
+          <a:ln w="22225">
+            <a:solidFill>
+              <a:srgbClr val="2FE6C4"/>
+            </a:solidFill>
+            <a:prstDash val="solid"/>
+          </a:ln>
+          <a:effectLst>
+            <a:outerShdw sx="100000" sy="100000" kx="0" ky="0" algn="bl" rotWithShape="0" blurRad="76200" dist="25400" dir="5400000">
+              <a:srgbClr val="1F2429">
+                <a:alpha val="18000"/>
+              </a:srgbClr>
+            </a:outerShdw>
+          </a:effectLst>
+        </p:spPr>
+      </p:sp>
+      <p:sp>
+        <p:nvSpPr>
+          <p:cNvPr id="6" name="Shape 4"/>
+          <p:cNvSpPr/>
+          <p:nvPr/>
+        </p:nvSpPr>
+        <p:spPr>
+          <a:xfrm>
+            <a:off x="694944" y="1591056"/>
+            <a:ext cx="310896" cy="91440"/>
+          </a:xfrm>
+          <a:prstGeom prst="rect">
+            <a:avLst/>
+          </a:prstGeom>
+          <a:solidFill>
+            <a:srgbClr val="2FE6C4"/>
+          </a:solidFill>
+          <a:ln/>
+        </p:spPr>
+      </p:sp>
+      <p:sp>
+        <p:nvSpPr>
+          <p:cNvPr id="7" name="Text 5"/>
+          <p:cNvSpPr txBox="1"/>
+          <p:nvPr/>
+        </p:nvSpPr>
+        <p:spPr>
+          <a:xfrm>
+            <a:off x="694944" y="1737360"/>
+            <a:ext cx="3121152" cy="768096"/>
+          </a:xfrm>
+          <a:prstGeom prst="rect">
+            <a:avLst/>
+          </a:prstGeom>
+          <a:noFill/>
+          <a:ln/>
+        </p:spPr>
+        <p:txBody>
+          <a:bodyPr wrap="square" rtlCol="0" anchor="t"/>
+          <a:lstStyle/>
+          <a:p>
+            <a:pPr indent="0" marL="0">
+              <a:buNone/>
+            </a:pPr>
+            <a:r>
+              <a:rPr lang="en-US" sz="1800" b="1" dirty="0">
+                <a:solidFill>
+                  <a:srgbClr val="1F2429"/>
+                </a:solidFill>
+                <a:latin typeface="Calibri" pitchFamily="34" charset="0"/>
+                <a:ea typeface="Calibri" pitchFamily="34" charset="-122"/>
+                <a:cs typeface="Calibri" pitchFamily="34" charset="-120"/>
+              </a:rPr>
+              <a:t>Targeted query</a:t>
+            </a:r>
+            <a:endParaRPr lang="en-US" sz="1800" dirty="0"/>
+          </a:p>
+        </p:txBody>
+      </p:sp>
+      <p:sp>
+        <p:nvSpPr>
+          <p:cNvPr id="8" name="Text 6"/>
+          <p:cNvSpPr txBox="1"/>
+          <p:nvPr/>
+        </p:nvSpPr>
+        <p:spPr>
+          <a:xfrm>
+            <a:off x="694944" y="2467051"/>
+            <a:ext cx="3121152" cy="806501"/>
+          </a:xfrm>
+          <a:prstGeom prst="rect">
+            <a:avLst/>
+          </a:prstGeom>
+          <a:noFill/>
+          <a:ln/>
+        </p:spPr>
+        <p:txBody>
+          <a:bodyPr wrap="square" rtlCol="0" anchor="t"/>
+          <a:lstStyle/>
+          <a:p>
+            <a:pPr indent="0" marL="0">
+              <a:lnSpc>
+                <a:spcPct val="108000"/>
+              </a:lnSpc>
+              <a:buNone/>
+            </a:pPr>
+            <a:r>
+              <a:rPr lang="en-US" sz="1200" dirty="0">
+                <a:solidFill>
+                  <a:srgbClr val="6B7480"/>
+                </a:solidFill>
+                <a:latin typeface="Calibri" pitchFamily="34" charset="0"/>
+                <a:ea typeface="Calibri" pitchFamily="34" charset="-122"/>
+                <a:cs typeface="Calibri" pitchFamily="34" charset="-120"/>
+              </a:rPr>
+              <a:t>find({ studentId: 1234 }) goes only to the shard that owns that chunk.</a:t>
+            </a:r>
+            <a:endParaRPr lang="en-US" sz="1200" dirty="0"/>
+          </a:p>
+        </p:txBody>
+      </p:sp>
+      <p:sp>
+        <p:nvSpPr>
+          <p:cNvPr id="9" name="Shape 7"/>
+          <p:cNvSpPr/>
+          <p:nvPr/>
+        </p:nvSpPr>
+        <p:spPr>
+          <a:xfrm>
+            <a:off x="3962400" y="2423160"/>
+            <a:ext cx="411480" cy="0"/>
+          </a:xfrm>
+          <a:prstGeom prst="line">
+            <a:avLst/>
+          </a:prstGeom>
+          <a:noFill/>
+          <a:ln w="25400">
+            <a:solidFill>
+              <a:srgbClr val="8A939B"/>
+            </a:solidFill>
+            <a:prstDash val="solid"/>
+            <a:tailEnd type="triangle"/>
+          </a:ln>
+        </p:spPr>
+      </p:sp>
+      <p:sp>
+        <p:nvSpPr>
+          <p:cNvPr id="10" name="Shape 8"/>
+          <p:cNvSpPr/>
+          <p:nvPr/>
+        </p:nvSpPr>
+        <p:spPr>
+          <a:xfrm>
+            <a:off x="4373880" y="1463040"/>
+            <a:ext cx="3413760" cy="1920240"/>
+          </a:xfrm>
+          <a:prstGeom prst="roundRect">
+            <a:avLst>
+              <a:gd name="adj" fmla="val 3810"/>
+            </a:avLst>
+          </a:prstGeom>
+          <a:solidFill>
+            <a:srgbClr val="FFFFFF"/>
+          </a:solidFill>
+          <a:ln w="22225">
+            <a:solidFill>
+              <a:srgbClr val="8B7FD9"/>
+            </a:solidFill>
+            <a:prstDash val="solid"/>
+          </a:ln>
+          <a:effectLst>
+            <a:outerShdw sx="100000" sy="100000" kx="0" ky="0" algn="bl" rotWithShape="0" blurRad="76200" dist="25400" dir="5400000">
+              <a:srgbClr val="1F2429">
+                <a:alpha val="18000"/>
+              </a:srgbClr>
+            </a:outerShdw>
+          </a:effectLst>
+        </p:spPr>
+      </p:sp>
+      <p:sp>
+        <p:nvSpPr>
+          <p:cNvPr id="11" name="Shape 9"/>
+          <p:cNvSpPr/>
+          <p:nvPr/>
+        </p:nvSpPr>
+        <p:spPr>
+          <a:xfrm>
+            <a:off x="4520184" y="1591056"/>
+            <a:ext cx="310896" cy="91440"/>
+          </a:xfrm>
+          <a:prstGeom prst="rect">
+            <a:avLst/>
+          </a:prstGeom>
+          <a:solidFill>
+            <a:srgbClr val="8B7FD9"/>
+          </a:solidFill>
+          <a:ln/>
+        </p:spPr>
+      </p:sp>
+      <p:sp>
+        <p:nvSpPr>
+          <p:cNvPr id="12" name="Text 10"/>
+          <p:cNvSpPr txBox="1"/>
+          <p:nvPr/>
+        </p:nvSpPr>
+        <p:spPr>
+          <a:xfrm>
+            <a:off x="4520184" y="1737360"/>
+            <a:ext cx="3121152" cy="768096"/>
+          </a:xfrm>
+          <a:prstGeom prst="rect">
+            <a:avLst/>
+          </a:prstGeom>
+          <a:noFill/>
+          <a:ln/>
+        </p:spPr>
+        <p:txBody>
+          <a:bodyPr wrap="square" rtlCol="0" anchor="t"/>
+          <a:lstStyle/>
+          <a:p>
+            <a:pPr indent="0" marL="0">
+              <a:buNone/>
+            </a:pPr>
+            <a:r>
+              <a:rPr lang="en-US" sz="1800" b="1" dirty="0">
+                <a:solidFill>
+                  <a:srgbClr val="1F2429"/>
+                </a:solidFill>
+                <a:latin typeface="Calibri" pitchFamily="34" charset="0"/>
+                <a:ea typeface="Calibri" pitchFamily="34" charset="-122"/>
+                <a:cs typeface="Calibri" pitchFamily="34" charset="-120"/>
+              </a:rPr>
+              <a:t>Scatter-gather query</a:t>
+            </a:r>
+            <a:endParaRPr lang="en-US" sz="1800" dirty="0"/>
+          </a:p>
+        </p:txBody>
+      </p:sp>
+      <p:sp>
+        <p:nvSpPr>
+          <p:cNvPr id="13" name="Text 11"/>
+          <p:cNvSpPr txBox="1"/>
+          <p:nvPr/>
+        </p:nvSpPr>
+        <p:spPr>
+          <a:xfrm>
+            <a:off x="4520184" y="2467051"/>
+            <a:ext cx="3121152" cy="806501"/>
+          </a:xfrm>
+          <a:prstGeom prst="rect">
+            <a:avLst/>
+          </a:prstGeom>
+          <a:noFill/>
+          <a:ln/>
+        </p:spPr>
+        <p:txBody>
+          <a:bodyPr wrap="square" rtlCol="0" anchor="t"/>
+          <a:lstStyle/>
+          <a:p>
+            <a:pPr indent="0" marL="0">
+              <a:lnSpc>
+                <a:spcPct val="108000"/>
+              </a:lnSpc>
+              <a:buNone/>
+            </a:pPr>
+            <a:r>
+              <a:rPr lang="en-US" sz="1200" dirty="0">
+                <a:solidFill>
+                  <a:srgbClr val="6B7480"/>
+                </a:solidFill>
+                <a:latin typeface="Calibri" pitchFamily="34" charset="0"/>
+                <a:ea typeface="Calibri" pitchFamily="34" charset="-122"/>
+                <a:cs typeface="Calibri" pitchFamily="34" charset="-120"/>
+              </a:rPr>
+              <a:t>find({ gpa: { $gt: 3.5 } }) makes mongos ask every shard, then merge the results.</a:t>
+            </a:r>
+            <a:endParaRPr lang="en-US" sz="1200" dirty="0"/>
+          </a:p>
+        </p:txBody>
+      </p:sp>
+      <p:sp>
+        <p:nvSpPr>
+          <p:cNvPr id="14" name="Shape 12"/>
+          <p:cNvSpPr/>
+          <p:nvPr/>
+        </p:nvSpPr>
+        <p:spPr>
+          <a:xfrm>
+            <a:off x="7787640" y="2423160"/>
+            <a:ext cx="411480" cy="0"/>
+          </a:xfrm>
+          <a:prstGeom prst="line">
+            <a:avLst/>
+          </a:prstGeom>
+          <a:noFill/>
+          <a:ln w="25400">
+            <a:solidFill>
+              <a:srgbClr val="8A939B"/>
+            </a:solidFill>
+            <a:prstDash val="solid"/>
+            <a:tailEnd type="triangle"/>
+          </a:ln>
+        </p:spPr>
+      </p:sp>
+      <p:sp>
+        <p:nvSpPr>
+          <p:cNvPr id="15" name="Shape 13"/>
+          <p:cNvSpPr/>
+          <p:nvPr/>
+        </p:nvSpPr>
+        <p:spPr>
+          <a:xfrm>
+            <a:off x="8199120" y="1463040"/>
+            <a:ext cx="3413760" cy="1920240"/>
+          </a:xfrm>
+          <a:prstGeom prst="roundRect">
+            <a:avLst>
+              <a:gd name="adj" fmla="val 3810"/>
+            </a:avLst>
+          </a:prstGeom>
+          <a:solidFill>
+            <a:srgbClr val="FFFFFF"/>
+          </a:solidFill>
+          <a:ln w="22225">
+            <a:solidFill>
+              <a:srgbClr val="E8A33D"/>
+            </a:solidFill>
+            <a:prstDash val="solid"/>
+          </a:ln>
+          <a:effectLst>
+            <a:outerShdw sx="100000" sy="100000" kx="0" ky="0" algn="bl" rotWithShape="0" blurRad="76200" dist="25400" dir="5400000">
+              <a:srgbClr val="1F2429">
+                <a:alpha val="18000"/>
+              </a:srgbClr>
+            </a:outerShdw>
+          </a:effectLst>
+        </p:spPr>
+      </p:sp>
+      <p:sp>
+        <p:nvSpPr>
+          <p:cNvPr id="16" name="Shape 14"/>
+          <p:cNvSpPr/>
+          <p:nvPr/>
+        </p:nvSpPr>
+        <p:spPr>
+          <a:xfrm>
+            <a:off x="8345424" y="1591056"/>
+            <a:ext cx="310896" cy="91440"/>
+          </a:xfrm>
+          <a:prstGeom prst="rect">
+            <a:avLst/>
+          </a:prstGeom>
+          <a:solidFill>
+            <a:srgbClr val="E8A33D"/>
+          </a:solidFill>
+          <a:ln/>
+        </p:spPr>
+      </p:sp>
+      <p:sp>
+        <p:nvSpPr>
+          <p:cNvPr id="17" name="Text 15"/>
+          <p:cNvSpPr txBox="1"/>
+          <p:nvPr/>
+        </p:nvSpPr>
+        <p:spPr>
+          <a:xfrm>
+            <a:off x="8345424" y="1737360"/>
+            <a:ext cx="3121152" cy="768096"/>
+          </a:xfrm>
+          <a:prstGeom prst="rect">
+            <a:avLst/>
+          </a:prstGeom>
+          <a:noFill/>
+          <a:ln/>
+        </p:spPr>
+        <p:txBody>
+          <a:bodyPr wrap="square" rtlCol="0" anchor="t"/>
+          <a:lstStyle/>
+          <a:p>
+            <a:pPr indent="0" marL="0">
+              <a:buNone/>
+            </a:pPr>
+            <a:r>
+              <a:rPr lang="en-US" sz="1800" b="1" dirty="0">
+                <a:solidFill>
+                  <a:srgbClr val="1F2429"/>
+                </a:solidFill>
+                <a:latin typeface="Calibri" pitchFamily="34" charset="0"/>
+                <a:ea typeface="Calibri" pitchFamily="34" charset="-122"/>
+                <a:cs typeface="Calibri" pitchFamily="34" charset="-120"/>
+              </a:rPr>
+              <a:t>Why the difference</a:t>
+            </a:r>
+            <a:endParaRPr lang="en-US" sz="1800" dirty="0"/>
+          </a:p>
+        </p:txBody>
+      </p:sp>
+      <p:sp>
+        <p:nvSpPr>
+          <p:cNvPr id="18" name="Text 16"/>
+          <p:cNvSpPr txBox="1"/>
+          <p:nvPr/>
+        </p:nvSpPr>
+        <p:spPr>
+          <a:xfrm>
+            <a:off x="8345424" y="2467051"/>
+            <a:ext cx="3121152" cy="806501"/>
+          </a:xfrm>
+          <a:prstGeom prst="rect">
+            <a:avLst/>
+          </a:prstGeom>
+          <a:noFill/>
+          <a:ln/>
+        </p:spPr>
+        <p:txBody>
+          <a:bodyPr wrap="square" rtlCol="0" anchor="t"/>
+          <a:lstStyle/>
+          <a:p>
+            <a:pPr indent="0" marL="0">
+              <a:lnSpc>
+                <a:spcPct val="108000"/>
+              </a:lnSpc>
+              <a:buNone/>
+            </a:pPr>
+            <a:r>
+              <a:rPr lang="en-US" sz="1200" dirty="0">
+                <a:solidFill>
+                  <a:srgbClr val="6B7480"/>
+                </a:solidFill>
+                <a:latin typeface="Calibri" pitchFamily="34" charset="0"/>
+                <a:ea typeface="Calibri" pitchFamily="34" charset="-122"/>
+                <a:cs typeface="Calibri" pitchFamily="34" charset="-120"/>
+              </a:rPr>
+              <a:t>Targeted reads touch one shard; scatter-gather cost grows with the number of shards.</a:t>
+            </a:r>
+            <a:endParaRPr lang="en-US" sz="1200" dirty="0"/>
+          </a:p>
+        </p:txBody>
+      </p:sp>
+      <p:sp>
+        <p:nvSpPr>
+          <p:cNvPr id="19" name="Shape 17"/>
+          <p:cNvSpPr/>
+          <p:nvPr/>
+        </p:nvSpPr>
+        <p:spPr>
+          <a:xfrm>
+            <a:off x="548640" y="3657600"/>
+            <a:ext cx="11064240" cy="1737360"/>
+          </a:xfrm>
+          <a:prstGeom prst="roundRect">
+            <a:avLst>
+              <a:gd name="adj" fmla="val 3684"/>
+            </a:avLst>
+          </a:prstGeom>
+          <a:solidFill>
+            <a:srgbClr val="FFFFFF"/>
+          </a:solidFill>
+          <a:ln w="19050">
+            <a:solidFill>
+              <a:srgbClr val="8B7FD9"/>
+            </a:solidFill>
+            <a:prstDash val="solid"/>
+          </a:ln>
+          <a:effectLst>
+            <a:outerShdw sx="100000" sy="100000" kx="0" ky="0" algn="bl" rotWithShape="0" blurRad="50800" dist="12700" dir="5400000">
+              <a:srgbClr val="1F2429">
+                <a:alpha val="12000"/>
+              </a:srgbClr>
+            </a:outerShdw>
+          </a:effectLst>
+        </p:spPr>
+      </p:sp>
+      <p:sp>
+        <p:nvSpPr>
+          <p:cNvPr id="20" name="Shape 18"/>
+          <p:cNvSpPr/>
+          <p:nvPr/>
+        </p:nvSpPr>
+        <p:spPr>
+          <a:xfrm>
+            <a:off x="731520" y="3822192"/>
+            <a:ext cx="274320" cy="82296"/>
+          </a:xfrm>
+          <a:prstGeom prst="rect">
+            <a:avLst/>
+          </a:prstGeom>
+          <a:solidFill>
+            <a:srgbClr val="8B7FD9"/>
+          </a:solidFill>
+          <a:ln/>
+        </p:spPr>
+      </p:sp>
+      <p:sp>
+        <p:nvSpPr>
+          <p:cNvPr id="21" name="Text 19"/>
+          <p:cNvSpPr txBox="1"/>
+          <p:nvPr/>
+        </p:nvSpPr>
+        <p:spPr>
+          <a:xfrm>
+            <a:off x="731520" y="3950208"/>
+            <a:ext cx="10698480" cy="237744"/>
+          </a:xfrm>
+          <a:prstGeom prst="rect">
+            <a:avLst/>
+          </a:prstGeom>
+          <a:noFill/>
+          <a:ln/>
+        </p:spPr>
+        <p:txBody>
+          <a:bodyPr wrap="square" rtlCol="0" anchor="ctr"/>
+          <a:lstStyle/>
+          <a:p>
+            <a:pPr indent="0" marL="0">
+              <a:buNone/>
+            </a:pPr>
+            <a:r>
+              <a:rPr lang="en-US" sz="1200" b="1" spc="100" kern="0" dirty="0">
+                <a:solidFill>
+                  <a:srgbClr val="8B7FD9"/>
+                </a:solidFill>
+                <a:latin typeface="Calibri" pitchFamily="34" charset="0"/>
+                <a:ea typeface="Calibri" pitchFamily="34" charset="-122"/>
+                <a:cs typeface="Calibri" pitchFamily="34" charset="-120"/>
+              </a:rPr>
+              <a:t>KEY TAKEAWAY</a:t>
+            </a:r>
+            <a:endParaRPr lang="en-US" sz="1200" dirty="0"/>
+          </a:p>
+        </p:txBody>
+      </p:sp>
+      <p:sp>
+        <p:nvSpPr>
+          <p:cNvPr id="22" name="Text 20"/>
+          <p:cNvSpPr txBox="1"/>
+          <p:nvPr/>
+        </p:nvSpPr>
+        <p:spPr>
+          <a:xfrm>
+            <a:off x="731520" y="4206240"/>
+            <a:ext cx="10698480" cy="1051560"/>
+          </a:xfrm>
+          <a:prstGeom prst="rect">
+            <a:avLst/>
+          </a:prstGeom>
+          <a:noFill/>
+          <a:ln/>
+        </p:spPr>
+        <p:txBody>
+          <a:bodyPr wrap="square" rtlCol="0" anchor="t"/>
+          <a:lstStyle/>
+          <a:p>
+            <a:pPr indent="0" marL="0">
+              <a:lnSpc>
+                <a:spcPct val="118000"/>
+              </a:lnSpc>
+              <a:buNone/>
+            </a:pPr>
+            <a:r>
+              <a:rPr lang="en-US" sz="1200" dirty="0">
+                <a:solidFill>
+                  <a:srgbClr val="1F2429"/>
+                </a:solidFill>
+                <a:latin typeface="Calibri" pitchFamily="34" charset="0"/>
+                <a:ea typeface="Calibri" pitchFamily="34" charset="-122"/>
+                <a:cs typeface="Calibri" pitchFamily="34" charset="-120"/>
+              </a:rPr>
+              <a:t>Filter on the shard key whenever you can. Otherwise every shard does work for one answer.</a:t>
+            </a:r>
+            <a:endParaRPr lang="en-US" sz="1200" dirty="0"/>
           </a:p>
         </p:txBody>
       </p:sp>
@@ -7789,7 +10294,7 @@
               <a:buNone/>
             </a:pPr>
             <a:r>
-              <a:rPr lang="en-US" sz="1500" b="1" dirty="0">
+              <a:rPr lang="en-US" sz="1800" b="1" dirty="0">
                 <a:solidFill>
                   <a:srgbClr val="14181C"/>
                 </a:solidFill>
@@ -7799,7 +10304,7 @@
               </a:rPr>
               <a:t>1</a:t>
             </a:r>
-            <a:endParaRPr lang="en-US" sz="1500" dirty="0"/>
+            <a:endParaRPr lang="en-US" sz="1800" dirty="0"/>
           </a:p>
         </p:txBody>
       </p:sp>
@@ -7828,7 +10333,7 @@
               <a:buNone/>
             </a:pPr>
             <a:r>
-              <a:rPr lang="en-US" sz="1450" dirty="0">
+              <a:rPr lang="en-US" sz="1800" dirty="0">
                 <a:solidFill>
                   <a:srgbClr val="1F2429"/>
                 </a:solidFill>
@@ -7838,7 +10343,7 @@
               </a:rPr>
               <a:t>Why replication exists: availability and read scaling</a:t>
             </a:r>
-            <a:endParaRPr lang="en-US" sz="1450" dirty="0"/>
+            <a:endParaRPr lang="en-US" sz="1800" dirty="0"/>
           </a:p>
         </p:txBody>
       </p:sp>
@@ -7887,7 +10392,7 @@
               <a:buNone/>
             </a:pPr>
             <a:r>
-              <a:rPr lang="en-US" sz="1500" b="1" dirty="0">
+              <a:rPr lang="en-US" sz="1800" b="1" dirty="0">
                 <a:solidFill>
                   <a:srgbClr val="14181C"/>
                 </a:solidFill>
@@ -7897,7 +10402,7 @@
               </a:rPr>
               <a:t>2</a:t>
             </a:r>
-            <a:endParaRPr lang="en-US" sz="1500" dirty="0"/>
+            <a:endParaRPr lang="en-US" sz="1800" dirty="0"/>
           </a:p>
         </p:txBody>
       </p:sp>
@@ -7926,7 +10431,7 @@
               <a:buNone/>
             </a:pPr>
             <a:r>
-              <a:rPr lang="en-US" sz="1450" dirty="0">
+              <a:rPr lang="en-US" sz="1800" dirty="0">
                 <a:solidFill>
                   <a:srgbClr val="1F2429"/>
                 </a:solidFill>
@@ -7936,7 +10441,7 @@
               </a:rPr>
               <a:t>Replica sets — primary and secondary roles</a:t>
             </a:r>
-            <a:endParaRPr lang="en-US" sz="1450" dirty="0"/>
+            <a:endParaRPr lang="en-US" sz="1800" dirty="0"/>
           </a:p>
         </p:txBody>
       </p:sp>
@@ -7985,7 +10490,7 @@
               <a:buNone/>
             </a:pPr>
             <a:r>
-              <a:rPr lang="en-US" sz="1500" b="1" dirty="0">
+              <a:rPr lang="en-US" sz="1800" b="1" dirty="0">
                 <a:solidFill>
                   <a:srgbClr val="14181C"/>
                 </a:solidFill>
@@ -7995,7 +10500,7 @@
               </a:rPr>
               <a:t>3</a:t>
             </a:r>
-            <a:endParaRPr lang="en-US" sz="1500" dirty="0"/>
+            <a:endParaRPr lang="en-US" sz="1800" dirty="0"/>
           </a:p>
         </p:txBody>
       </p:sp>
@@ -8024,7 +10529,7 @@
               <a:buNone/>
             </a:pPr>
             <a:r>
-              <a:rPr lang="en-US" sz="1450" dirty="0">
+              <a:rPr lang="en-US" sz="1800" dirty="0">
                 <a:solidFill>
                   <a:srgbClr val="1F2429"/>
                 </a:solidFill>
@@ -8034,7 +10539,7 @@
               </a:rPr>
               <a:t>Automatic failover and elections</a:t>
             </a:r>
-            <a:endParaRPr lang="en-US" sz="1450" dirty="0"/>
+            <a:endParaRPr lang="en-US" sz="1800" dirty="0"/>
           </a:p>
         </p:txBody>
       </p:sp>
@@ -8083,7 +10588,7 @@
               <a:buNone/>
             </a:pPr>
             <a:r>
-              <a:rPr lang="en-US" sz="1500" b="1" dirty="0">
+              <a:rPr lang="en-US" sz="1800" b="1" dirty="0">
                 <a:solidFill>
                   <a:srgbClr val="14181C"/>
                 </a:solidFill>
@@ -8093,7 +10598,7 @@
               </a:rPr>
               <a:t>4</a:t>
             </a:r>
-            <a:endParaRPr lang="en-US" sz="1500" dirty="0"/>
+            <a:endParaRPr lang="en-US" sz="1800" dirty="0"/>
           </a:p>
         </p:txBody>
       </p:sp>
@@ -8122,7 +10627,7 @@
               <a:buNone/>
             </a:pPr>
             <a:r>
-              <a:rPr lang="en-US" sz="1450" dirty="0">
+              <a:rPr lang="en-US" sz="1800" dirty="0">
                 <a:solidFill>
                   <a:srgbClr val="1F2429"/>
                 </a:solidFill>
@@ -8132,7 +10637,7 @@
               </a:rPr>
               <a:t>How reads and writes are routed across a replica set</a:t>
             </a:r>
-            <a:endParaRPr lang="en-US" sz="1450" dirty="0"/>
+            <a:endParaRPr lang="en-US" sz="1800" dirty="0"/>
           </a:p>
         </p:txBody>
       </p:sp>
@@ -8181,7 +10686,7 @@
               <a:buNone/>
             </a:pPr>
             <a:r>
-              <a:rPr lang="en-US" sz="1500" b="1" dirty="0">
+              <a:rPr lang="en-US" sz="1800" b="1" dirty="0">
                 <a:solidFill>
                   <a:srgbClr val="14181C"/>
                 </a:solidFill>
@@ -8191,7 +10696,7 @@
               </a:rPr>
               <a:t>5</a:t>
             </a:r>
-            <a:endParaRPr lang="en-US" sz="1500" dirty="0"/>
+            <a:endParaRPr lang="en-US" sz="1800" dirty="0"/>
           </a:p>
         </p:txBody>
       </p:sp>
@@ -8220,7 +10725,7 @@
               <a:buNone/>
             </a:pPr>
             <a:r>
-              <a:rPr lang="en-US" sz="1450" dirty="0">
+              <a:rPr lang="en-US" sz="1800" dirty="0">
                 <a:solidFill>
                   <a:srgbClr val="1F2429"/>
                 </a:solidFill>
@@ -8230,7 +10735,7 @@
               </a:rPr>
               <a:t>Why sharding exists: write and storage scaling</a:t>
             </a:r>
-            <a:endParaRPr lang="en-US" sz="1450" dirty="0"/>
+            <a:endParaRPr lang="en-US" sz="1800" dirty="0"/>
           </a:p>
         </p:txBody>
       </p:sp>
@@ -8279,7 +10784,7 @@
               <a:buNone/>
             </a:pPr>
             <a:r>
-              <a:rPr lang="en-US" sz="1500" b="1" dirty="0">
+              <a:rPr lang="en-US" sz="1800" b="1" dirty="0">
                 <a:solidFill>
                   <a:srgbClr val="14181C"/>
                 </a:solidFill>
@@ -8289,7 +10794,7 @@
               </a:rPr>
               <a:t>6</a:t>
             </a:r>
-            <a:endParaRPr lang="en-US" sz="1500" dirty="0"/>
+            <a:endParaRPr lang="en-US" sz="1800" dirty="0"/>
           </a:p>
         </p:txBody>
       </p:sp>
@@ -8318,7 +10823,7 @@
               <a:buNone/>
             </a:pPr>
             <a:r>
-              <a:rPr lang="en-US" sz="1450" dirty="0">
+              <a:rPr lang="en-US" sz="1800" dirty="0">
                 <a:solidFill>
                   <a:srgbClr val="1F2429"/>
                 </a:solidFill>
@@ -8328,7 +10833,7 @@
               </a:rPr>
               <a:t>Sharded cluster architecture: shards, config servers, mongos</a:t>
             </a:r>
-            <a:endParaRPr lang="en-US" sz="1450" dirty="0"/>
+            <a:endParaRPr lang="en-US" sz="1800" dirty="0"/>
           </a:p>
         </p:txBody>
       </p:sp>
@@ -8377,7 +10882,7 @@
               <a:buNone/>
             </a:pPr>
             <a:r>
-              <a:rPr lang="en-US" sz="1500" b="1" dirty="0">
+              <a:rPr lang="en-US" sz="1800" b="1" dirty="0">
                 <a:solidFill>
                   <a:srgbClr val="14181C"/>
                 </a:solidFill>
@@ -8387,7 +10892,7 @@
               </a:rPr>
               <a:t>7</a:t>
             </a:r>
-            <a:endParaRPr lang="en-US" sz="1500" dirty="0"/>
+            <a:endParaRPr lang="en-US" sz="1800" dirty="0"/>
           </a:p>
         </p:txBody>
       </p:sp>
@@ -8416,7 +10921,7 @@
               <a:buNone/>
             </a:pPr>
             <a:r>
-              <a:rPr lang="en-US" sz="1450" dirty="0">
+              <a:rPr lang="en-US" sz="1800" dirty="0">
                 <a:solidFill>
                   <a:srgbClr val="1F2429"/>
                 </a:solidFill>
@@ -8426,7 +10931,7 @@
               </a:rPr>
               <a:t>Choosing a good shard key, and the hotspots a bad one causes</a:t>
             </a:r>
-            <a:endParaRPr lang="en-US" sz="1450" dirty="0"/>
+            <a:endParaRPr lang="en-US" sz="1800" dirty="0"/>
           </a:p>
         </p:txBody>
       </p:sp>
@@ -8475,7 +10980,7 @@
               <a:buNone/>
             </a:pPr>
             <a:r>
-              <a:rPr lang="en-US" sz="1500" b="1" dirty="0">
+              <a:rPr lang="en-US" sz="1800" b="1" dirty="0">
                 <a:solidFill>
                   <a:srgbClr val="14181C"/>
                 </a:solidFill>
@@ -8485,7 +10990,7 @@
               </a:rPr>
               <a:t>8</a:t>
             </a:r>
-            <a:endParaRPr lang="en-US" sz="1500" dirty="0"/>
+            <a:endParaRPr lang="en-US" sz="1800" dirty="0"/>
           </a:p>
         </p:txBody>
       </p:sp>
@@ -8514,7 +11019,7 @@
               <a:buNone/>
             </a:pPr>
             <a:r>
-              <a:rPr lang="en-US" sz="1450" dirty="0">
+              <a:rPr lang="en-US" sz="1800" dirty="0">
                 <a:solidFill>
                   <a:srgbClr val="1F2429"/>
                 </a:solidFill>
@@ -8524,7 +11029,7 @@
               </a:rPr>
               <a:t>The balancer, and why production clusters use both together</a:t>
             </a:r>
-            <a:endParaRPr lang="en-US" sz="1450" dirty="0"/>
+            <a:endParaRPr lang="en-US" sz="1800" dirty="0"/>
           </a:p>
         </p:txBody>
       </p:sp>
@@ -8553,7 +11058,7 @@
               <a:buNone/>
             </a:pPr>
             <a:r>
-              <a:rPr lang="en-US" sz="1000" u="sng" dirty="0">
+              <a:rPr lang="en-US" sz="1200" u="sng" dirty="0">
                 <a:solidFill>
                   <a:srgbClr val="8A939B"/>
                 </a:solidFill>
@@ -8574,7 +11079,7 @@
               <a:buNone/>
             </a:pPr>
             <a:r>
-              <a:rPr lang="en-US" sz="1000" dirty="0">
+              <a:rPr lang="en-US" sz="1200" dirty="0">
                 <a:solidFill>
                   <a:srgbClr val="8A939B"/>
                 </a:solidFill>
@@ -8584,7 +11089,996 @@
               </a:rPr>
               <a:t>  ·  2</a:t>
             </a:r>
-            <a:endParaRPr lang="en-US" sz="1000" dirty="0"/>
+            <a:endParaRPr lang="en-US" sz="1200" dirty="0"/>
+          </a:p>
+        </p:txBody>
+      </p:sp>
+    </p:spTree>
+  </p:cSld>
+  <p:clrMapOvr>
+    <a:masterClrMapping/>
+  </p:clrMapOvr>
+</p:sld>
+</file>
+
+<file path=ppt/slides/slide20.xml><?xml version="1.0" encoding="utf-8"?>
+<p:sld xmlns:a="http://schemas.openxmlformats.org/drawingml/2006/main" xmlns:r="http://schemas.openxmlformats.org/officeDocument/2006/relationships" xmlns:p="http://schemas.openxmlformats.org/presentationml/2006/main">
+  <p:cSld name="Slide 8">
+    <p:bg>
+      <p:bgPr>
+        <a:solidFill>
+          <a:srgbClr val="F7F8F9"/>
+        </a:solidFill>
+      </p:bgPr>
+    </p:bg>
+    <p:spTree>
+      <p:nvGrpSpPr>
+        <p:cNvPr id="1" name=""/>
+        <p:cNvGrpSpPr/>
+        <p:nvPr/>
+      </p:nvGrpSpPr>
+      <p:grpSpPr>
+        <a:xfrm>
+          <a:off x="0" y="0"/>
+          <a:ext cx="0" cy="0"/>
+          <a:chOff x="0" y="0"/>
+          <a:chExt cx="0" cy="0"/>
+        </a:xfrm>
+      </p:grpSpPr>
+      <p:sp>
+        <p:nvSpPr>
+          <p:cNvPr id="2" name="Text 0"/>
+          <p:cNvSpPr txBox="1"/>
+          <p:nvPr/>
+        </p:nvSpPr>
+        <p:spPr>
+          <a:xfrm>
+            <a:off x="548640" y="320040"/>
+            <a:ext cx="9144000" cy="292608"/>
+          </a:xfrm>
+          <a:prstGeom prst="rect">
+            <a:avLst/>
+          </a:prstGeom>
+          <a:noFill/>
+          <a:ln/>
+        </p:spPr>
+        <p:txBody>
+          <a:bodyPr wrap="square" rtlCol="0" anchor="ctr"/>
+          <a:lstStyle/>
+          <a:p>
+            <a:pPr indent="0" marL="0">
+              <a:buNone/>
+            </a:pPr>
+            <a:r>
+              <a:rPr lang="en-US" sz="1200" b="1" spc="150" kern="0" dirty="0">
+                <a:solidFill>
+                  <a:srgbClr val="8B7FD9"/>
+                </a:solidFill>
+                <a:latin typeface="Calibri" pitchFamily="34" charset="0"/>
+                <a:ea typeface="Calibri" pitchFamily="34" charset="-122"/>
+                <a:cs typeface="Calibri" pitchFamily="34" charset="-120"/>
+              </a:rPr>
+              <a:t>CAPACITY PLANNING</a:t>
+            </a:r>
+            <a:endParaRPr lang="en-US" sz="1200" dirty="0"/>
+          </a:p>
+        </p:txBody>
+      </p:sp>
+      <p:sp>
+        <p:nvSpPr>
+          <p:cNvPr id="3" name="Text 1"/>
+          <p:cNvSpPr txBox="1"/>
+          <p:nvPr/>
+        </p:nvSpPr>
+        <p:spPr>
+          <a:xfrm>
+            <a:off x="548640" y="566928"/>
+            <a:ext cx="11064240" cy="640080"/>
+          </a:xfrm>
+          <a:prstGeom prst="rect">
+            <a:avLst/>
+          </a:prstGeom>
+          <a:noFill/>
+          <a:ln/>
+        </p:spPr>
+        <p:txBody>
+          <a:bodyPr wrap="square" rtlCol="0" anchor="ctr"/>
+          <a:lstStyle/>
+          <a:p>
+            <a:pPr indent="0" marL="0">
+              <a:buNone/>
+            </a:pPr>
+            <a:r>
+              <a:rPr lang="en-US" sz="2500" b="1" dirty="0">
+                <a:solidFill>
+                  <a:srgbClr val="1F2429"/>
+                </a:solidFill>
+                <a:latin typeface="Calibri" pitchFamily="34" charset="0"/>
+                <a:ea typeface="Calibri" pitchFamily="34" charset="-122"/>
+                <a:cs typeface="Calibri" pitchFamily="34" charset="-120"/>
+              </a:rPr>
+              <a:t>Sizing a Cluster: When One Replica Set Is Not Enough</a:t>
+            </a:r>
+            <a:endParaRPr lang="en-US" sz="2500" dirty="0"/>
+          </a:p>
+        </p:txBody>
+      </p:sp>
+      <p:sp>
+        <p:nvSpPr>
+          <p:cNvPr id="4" name="Text 2"/>
+          <p:cNvSpPr txBox="1"/>
+          <p:nvPr/>
+        </p:nvSpPr>
+        <p:spPr>
+          <a:xfrm>
+            <a:off x="9951415" y="6455664"/>
+            <a:ext cx="2011680" cy="292608"/>
+          </a:xfrm>
+          <a:prstGeom prst="rect">
+            <a:avLst/>
+          </a:prstGeom>
+          <a:noFill/>
+          <a:ln/>
+        </p:spPr>
+        <p:txBody>
+          <a:bodyPr wrap="square" rtlCol="0" anchor="ctr"/>
+          <a:lstStyle/>
+          <a:p>
+            <a:pPr algn="r" indent="0" marL="0">
+              <a:buNone/>
+            </a:pPr>
+            <a:r>
+              <a:rPr lang="en-US" sz="1200" u="sng" dirty="0">
+                <a:solidFill>
+                  <a:srgbClr val="8A939B"/>
+                </a:solidFill>
+                <a:latin typeface="Calibri" pitchFamily="34" charset="0"/>
+                <a:ea typeface="Calibri" pitchFamily="34" charset="-122"/>
+                <a:cs typeface="Calibri" pitchFamily="34" charset="-120"/>
+                <a:hlinkClick r:id="rId1" invalidUrl="" action="" tgtFrame="" tooltip="" history="1" highlightClick="0" endSnd="0">
+                  <a:extLst>
+                    <a:ext uri="{A12FA001-AC4F-418D-AE19-62706E023703}">
+                      <ahyp:hlinkClr xmlns:ahyp="http://schemas.microsoft.com/office/drawing/2018/hyperlinkcolor" val="tx"/>
+                    </a:ext>
+                  </a:extLst>
+                </a:hlinkClick>
+              </a:rPr>
+              <a:t>cuinotes.com</a:t>
+            </a:r>
+            <a:pPr algn="r" indent="0" marL="0">
+              <a:buNone/>
+            </a:pPr>
+            <a:r>
+              <a:rPr lang="en-US" sz="1200" dirty="0">
+                <a:solidFill>
+                  <a:srgbClr val="8A939B"/>
+                </a:solidFill>
+                <a:latin typeface="Calibri" pitchFamily="34" charset="0"/>
+                <a:ea typeface="Calibri" pitchFamily="34" charset="-122"/>
+                <a:cs typeface="Calibri" pitchFamily="34" charset="-120"/>
+              </a:rPr>
+              <a:t>  ·  18</a:t>
+            </a:r>
+            <a:endParaRPr lang="en-US" sz="1200" dirty="0"/>
+          </a:p>
+        </p:txBody>
+      </p:sp>
+      <p:sp>
+        <p:nvSpPr>
+          <p:cNvPr id="5" name="Text 3"/>
+          <p:cNvSpPr txBox="1"/>
+          <p:nvPr/>
+        </p:nvSpPr>
+        <p:spPr>
+          <a:xfrm>
+            <a:off x="548640" y="1234440"/>
+            <a:ext cx="11064240" cy="822960"/>
+          </a:xfrm>
+          <a:prstGeom prst="rect">
+            <a:avLst/>
+          </a:prstGeom>
+          <a:noFill/>
+          <a:ln/>
+        </p:spPr>
+        <p:txBody>
+          <a:bodyPr wrap="square" rtlCol="0" anchor="ctr"/>
+          <a:lstStyle/>
+          <a:p>
+            <a:pPr indent="0" marL="0">
+              <a:lnSpc>
+                <a:spcPct val="125000"/>
+              </a:lnSpc>
+              <a:buNone/>
+            </a:pPr>
+            <a:r>
+              <a:rPr lang="en-US" sz="1400" dirty="0">
+                <a:solidFill>
+                  <a:srgbClr val="1F2429"/>
+                </a:solidFill>
+                <a:latin typeface="Calibri" pitchFamily="34" charset="0"/>
+                <a:ea typeface="Calibri" pitchFamily="34" charset="-122"/>
+                <a:cs typeface="Calibri" pitchFamily="34" charset="-120"/>
+              </a:rPr>
+              <a:t>Illustrative numbers: 2 TB of data today, 4 TB disks per server, and a peak of 15,000 writes/s against a single primary's 10,000 writes/s limit.</a:t>
+            </a:r>
+            <a:endParaRPr lang="en-US" sz="1800" dirty="0"/>
+          </a:p>
+        </p:txBody>
+      </p:sp>
+      <p:sp>
+        <p:nvSpPr>
+          <p:cNvPr id="6" name="Shape 4"/>
+          <p:cNvSpPr/>
+          <p:nvPr/>
+        </p:nvSpPr>
+        <p:spPr>
+          <a:xfrm>
+            <a:off x="548640" y="2286000"/>
+            <a:ext cx="11064240" cy="1828800"/>
+          </a:xfrm>
+          <a:prstGeom prst="roundRect">
+            <a:avLst>
+              <a:gd name="adj" fmla="val 3500"/>
+            </a:avLst>
+          </a:prstGeom>
+          <a:solidFill>
+            <a:srgbClr val="FFFFFF"/>
+          </a:solidFill>
+          <a:ln w="19050">
+            <a:solidFill>
+              <a:srgbClr val="2FE6C4"/>
+            </a:solidFill>
+            <a:prstDash val="solid"/>
+          </a:ln>
+          <a:effectLst>
+            <a:outerShdw sx="100000" sy="100000" kx="0" ky="0" algn="bl" rotWithShape="0" blurRad="50800" dist="12700" dir="5400000">
+              <a:srgbClr val="1F2429">
+                <a:alpha val="12000"/>
+              </a:srgbClr>
+            </a:outerShdw>
+          </a:effectLst>
+        </p:spPr>
+      </p:sp>
+      <p:sp>
+        <p:nvSpPr>
+          <p:cNvPr id="7" name="Shape 5"/>
+          <p:cNvSpPr/>
+          <p:nvPr/>
+        </p:nvSpPr>
+        <p:spPr>
+          <a:xfrm>
+            <a:off x="731520" y="2450592"/>
+            <a:ext cx="274320" cy="82296"/>
+          </a:xfrm>
+          <a:prstGeom prst="rect">
+            <a:avLst/>
+          </a:prstGeom>
+          <a:solidFill>
+            <a:srgbClr val="2FE6C4"/>
+          </a:solidFill>
+          <a:ln/>
+        </p:spPr>
+      </p:sp>
+      <p:sp>
+        <p:nvSpPr>
+          <p:cNvPr id="8" name="Text 6"/>
+          <p:cNvSpPr txBox="1"/>
+          <p:nvPr/>
+        </p:nvSpPr>
+        <p:spPr>
+          <a:xfrm>
+            <a:off x="731520" y="2578608"/>
+            <a:ext cx="10698480" cy="237744"/>
+          </a:xfrm>
+          <a:prstGeom prst="rect">
+            <a:avLst/>
+          </a:prstGeom>
+          <a:noFill/>
+          <a:ln/>
+        </p:spPr>
+        <p:txBody>
+          <a:bodyPr wrap="square" rtlCol="0" anchor="ctr"/>
+          <a:lstStyle/>
+          <a:p>
+            <a:pPr indent="0" marL="0">
+              <a:buNone/>
+            </a:pPr>
+            <a:r>
+              <a:rPr lang="en-US" sz="1200" b="1" spc="100" kern="0" dirty="0">
+                <a:solidFill>
+                  <a:srgbClr val="2FE6C4"/>
+                </a:solidFill>
+                <a:latin typeface="Calibri" pitchFamily="34" charset="0"/>
+                <a:ea typeface="Calibri" pitchFamily="34" charset="-122"/>
+                <a:cs typeface="Calibri" pitchFamily="34" charset="-120"/>
+              </a:rPr>
+              <a:t>STEP 1: STORAGE</a:t>
+            </a:r>
+            <a:endParaRPr lang="en-US" sz="1200" dirty="0"/>
+          </a:p>
+        </p:txBody>
+      </p:sp>
+      <p:sp>
+        <p:nvSpPr>
+          <p:cNvPr id="9" name="Text 7"/>
+          <p:cNvSpPr txBox="1"/>
+          <p:nvPr/>
+        </p:nvSpPr>
+        <p:spPr>
+          <a:xfrm>
+            <a:off x="731520" y="2834640"/>
+            <a:ext cx="10698480" cy="1143000"/>
+          </a:xfrm>
+          <a:prstGeom prst="rect">
+            <a:avLst/>
+          </a:prstGeom>
+          <a:noFill/>
+          <a:ln/>
+        </p:spPr>
+        <p:txBody>
+          <a:bodyPr wrap="square" rtlCol="0" anchor="t"/>
+          <a:lstStyle/>
+          <a:p>
+            <a:pPr indent="0" marL="0">
+              <a:lnSpc>
+                <a:spcPct val="118000"/>
+              </a:lnSpc>
+              <a:buNone/>
+            </a:pPr>
+            <a:r>
+              <a:rPr lang="en-US" sz="1200" dirty="0">
+                <a:solidFill>
+                  <a:srgbClr val="1F2429"/>
+                </a:solidFill>
+                <a:latin typeface="Calibri" pitchFamily="34" charset="0"/>
+                <a:ea typeface="Calibri" pitchFamily="34" charset="-122"/>
+                <a:cs typeface="Calibri" pitchFamily="34" charset="-120"/>
+              </a:rPr>
+              <a:t>2 TB fits on one server today, but 10 TB of growth needs at least three shards of data.</a:t>
+            </a:r>
+            <a:endParaRPr lang="en-US" sz="1200" dirty="0"/>
+          </a:p>
+        </p:txBody>
+      </p:sp>
+      <p:sp>
+        <p:nvSpPr>
+          <p:cNvPr id="10" name="Shape 8"/>
+          <p:cNvSpPr/>
+          <p:nvPr/>
+        </p:nvSpPr>
+        <p:spPr>
+          <a:xfrm>
+            <a:off x="548640" y="4343400"/>
+            <a:ext cx="11064240" cy="1737360"/>
+          </a:xfrm>
+          <a:prstGeom prst="roundRect">
+            <a:avLst>
+              <a:gd name="adj" fmla="val 3684"/>
+            </a:avLst>
+          </a:prstGeom>
+          <a:solidFill>
+            <a:srgbClr val="FFFFFF"/>
+          </a:solidFill>
+          <a:ln w="19050">
+            <a:solidFill>
+              <a:srgbClr val="8B7FD9"/>
+            </a:solidFill>
+            <a:prstDash val="solid"/>
+          </a:ln>
+          <a:effectLst>
+            <a:outerShdw sx="100000" sy="100000" kx="0" ky="0" algn="bl" rotWithShape="0" blurRad="50800" dist="12700" dir="5400000">
+              <a:srgbClr val="1F2429">
+                <a:alpha val="12000"/>
+              </a:srgbClr>
+            </a:outerShdw>
+          </a:effectLst>
+        </p:spPr>
+      </p:sp>
+      <p:sp>
+        <p:nvSpPr>
+          <p:cNvPr id="11" name="Shape 9"/>
+          <p:cNvSpPr/>
+          <p:nvPr/>
+        </p:nvSpPr>
+        <p:spPr>
+          <a:xfrm>
+            <a:off x="731520" y="4507992"/>
+            <a:ext cx="274320" cy="82296"/>
+          </a:xfrm>
+          <a:prstGeom prst="rect">
+            <a:avLst/>
+          </a:prstGeom>
+          <a:solidFill>
+            <a:srgbClr val="8B7FD9"/>
+          </a:solidFill>
+          <a:ln/>
+        </p:spPr>
+      </p:sp>
+      <p:sp>
+        <p:nvSpPr>
+          <p:cNvPr id="12" name="Text 10"/>
+          <p:cNvSpPr txBox="1"/>
+          <p:nvPr/>
+        </p:nvSpPr>
+        <p:spPr>
+          <a:xfrm>
+            <a:off x="731520" y="4636008"/>
+            <a:ext cx="10698480" cy="237744"/>
+          </a:xfrm>
+          <a:prstGeom prst="rect">
+            <a:avLst/>
+          </a:prstGeom>
+          <a:noFill/>
+          <a:ln/>
+        </p:spPr>
+        <p:txBody>
+          <a:bodyPr wrap="square" rtlCol="0" anchor="ctr"/>
+          <a:lstStyle/>
+          <a:p>
+            <a:pPr indent="0" marL="0">
+              <a:buNone/>
+            </a:pPr>
+            <a:r>
+              <a:rPr lang="en-US" sz="1200" b="1" spc="100" kern="0" dirty="0">
+                <a:solidFill>
+                  <a:srgbClr val="8B7FD9"/>
+                </a:solidFill>
+                <a:latin typeface="Calibri" pitchFamily="34" charset="0"/>
+                <a:ea typeface="Calibri" pitchFamily="34" charset="-122"/>
+                <a:cs typeface="Calibri" pitchFamily="34" charset="-120"/>
+              </a:rPr>
+              <a:t>STEP 2: WRITES</a:t>
+            </a:r>
+            <a:endParaRPr lang="en-US" sz="1200" dirty="0"/>
+          </a:p>
+        </p:txBody>
+      </p:sp>
+      <p:sp>
+        <p:nvSpPr>
+          <p:cNvPr id="13" name="Text 11"/>
+          <p:cNvSpPr txBox="1"/>
+          <p:nvPr/>
+        </p:nvSpPr>
+        <p:spPr>
+          <a:xfrm>
+            <a:off x="731520" y="4892040"/>
+            <a:ext cx="10698480" cy="1051560"/>
+          </a:xfrm>
+          <a:prstGeom prst="rect">
+            <a:avLst/>
+          </a:prstGeom>
+          <a:noFill/>
+          <a:ln/>
+        </p:spPr>
+        <p:txBody>
+          <a:bodyPr wrap="square" rtlCol="0" anchor="t"/>
+          <a:lstStyle/>
+          <a:p>
+            <a:pPr indent="0" marL="0">
+              <a:lnSpc>
+                <a:spcPct val="118000"/>
+              </a:lnSpc>
+              <a:buNone/>
+            </a:pPr>
+            <a:r>
+              <a:rPr lang="en-US" sz="1200" dirty="0">
+                <a:solidFill>
+                  <a:srgbClr val="1F2429"/>
+                </a:solidFill>
+                <a:latin typeface="Calibri" pitchFamily="34" charset="0"/>
+                <a:ea typeface="Calibri" pitchFamily="34" charset="-122"/>
+                <a:cs typeface="Calibri" pitchFamily="34" charset="-120"/>
+              </a:rPr>
+              <a:t>15,000 writes/s exceed one primary, so split the writes across two or more shards.</a:t>
+            </a:r>
+            <a:endParaRPr lang="en-US" sz="1200" dirty="0"/>
+          </a:p>
+        </p:txBody>
+      </p:sp>
+    </p:spTree>
+  </p:cSld>
+  <p:clrMapOvr>
+    <a:masterClrMapping/>
+  </p:clrMapOvr>
+</p:sld>
+</file>
+
+<file path=ppt/slides/slide21.xml><?xml version="1.0" encoding="utf-8"?>
+<p:sld xmlns:a="http://schemas.openxmlformats.org/drawingml/2006/main" xmlns:r="http://schemas.openxmlformats.org/officeDocument/2006/relationships" xmlns:p="http://schemas.openxmlformats.org/presentationml/2006/main">
+  <p:cSld name="Slide 15">
+    <p:bg>
+      <p:bgPr>
+        <a:solidFill>
+          <a:srgbClr val="14181C"/>
+        </a:solidFill>
+      </p:bgPr>
+    </p:bg>
+    <p:spTree>
+      <p:nvGrpSpPr>
+        <p:cNvPr id="1" name=""/>
+        <p:cNvGrpSpPr/>
+        <p:nvPr/>
+      </p:nvGrpSpPr>
+      <p:grpSpPr>
+        <a:xfrm>
+          <a:off x="0" y="0"/>
+          <a:ext cx="0" cy="0"/>
+          <a:chOff x="0" y="0"/>
+          <a:chExt cx="0" cy="0"/>
+        </a:xfrm>
+      </p:grpSpPr>
+      <p:sp>
+        <p:nvSpPr>
+          <p:cNvPr id="2" name="Shape 0"/>
+          <p:cNvSpPr/>
+          <p:nvPr/>
+        </p:nvSpPr>
+        <p:spPr>
+          <a:xfrm>
+            <a:off x="9265615" y="3931920"/>
+            <a:ext cx="3840480" cy="3840480"/>
+          </a:xfrm>
+          <a:prstGeom prst="ellipse">
+            <a:avLst/>
+          </a:prstGeom>
+          <a:solidFill>
+            <a:srgbClr val="2FE6C4">
+              <a:alpha val="10000"/>
+            </a:srgbClr>
+          </a:solidFill>
+          <a:ln/>
+        </p:spPr>
+      </p:sp>
+      <p:sp>
+        <p:nvSpPr>
+          <p:cNvPr id="3" name="Text 1"/>
+          <p:cNvSpPr txBox="1"/>
+          <p:nvPr/>
+        </p:nvSpPr>
+        <p:spPr>
+          <a:xfrm>
+            <a:off x="822960" y="548640"/>
+            <a:ext cx="10058400" cy="731520"/>
+          </a:xfrm>
+          <a:prstGeom prst="rect">
+            <a:avLst/>
+          </a:prstGeom>
+          <a:noFill/>
+          <a:ln/>
+        </p:spPr>
+        <p:txBody>
+          <a:bodyPr wrap="square" rtlCol="0" anchor="ctr"/>
+          <a:lstStyle/>
+          <a:p>
+            <a:pPr indent="0" marL="0">
+              <a:buNone/>
+            </a:pPr>
+            <a:r>
+              <a:rPr lang="en-US" sz="3200" b="1" dirty="0">
+                <a:solidFill>
+                  <a:srgbClr val="FFFFFF"/>
+                </a:solidFill>
+                <a:latin typeface="Calibri" pitchFamily="34" charset="0"/>
+                <a:ea typeface="Calibri" pitchFamily="34" charset="-122"/>
+                <a:cs typeface="Calibri" pitchFamily="34" charset="-120"/>
+              </a:rPr>
+              <a:t>Course Close: The Recurring Trade-Offs</a:t>
+            </a:r>
+            <a:endParaRPr lang="en-US" sz="3200" dirty="0"/>
+          </a:p>
+        </p:txBody>
+      </p:sp>
+      <p:sp>
+        <p:nvSpPr>
+          <p:cNvPr id="4" name="Shape 2"/>
+          <p:cNvSpPr/>
+          <p:nvPr/>
+        </p:nvSpPr>
+        <p:spPr>
+          <a:xfrm>
+            <a:off x="822960" y="1946910"/>
+            <a:ext cx="109728" cy="109728"/>
+          </a:xfrm>
+          <a:prstGeom prst="rect">
+            <a:avLst/>
+          </a:prstGeom>
+          <a:solidFill>
+            <a:srgbClr val="2FE6C4"/>
+          </a:solidFill>
+          <a:ln/>
+        </p:spPr>
+      </p:sp>
+      <p:sp>
+        <p:nvSpPr>
+          <p:cNvPr id="5" name="Text 3"/>
+          <p:cNvSpPr txBox="1"/>
+          <p:nvPr/>
+        </p:nvSpPr>
+        <p:spPr>
+          <a:xfrm>
+            <a:off x="1143000" y="1600200"/>
+            <a:ext cx="9875520" cy="784860"/>
+          </a:xfrm>
+          <a:prstGeom prst="rect">
+            <a:avLst/>
+          </a:prstGeom>
+          <a:noFill/>
+          <a:ln/>
+        </p:spPr>
+        <p:txBody>
+          <a:bodyPr wrap="square" rtlCol="0" anchor="ctr"/>
+          <a:lstStyle/>
+          <a:p>
+            <a:pPr indent="0" marL="0">
+              <a:buNone/>
+            </a:pPr>
+            <a:r>
+              <a:rPr lang="en-US" sz="1800" dirty="0">
+                <a:solidFill>
+                  <a:srgbClr val="FFFFFF"/>
+                </a:solidFill>
+                <a:latin typeface="Calibri" pitchFamily="34" charset="0"/>
+                <a:ea typeface="Calibri" pitchFamily="34" charset="-122"/>
+                <a:cs typeface="Calibri" pitchFamily="34" charset="-120"/>
+              </a:rPr>
+              <a:t>Consistency versus availability: CAP forces a choice during a partition.</a:t>
+            </a:r>
+            <a:endParaRPr lang="en-US" sz="1800" dirty="0"/>
+          </a:p>
+        </p:txBody>
+      </p:sp>
+      <p:sp>
+        <p:nvSpPr>
+          <p:cNvPr id="6" name="Shape 4"/>
+          <p:cNvSpPr/>
+          <p:nvPr/>
+        </p:nvSpPr>
+        <p:spPr>
+          <a:xfrm>
+            <a:off x="822960" y="2731770"/>
+            <a:ext cx="109728" cy="109728"/>
+          </a:xfrm>
+          <a:prstGeom prst="rect">
+            <a:avLst/>
+          </a:prstGeom>
+          <a:solidFill>
+            <a:srgbClr val="8B7FD9"/>
+          </a:solidFill>
+          <a:ln/>
+        </p:spPr>
+      </p:sp>
+      <p:sp>
+        <p:nvSpPr>
+          <p:cNvPr id="7" name="Text 5"/>
+          <p:cNvSpPr txBox="1"/>
+          <p:nvPr/>
+        </p:nvSpPr>
+        <p:spPr>
+          <a:xfrm>
+            <a:off x="1143000" y="2385060"/>
+            <a:ext cx="9875520" cy="784860"/>
+          </a:xfrm>
+          <a:prstGeom prst="rect">
+            <a:avLst/>
+          </a:prstGeom>
+          <a:noFill/>
+          <a:ln/>
+        </p:spPr>
+        <p:txBody>
+          <a:bodyPr wrap="square" rtlCol="0" anchor="ctr"/>
+          <a:lstStyle/>
+          <a:p>
+            <a:pPr indent="0" marL="0">
+              <a:buNone/>
+            </a:pPr>
+            <a:r>
+              <a:rPr lang="en-US" sz="1800" dirty="0">
+                <a:solidFill>
+                  <a:srgbClr val="FFFFFF"/>
+                </a:solidFill>
+                <a:latin typeface="Calibri" pitchFamily="34" charset="0"/>
+                <a:ea typeface="Calibri" pitchFamily="34" charset="-122"/>
+                <a:cs typeface="Calibri" pitchFamily="34" charset="-120"/>
+              </a:rPr>
+              <a:t>Normalization versus embedding: model for the read pattern, not only the shape of the data.</a:t>
+            </a:r>
+            <a:endParaRPr lang="en-US" sz="1800" dirty="0"/>
+          </a:p>
+        </p:txBody>
+      </p:sp>
+      <p:sp>
+        <p:nvSpPr>
+          <p:cNvPr id="8" name="Shape 6"/>
+          <p:cNvSpPr/>
+          <p:nvPr/>
+        </p:nvSpPr>
+        <p:spPr>
+          <a:xfrm>
+            <a:off x="822960" y="3516630"/>
+            <a:ext cx="109728" cy="109728"/>
+          </a:xfrm>
+          <a:prstGeom prst="rect">
+            <a:avLst/>
+          </a:prstGeom>
+          <a:solidFill>
+            <a:srgbClr val="E8A33D"/>
+          </a:solidFill>
+          <a:ln/>
+        </p:spPr>
+      </p:sp>
+      <p:sp>
+        <p:nvSpPr>
+          <p:cNvPr id="9" name="Text 7"/>
+          <p:cNvSpPr txBox="1"/>
+          <p:nvPr/>
+        </p:nvSpPr>
+        <p:spPr>
+          <a:xfrm>
+            <a:off x="1143000" y="3169920"/>
+            <a:ext cx="9875520" cy="784860"/>
+          </a:xfrm>
+          <a:prstGeom prst="rect">
+            <a:avLst/>
+          </a:prstGeom>
+          <a:noFill/>
+          <a:ln/>
+        </p:spPr>
+        <p:txBody>
+          <a:bodyPr wrap="square" rtlCol="0" anchor="ctr"/>
+          <a:lstStyle/>
+          <a:p>
+            <a:pPr indent="0" marL="0">
+              <a:buNone/>
+            </a:pPr>
+            <a:r>
+              <a:rPr lang="en-US" sz="1800" dirty="0">
+                <a:solidFill>
+                  <a:srgbClr val="FFFFFF"/>
+                </a:solidFill>
+                <a:latin typeface="Calibri" pitchFamily="34" charset="0"/>
+                <a:ea typeface="Calibri" pitchFamily="34" charset="-122"/>
+                <a:cs typeface="Calibri" pitchFamily="34" charset="-120"/>
+              </a:rPr>
+              <a:t>One server versus many: vertical scaling has a ceiling; horizontal scaling adds coordination cost.</a:t>
+            </a:r>
+            <a:endParaRPr lang="en-US" sz="1800" dirty="0"/>
+          </a:p>
+        </p:txBody>
+      </p:sp>
+      <p:sp>
+        <p:nvSpPr>
+          <p:cNvPr id="10" name="Shape 8"/>
+          <p:cNvSpPr/>
+          <p:nvPr/>
+        </p:nvSpPr>
+        <p:spPr>
+          <a:xfrm>
+            <a:off x="822960" y="4301490"/>
+            <a:ext cx="109728" cy="109728"/>
+          </a:xfrm>
+          <a:prstGeom prst="rect">
+            <a:avLst/>
+          </a:prstGeom>
+          <a:solidFill>
+            <a:srgbClr val="2FE6C4"/>
+          </a:solidFill>
+          <a:ln/>
+        </p:spPr>
+      </p:sp>
+      <p:sp>
+        <p:nvSpPr>
+          <p:cNvPr id="11" name="Text 9"/>
+          <p:cNvSpPr txBox="1"/>
+          <p:nvPr/>
+        </p:nvSpPr>
+        <p:spPr>
+          <a:xfrm>
+            <a:off x="1143000" y="3954780"/>
+            <a:ext cx="9875520" cy="784860"/>
+          </a:xfrm>
+          <a:prstGeom prst="rect">
+            <a:avLst/>
+          </a:prstGeom>
+          <a:noFill/>
+          <a:ln/>
+        </p:spPr>
+        <p:txBody>
+          <a:bodyPr wrap="square" rtlCol="0" anchor="ctr"/>
+          <a:lstStyle/>
+          <a:p>
+            <a:pPr indent="0" marL="0">
+              <a:buNone/>
+            </a:pPr>
+            <a:r>
+              <a:rPr lang="en-US" sz="1800" dirty="0">
+                <a:solidFill>
+                  <a:srgbClr val="FFFFFF"/>
+                </a:solidFill>
+                <a:latin typeface="Calibri" pitchFamily="34" charset="0"/>
+                <a:ea typeface="Calibri" pitchFamily="34" charset="-122"/>
+                <a:cs typeface="Calibri" pitchFamily="34" charset="-120"/>
+              </a:rPr>
+              <a:t>Index read speed versus write cost: every index slows writes.</a:t>
+            </a:r>
+            <a:endParaRPr lang="en-US" sz="1800" dirty="0"/>
+          </a:p>
+        </p:txBody>
+      </p:sp>
+      <p:sp>
+        <p:nvSpPr>
+          <p:cNvPr id="12" name="Shape 10"/>
+          <p:cNvSpPr/>
+          <p:nvPr/>
+        </p:nvSpPr>
+        <p:spPr>
+          <a:xfrm>
+            <a:off x="822960" y="5086350"/>
+            <a:ext cx="109728" cy="109728"/>
+          </a:xfrm>
+          <a:prstGeom prst="rect">
+            <a:avLst/>
+          </a:prstGeom>
+          <a:solidFill>
+            <a:srgbClr val="8B7FD9"/>
+          </a:solidFill>
+          <a:ln/>
+        </p:spPr>
+      </p:sp>
+      <p:sp>
+        <p:nvSpPr>
+          <p:cNvPr id="13" name="Text 11"/>
+          <p:cNvSpPr txBox="1"/>
+          <p:nvPr/>
+        </p:nvSpPr>
+        <p:spPr>
+          <a:xfrm>
+            <a:off x="1143000" y="4739640"/>
+            <a:ext cx="9875520" cy="784860"/>
+          </a:xfrm>
+          <a:prstGeom prst="rect">
+            <a:avLst/>
+          </a:prstGeom>
+          <a:noFill/>
+          <a:ln/>
+        </p:spPr>
+        <p:txBody>
+          <a:bodyPr wrap="square" rtlCol="0" anchor="ctr"/>
+          <a:lstStyle/>
+          <a:p>
+            <a:pPr indent="0" marL="0">
+              <a:buNone/>
+            </a:pPr>
+            <a:r>
+              <a:rPr lang="en-US" sz="1800" dirty="0">
+                <a:solidFill>
+                  <a:srgbClr val="FFFFFF"/>
+                </a:solidFill>
+                <a:latin typeface="Calibri" pitchFamily="34" charset="0"/>
+                <a:ea typeface="Calibri" pitchFamily="34" charset="-122"/>
+                <a:cs typeface="Calibri" pitchFamily="34" charset="-120"/>
+              </a:rPr>
+              <a:t>Shard key choice decides whether capacity actually scales.</a:t>
+            </a:r>
+            <a:endParaRPr lang="en-US" sz="1800" dirty="0"/>
+          </a:p>
+        </p:txBody>
+      </p:sp>
+      <p:sp>
+        <p:nvSpPr>
+          <p:cNvPr id="14" name="Shape 12"/>
+          <p:cNvSpPr/>
+          <p:nvPr/>
+        </p:nvSpPr>
+        <p:spPr>
+          <a:xfrm>
+            <a:off x="822960" y="5871210"/>
+            <a:ext cx="109728" cy="109728"/>
+          </a:xfrm>
+          <a:prstGeom prst="rect">
+            <a:avLst/>
+          </a:prstGeom>
+          <a:solidFill>
+            <a:srgbClr val="E8A33D"/>
+          </a:solidFill>
+          <a:ln/>
+        </p:spPr>
+      </p:sp>
+      <p:sp>
+        <p:nvSpPr>
+          <p:cNvPr id="15" name="Text 13"/>
+          <p:cNvSpPr txBox="1"/>
+          <p:nvPr/>
+        </p:nvSpPr>
+        <p:spPr>
+          <a:xfrm>
+            <a:off x="1143000" y="5524500"/>
+            <a:ext cx="9875520" cy="784860"/>
+          </a:xfrm>
+          <a:prstGeom prst="rect">
+            <a:avLst/>
+          </a:prstGeom>
+          <a:noFill/>
+          <a:ln/>
+        </p:spPr>
+        <p:txBody>
+          <a:bodyPr wrap="square" rtlCol="0" anchor="ctr"/>
+          <a:lstStyle/>
+          <a:p>
+            <a:pPr indent="0" marL="0">
+              <a:buNone/>
+            </a:pPr>
+            <a:r>
+              <a:rPr lang="en-US" sz="1800" dirty="0">
+                <a:solidFill>
+                  <a:srgbClr val="FFFFFF"/>
+                </a:solidFill>
+                <a:latin typeface="Calibri" pitchFamily="34" charset="0"/>
+                <a:ea typeface="Calibri" pitchFamily="34" charset="-122"/>
+                <a:cs typeface="Calibri" pitchFamily="34" charset="-120"/>
+              </a:rPr>
+              <a:t>Every design is a trade-off — name what you gave up.</a:t>
+            </a:r>
+            <a:endParaRPr lang="en-US" sz="1800" dirty="0"/>
+          </a:p>
+        </p:txBody>
+      </p:sp>
+      <p:sp>
+        <p:nvSpPr>
+          <p:cNvPr id="16" name="Text 14"/>
+          <p:cNvSpPr txBox="1"/>
+          <p:nvPr/>
+        </p:nvSpPr>
+        <p:spPr>
+          <a:xfrm>
+            <a:off x="9951415" y="6455664"/>
+            <a:ext cx="2011680" cy="292608"/>
+          </a:xfrm>
+          <a:prstGeom prst="rect">
+            <a:avLst/>
+          </a:prstGeom>
+          <a:noFill/>
+          <a:ln/>
+        </p:spPr>
+        <p:txBody>
+          <a:bodyPr wrap="square" rtlCol="0" anchor="ctr"/>
+          <a:lstStyle/>
+          <a:p>
+            <a:pPr algn="r" indent="0" marL="0">
+              <a:buNone/>
+            </a:pPr>
+            <a:r>
+              <a:rPr lang="en-US" sz="1200" u="sng" dirty="0">
+                <a:solidFill>
+                  <a:srgbClr val="8A939B"/>
+                </a:solidFill>
+                <a:latin typeface="Calibri" pitchFamily="34" charset="0"/>
+                <a:ea typeface="Calibri" pitchFamily="34" charset="-122"/>
+                <a:cs typeface="Calibri" pitchFamily="34" charset="-120"/>
+                <a:hlinkClick r:id="rId1" invalidUrl="" action="" tgtFrame="" tooltip="" history="1" highlightClick="0" endSnd="0">
+                  <a:extLst>
+                    <a:ext uri="{A12FA001-AC4F-418D-AE19-62706E023703}">
+                      <ahyp:hlinkClr xmlns:ahyp="http://schemas.microsoft.com/office/drawing/2018/hyperlinkcolor" val="tx"/>
+                    </a:ext>
+                  </a:extLst>
+                </a:hlinkClick>
+              </a:rPr>
+              <a:t>cuinotes.com</a:t>
+            </a:r>
+            <a:pPr algn="r" indent="0" marL="0">
+              <a:buNone/>
+            </a:pPr>
+            <a:r>
+              <a:rPr lang="en-US" sz="1200" dirty="0">
+                <a:solidFill>
+                  <a:srgbClr val="8A939B"/>
+                </a:solidFill>
+                <a:latin typeface="Calibri" pitchFamily="34" charset="0"/>
+                <a:ea typeface="Calibri" pitchFamily="34" charset="-122"/>
+                <a:cs typeface="Calibri" pitchFamily="34" charset="-120"/>
+              </a:rPr>
+              <a:t>  ·  21</a:t>
+            </a:r>
+            <a:endParaRPr lang="en-US" sz="1200" dirty="0"/>
           </a:p>
         </p:txBody>
       </p:sp>
@@ -8723,7 +12217,7 @@
               <a:buNone/>
             </a:pPr>
             <a:r>
-              <a:rPr lang="en-US" sz="1000" u="sng" dirty="0">
+              <a:rPr lang="en-US" sz="1200" u="sng" dirty="0">
                 <a:solidFill>
                   <a:srgbClr val="8A939B"/>
                 </a:solidFill>
@@ -8744,7 +12238,7 @@
               <a:buNone/>
             </a:pPr>
             <a:r>
-              <a:rPr lang="en-US" sz="1000" dirty="0">
+              <a:rPr lang="en-US" sz="1200" dirty="0">
                 <a:solidFill>
                   <a:srgbClr val="8A939B"/>
                 </a:solidFill>
@@ -8752,9 +12246,9 @@
                 <a:ea typeface="Calibri" pitchFamily="34" charset="-122"/>
                 <a:cs typeface="Calibri" pitchFamily="34" charset="-120"/>
               </a:rPr>
-              <a:t>  ·  3</a:t>
-            </a:r>
-            <a:endParaRPr lang="en-US" sz="1000" dirty="0"/>
+              <a:t>  ·  4</a:t>
+            </a:r>
+            <a:endParaRPr lang="en-US" sz="1200" dirty="0"/>
           </a:p>
         </p:txBody>
       </p:sp>
@@ -8786,7 +12280,7 @@
               <a:buNone/>
             </a:pPr>
             <a:r>
-              <a:rPr lang="en-US" sz="1350" dirty="0">
+              <a:rPr lang="en-US" sz="1400" dirty="0">
                 <a:solidFill>
                   <a:srgbClr val="1F2429"/>
                 </a:solidFill>
@@ -8796,7 +12290,7 @@
               </a:rPr>
               <a:t>A single mongod, however well it handles documents, is still just one server — one point of failure, and one machine's worth of disk and CPU. Replication keeps multiple synced copies of the same data to solve two problems:</a:t>
             </a:r>
-            <a:endParaRPr lang="en-US" sz="1350" dirty="0"/>
+            <a:endParaRPr lang="en-US" sz="1800" dirty="0"/>
           </a:p>
         </p:txBody>
       </p:sp>
@@ -8879,7 +12373,7 @@
               <a:buNone/>
             </a:pPr>
             <a:r>
-              <a:rPr lang="en-US" sz="1350" b="1" dirty="0">
+              <a:rPr lang="en-US" sz="1800" b="1" dirty="0">
                 <a:solidFill>
                   <a:srgbClr val="1F2429"/>
                 </a:solidFill>
@@ -8889,7 +12383,7 @@
               </a:rPr>
               <a:t>High availability</a:t>
             </a:r>
-            <a:endParaRPr lang="en-US" sz="1350" dirty="0"/>
+            <a:endParaRPr lang="en-US" sz="1800" dirty="0"/>
           </a:p>
         </p:txBody>
       </p:sp>
@@ -8921,7 +12415,7 @@
               <a:buNone/>
             </a:pPr>
             <a:r>
-              <a:rPr lang="en-US" sz="1050" dirty="0">
+              <a:rPr lang="en-US" sz="1200" dirty="0">
                 <a:solidFill>
                   <a:srgbClr val="6B7480"/>
                 </a:solidFill>
@@ -8931,7 +12425,7 @@
               </a:rPr>
               <a:t>If the one server holding your data crashes, the application goes down with it. Multiple copies mean it can keep running on a surviving copy.</a:t>
             </a:r>
-            <a:endParaRPr lang="en-US" sz="1050" dirty="0"/>
+            <a:endParaRPr lang="en-US" sz="1200" dirty="0"/>
           </a:p>
         </p:txBody>
       </p:sp>
@@ -9014,7 +12508,7 @@
               <a:buNone/>
             </a:pPr>
             <a:r>
-              <a:rPr lang="en-US" sz="1350" b="1" dirty="0">
+              <a:rPr lang="en-US" sz="1800" b="1" dirty="0">
                 <a:solidFill>
                   <a:srgbClr val="1F2429"/>
                 </a:solidFill>
@@ -9024,7 +12518,7 @@
               </a:rPr>
               <a:t>Read scaling</a:t>
             </a:r>
-            <a:endParaRPr lang="en-US" sz="1350" dirty="0"/>
+            <a:endParaRPr lang="en-US" sz="1800" dirty="0"/>
           </a:p>
         </p:txBody>
       </p:sp>
@@ -9056,7 +12550,7 @@
               <a:buNone/>
             </a:pPr>
             <a:r>
-              <a:rPr lang="en-US" sz="1050" dirty="0">
+              <a:rPr lang="en-US" sz="1200" dirty="0">
                 <a:solidFill>
                   <a:srgbClr val="6B7480"/>
                 </a:solidFill>
@@ -9066,7 +12560,7 @@
               </a:rPr>
               <a:t>A single server has a ceiling on reads per second it can serve; spreading reads across several copies raises that ceiling.</a:t>
             </a:r>
-            <a:endParaRPr lang="en-US" sz="1050" dirty="0"/>
+            <a:endParaRPr lang="en-US" sz="1200" dirty="0"/>
           </a:p>
         </p:txBody>
       </p:sp>
@@ -9205,7 +12699,7 @@
               <a:buNone/>
             </a:pPr>
             <a:r>
-              <a:rPr lang="en-US" sz="1000" u="sng" dirty="0">
+              <a:rPr lang="en-US" sz="1200" u="sng" dirty="0">
                 <a:solidFill>
                   <a:srgbClr val="8A939B"/>
                 </a:solidFill>
@@ -9226,7 +12720,7 @@
               <a:buNone/>
             </a:pPr>
             <a:r>
-              <a:rPr lang="en-US" sz="1000" dirty="0">
+              <a:rPr lang="en-US" sz="1200" dirty="0">
                 <a:solidFill>
                   <a:srgbClr val="8A939B"/>
                 </a:solidFill>
@@ -9234,9 +12728,9 @@
                 <a:ea typeface="Calibri" pitchFamily="34" charset="-122"/>
                 <a:cs typeface="Calibri" pitchFamily="34" charset="-120"/>
               </a:rPr>
-              <a:t>  ·  4</a:t>
-            </a:r>
-            <a:endParaRPr lang="en-US" sz="1000" dirty="0"/>
+              <a:t>  ·  5</a:t>
+            </a:r>
+            <a:endParaRPr lang="en-US" sz="1200" dirty="0"/>
           </a:p>
         </p:txBody>
       </p:sp>
@@ -9268,7 +12762,7 @@
               <a:buNone/>
             </a:pPr>
             <a:r>
-              <a:rPr lang="en-US" sz="1350" dirty="0">
+              <a:rPr lang="en-US" sz="1400" dirty="0">
                 <a:solidFill>
                   <a:srgbClr val="1F2429"/>
                 </a:solidFill>
@@ -9278,7 +12772,7 @@
               </a:rPr>
               <a:t>A replica set is a group of mongod instances that all hold the same data. It almost always has an odd number of members (three is typical) — which matters for elections below.</a:t>
             </a:r>
-            <a:endParaRPr lang="en-US" sz="1350" dirty="0"/>
+            <a:endParaRPr lang="en-US" sz="1800" dirty="0"/>
           </a:p>
         </p:txBody>
       </p:sp>
@@ -9361,7 +12855,7 @@
               <a:buNone/>
             </a:pPr>
             <a:r>
-              <a:rPr lang="en-US" sz="1350" b="1" dirty="0">
+              <a:rPr lang="en-US" sz="1800" b="1" dirty="0">
                 <a:solidFill>
                   <a:srgbClr val="1F2429"/>
                 </a:solidFill>
@@ -9371,7 +12865,7 @@
               </a:rPr>
               <a:t>Primary</a:t>
             </a:r>
-            <a:endParaRPr lang="en-US" sz="1350" dirty="0"/>
+            <a:endParaRPr lang="en-US" sz="1800" dirty="0"/>
           </a:p>
         </p:txBody>
       </p:sp>
@@ -9403,7 +12897,7 @@
               <a:buNone/>
             </a:pPr>
             <a:r>
-              <a:rPr lang="en-US" sz="1050" dirty="0">
+              <a:rPr lang="en-US" sz="1200" dirty="0">
                 <a:solidFill>
                   <a:srgbClr val="6B7480"/>
                 </a:solidFill>
@@ -9413,7 +12907,7 @@
               </a:rPr>
               <a:t>Accepts all writes</a:t>
             </a:r>
-            <a:endParaRPr lang="en-US" sz="1050" dirty="0"/>
+            <a:endParaRPr lang="en-US" sz="1200" dirty="0"/>
           </a:p>
         </p:txBody>
       </p:sp>
@@ -9520,7 +13014,7 @@
               <a:buNone/>
             </a:pPr>
             <a:r>
-              <a:rPr lang="en-US" sz="1350" b="1" dirty="0">
+              <a:rPr lang="en-US" sz="1800" b="1" dirty="0">
                 <a:solidFill>
                   <a:srgbClr val="1F2429"/>
                 </a:solidFill>
@@ -9530,7 +13024,7 @@
               </a:rPr>
               <a:t>Secondary</a:t>
             </a:r>
-            <a:endParaRPr lang="en-US" sz="1350" dirty="0"/>
+            <a:endParaRPr lang="en-US" sz="1800" dirty="0"/>
           </a:p>
         </p:txBody>
       </p:sp>
@@ -9562,7 +13056,7 @@
               <a:buNone/>
             </a:pPr>
             <a:r>
-              <a:rPr lang="en-US" sz="1050" dirty="0">
+              <a:rPr lang="en-US" sz="1200" dirty="0">
                 <a:solidFill>
                   <a:srgbClr val="6B7480"/>
                 </a:solidFill>
@@ -9572,7 +13066,7 @@
               </a:rPr>
               <a:t>Replicates the oplog from the primary</a:t>
             </a:r>
-            <a:endParaRPr lang="en-US" sz="1050" dirty="0"/>
+            <a:endParaRPr lang="en-US" sz="1200" dirty="0"/>
           </a:p>
         </p:txBody>
       </p:sp>
@@ -9679,7 +13173,7 @@
               <a:buNone/>
             </a:pPr>
             <a:r>
-              <a:rPr lang="en-US" sz="1350" b="1" dirty="0">
+              <a:rPr lang="en-US" sz="1800" b="1" dirty="0">
                 <a:solidFill>
                   <a:srgbClr val="1F2429"/>
                 </a:solidFill>
@@ -9689,7 +13183,7 @@
               </a:rPr>
               <a:t>Secondary</a:t>
             </a:r>
-            <a:endParaRPr lang="en-US" sz="1350" dirty="0"/>
+            <a:endParaRPr lang="en-US" sz="1800" dirty="0"/>
           </a:p>
         </p:txBody>
       </p:sp>
@@ -9721,7 +13215,7 @@
               <a:buNone/>
             </a:pPr>
             <a:r>
-              <a:rPr lang="en-US" sz="1050" dirty="0">
+              <a:rPr lang="en-US" sz="1200" dirty="0">
                 <a:solidFill>
                   <a:srgbClr val="6B7480"/>
                 </a:solidFill>
@@ -9731,7 +13225,7 @@
               </a:rPr>
               <a:t>Replicates the oplog from the primary</a:t>
             </a:r>
-            <a:endParaRPr lang="en-US" sz="1050" dirty="0"/>
+            <a:endParaRPr lang="en-US" sz="1200" dirty="0"/>
           </a:p>
         </p:txBody>
       </p:sp>
@@ -9814,7 +13308,7 @@
               <a:buNone/>
             </a:pPr>
             <a:r>
-              <a:rPr lang="en-US" sz="1050" b="1" spc="100" kern="0" dirty="0">
+              <a:rPr lang="en-US" sz="1200" b="1" spc="100" kern="0" dirty="0">
                 <a:solidFill>
                   <a:srgbClr val="8B7FD9"/>
                 </a:solidFill>
@@ -9824,7 +13318,7 @@
               </a:rPr>
               <a:t>A THREE-MEMBER REPLICA SET</a:t>
             </a:r>
-            <a:endParaRPr lang="en-US" sz="1050" dirty="0"/>
+            <a:endParaRPr lang="en-US" sz="1200" dirty="0"/>
           </a:p>
         </p:txBody>
       </p:sp>
@@ -10005,7 +13499,7 @@
               <a:buNone/>
             </a:pPr>
             <a:r>
-              <a:rPr lang="en-US" sz="1000" u="sng" dirty="0">
+              <a:rPr lang="en-US" sz="1200" u="sng" dirty="0">
                 <a:solidFill>
                   <a:srgbClr val="8A939B"/>
                 </a:solidFill>
@@ -10026,7 +13520,7 @@
               <a:buNone/>
             </a:pPr>
             <a:r>
-              <a:rPr lang="en-US" sz="1000" dirty="0">
+              <a:rPr lang="en-US" sz="1200" dirty="0">
                 <a:solidFill>
                   <a:srgbClr val="8A939B"/>
                 </a:solidFill>
@@ -10034,9 +13528,9 @@
                 <a:ea typeface="Calibri" pitchFamily="34" charset="-122"/>
                 <a:cs typeface="Calibri" pitchFamily="34" charset="-120"/>
               </a:rPr>
-              <a:t>  ·  5</a:t>
-            </a:r>
-            <a:endParaRPr lang="en-US" sz="1000" dirty="0"/>
+              <a:t>  ·  6</a:t>
+            </a:r>
+            <a:endParaRPr lang="en-US" sz="1200" dirty="0"/>
           </a:p>
         </p:txBody>
       </p:sp>
@@ -10119,7 +13613,7 @@
               <a:buNone/>
             </a:pPr>
             <a:r>
-              <a:rPr lang="en-US" sz="1350" b="1" dirty="0">
+              <a:rPr lang="en-US" sz="1800" b="1" dirty="0">
                 <a:solidFill>
                   <a:srgbClr val="1F2429"/>
                 </a:solidFill>
@@ -10129,7 +13623,7 @@
               </a:rPr>
               <a:t>Client writes</a:t>
             </a:r>
-            <a:endParaRPr lang="en-US" sz="1350" dirty="0"/>
+            <a:endParaRPr lang="en-US" sz="1800" dirty="0"/>
           </a:p>
         </p:txBody>
       </p:sp>
@@ -10161,7 +13655,7 @@
               <a:buNone/>
             </a:pPr>
             <a:r>
-              <a:rPr lang="en-US" sz="1050" dirty="0">
+              <a:rPr lang="en-US" sz="1200" dirty="0">
                 <a:solidFill>
                   <a:srgbClr val="6B7480"/>
                 </a:solidFill>
@@ -10171,7 +13665,7 @@
               </a:rPr>
               <a:t>Application sends a write operation</a:t>
             </a:r>
-            <a:endParaRPr lang="en-US" sz="1050" dirty="0"/>
+            <a:endParaRPr lang="en-US" sz="1200" dirty="0"/>
           </a:p>
         </p:txBody>
       </p:sp>
@@ -10278,7 +13772,7 @@
               <a:buNone/>
             </a:pPr>
             <a:r>
-              <a:rPr lang="en-US" sz="1350" b="1" dirty="0">
+              <a:rPr lang="en-US" sz="1800" b="1" dirty="0">
                 <a:solidFill>
                   <a:srgbClr val="1F2429"/>
                 </a:solidFill>
@@ -10288,7 +13782,7 @@
               </a:rPr>
               <a:t>Primary applies it</a:t>
             </a:r>
-            <a:endParaRPr lang="en-US" sz="1350" dirty="0"/>
+            <a:endParaRPr lang="en-US" sz="1800" dirty="0"/>
           </a:p>
         </p:txBody>
       </p:sp>
@@ -10320,7 +13814,7 @@
               <a:buNone/>
             </a:pPr>
             <a:r>
-              <a:rPr lang="en-US" sz="1050" dirty="0">
+              <a:rPr lang="en-US" sz="1200" dirty="0">
                 <a:solidFill>
                   <a:srgbClr val="6B7480"/>
                 </a:solidFill>
@@ -10330,7 +13824,7 @@
               </a:rPr>
               <a:t>Records the operation in its oplog</a:t>
             </a:r>
-            <a:endParaRPr lang="en-US" sz="1050" dirty="0"/>
+            <a:endParaRPr lang="en-US" sz="1200" dirty="0"/>
           </a:p>
         </p:txBody>
       </p:sp>
@@ -10437,7 +13931,7 @@
               <a:buNone/>
             </a:pPr>
             <a:r>
-              <a:rPr lang="en-US" sz="1350" b="1" dirty="0">
+              <a:rPr lang="en-US" sz="1800" b="1" dirty="0">
                 <a:solidFill>
                   <a:srgbClr val="1F2429"/>
                 </a:solidFill>
@@ -10447,7 +13941,7 @@
               </a:rPr>
               <a:t>Secondaries tail the oplog</a:t>
             </a:r>
-            <a:endParaRPr lang="en-US" sz="1350" dirty="0"/>
+            <a:endParaRPr lang="en-US" sz="1800" dirty="0"/>
           </a:p>
         </p:txBody>
       </p:sp>
@@ -10479,7 +13973,7 @@
               <a:buNone/>
             </a:pPr>
             <a:r>
-              <a:rPr lang="en-US" sz="1050" dirty="0">
+              <a:rPr lang="en-US" sz="1200" dirty="0">
                 <a:solidFill>
                   <a:srgbClr val="6B7480"/>
                 </a:solidFill>
@@ -10489,7 +13983,7 @@
               </a:rPr>
               <a:t>Re-apply the same operations locally</a:t>
             </a:r>
-            <a:endParaRPr lang="en-US" sz="1050" dirty="0"/>
+            <a:endParaRPr lang="en-US" sz="1200" dirty="0"/>
           </a:p>
         </p:txBody>
       </p:sp>
@@ -10572,7 +14066,7 @@
               <a:buNone/>
             </a:pPr>
             <a:r>
-              <a:rPr lang="en-US" sz="1050" b="1" spc="100" kern="0" dirty="0">
+              <a:rPr lang="en-US" sz="1200" b="1" spc="100" kern="0" dirty="0">
                 <a:solidFill>
                   <a:srgbClr val="2FE6C4"/>
                 </a:solidFill>
@@ -10582,7 +14076,7 @@
               </a:rPr>
               <a:t>SECONDARIES ARE ALWAYS SLIGHTLY BEHIND</a:t>
             </a:r>
-            <a:endParaRPr lang="en-US" sz="1050" dirty="0"/>
+            <a:endParaRPr lang="en-US" sz="1200" dirty="0"/>
           </a:p>
         </p:txBody>
       </p:sp>
@@ -10707,7 +14201,7 @@
               <a:buNone/>
             </a:pPr>
             <a:r>
-              <a:rPr lang="en-US" sz="1050" b="1" spc="100" kern="0" dirty="0">
+              <a:rPr lang="en-US" sz="1200" b="1" spc="100" kern="0" dirty="0">
                 <a:solidFill>
                   <a:srgbClr val="8B7FD9"/>
                 </a:solidFill>
@@ -10717,7 +14211,7 @@
               </a:rPr>
               <a:t>THE OLD PRIMARY REJOINS AS A SECONDARY</a:t>
             </a:r>
-            <a:endParaRPr lang="en-US" sz="1050" dirty="0"/>
+            <a:endParaRPr lang="en-US" sz="1200" dirty="0"/>
           </a:p>
         </p:txBody>
       </p:sp>
@@ -10898,7 +14392,7 @@
               <a:buNone/>
             </a:pPr>
             <a:r>
-              <a:rPr lang="en-US" sz="1000" u="sng" dirty="0">
+              <a:rPr lang="en-US" sz="1200" u="sng" dirty="0">
                 <a:solidFill>
                   <a:srgbClr val="8A939B"/>
                 </a:solidFill>
@@ -10919,7 +14413,7 @@
               <a:buNone/>
             </a:pPr>
             <a:r>
-              <a:rPr lang="en-US" sz="1000" dirty="0">
+              <a:rPr lang="en-US" sz="1200" dirty="0">
                 <a:solidFill>
                   <a:srgbClr val="8A939B"/>
                 </a:solidFill>
@@ -10927,9 +14421,9 @@
                 <a:ea typeface="Calibri" pitchFamily="34" charset="-122"/>
                 <a:cs typeface="Calibri" pitchFamily="34" charset="-120"/>
               </a:rPr>
-              <a:t>  ·  6</a:t>
-            </a:r>
-            <a:endParaRPr lang="en-US" sz="1000" dirty="0"/>
+              <a:t>  ·  7</a:t>
+            </a:r>
+            <a:endParaRPr lang="en-US" sz="1200" dirty="0"/>
           </a:p>
         </p:txBody>
       </p:sp>
@@ -10961,7 +14455,7 @@
               <a:buNone/>
             </a:pPr>
             <a:r>
-              <a:rPr lang="en-US" sz="1350" dirty="0">
+              <a:rPr lang="en-US" sz="1400" dirty="0">
                 <a:solidFill>
                   <a:srgbClr val="1F2429"/>
                 </a:solidFill>
@@ -10971,7 +14465,7 @@
               </a:rPr>
               <a:t>If the primary becomes unreachable — a crash, a network partition, planned maintenance — the remaining members detect this through heartbeats and trigger an election.</a:t>
             </a:r>
-            <a:endParaRPr lang="en-US" sz="1350" dirty="0"/>
+            <a:endParaRPr lang="en-US" sz="1800" dirty="0"/>
           </a:p>
         </p:txBody>
       </p:sp>
@@ -11054,7 +14548,7 @@
               <a:buNone/>
             </a:pPr>
             <a:r>
-              <a:rPr lang="en-US" sz="1350" b="1" dirty="0">
+              <a:rPr lang="en-US" sz="1800" b="1" dirty="0">
                 <a:solidFill>
                   <a:srgbClr val="1F2429"/>
                 </a:solidFill>
@@ -11064,7 +14558,7 @@
               </a:rPr>
               <a:t>Primary fails</a:t>
             </a:r>
-            <a:endParaRPr lang="en-US" sz="1350" dirty="0"/>
+            <a:endParaRPr lang="en-US" sz="1800" dirty="0"/>
           </a:p>
         </p:txBody>
       </p:sp>
@@ -11096,7 +14590,7 @@
               <a:buNone/>
             </a:pPr>
             <a:r>
-              <a:rPr lang="en-US" sz="1050" dirty="0">
+              <a:rPr lang="en-US" sz="1200" dirty="0">
                 <a:solidFill>
                   <a:srgbClr val="6B7480"/>
                 </a:solidFill>
@@ -11106,7 +14600,7 @@
               </a:rPr>
               <a:t>Heartbeats to it start timing out</a:t>
             </a:r>
-            <a:endParaRPr lang="en-US" sz="1050" dirty="0"/>
+            <a:endParaRPr lang="en-US" sz="1200" dirty="0"/>
           </a:p>
         </p:txBody>
       </p:sp>
@@ -11213,7 +14707,7 @@
               <a:buNone/>
             </a:pPr>
             <a:r>
-              <a:rPr lang="en-US" sz="1350" b="1" dirty="0">
+              <a:rPr lang="en-US" sz="1800" b="1" dirty="0">
                 <a:solidFill>
                   <a:srgbClr val="1F2429"/>
                 </a:solidFill>
@@ -11223,7 +14717,7 @@
               </a:rPr>
               <a:t>Election</a:t>
             </a:r>
-            <a:endParaRPr lang="en-US" sz="1350" dirty="0"/>
+            <a:endParaRPr lang="en-US" sz="1800" dirty="0"/>
           </a:p>
         </p:txBody>
       </p:sp>
@@ -11255,7 +14749,7 @@
               <a:buNone/>
             </a:pPr>
             <a:r>
-              <a:rPr lang="en-US" sz="1050" dirty="0">
+              <a:rPr lang="en-US" sz="1200" dirty="0">
                 <a:solidFill>
                   <a:srgbClr val="6B7480"/>
                 </a:solidFill>
@@ -11265,7 +14759,7 @@
               </a:rPr>
               <a:t>Surviving secondaries vote among themselves</a:t>
             </a:r>
-            <a:endParaRPr lang="en-US" sz="1050" dirty="0"/>
+            <a:endParaRPr lang="en-US" sz="1200" dirty="0"/>
           </a:p>
         </p:txBody>
       </p:sp>
@@ -11372,7 +14866,7 @@
               <a:buNone/>
             </a:pPr>
             <a:r>
-              <a:rPr lang="en-US" sz="1350" b="1" dirty="0">
+              <a:rPr lang="en-US" sz="1800" b="1" dirty="0">
                 <a:solidFill>
                   <a:srgbClr val="1F2429"/>
                 </a:solidFill>
@@ -11382,7 +14876,7 @@
               </a:rPr>
               <a:t>New primary</a:t>
             </a:r>
-            <a:endParaRPr lang="en-US" sz="1350" dirty="0"/>
+            <a:endParaRPr lang="en-US" sz="1800" dirty="0"/>
           </a:p>
         </p:txBody>
       </p:sp>
@@ -11414,7 +14908,7 @@
               <a:buNone/>
             </a:pPr>
             <a:r>
-              <a:rPr lang="en-US" sz="1050" dirty="0">
+              <a:rPr lang="en-US" sz="1200" dirty="0">
                 <a:solidFill>
                   <a:srgbClr val="6B7480"/>
                 </a:solidFill>
@@ -11424,7 +14918,7 @@
               </a:rPr>
               <a:t>A former secondary now accepts writes</a:t>
             </a:r>
-            <a:endParaRPr lang="en-US" sz="1050" dirty="0"/>
+            <a:endParaRPr lang="en-US" sz="1200" dirty="0"/>
           </a:p>
         </p:txBody>
       </p:sp>
@@ -11507,7 +15001,7 @@
               <a:buNone/>
             </a:pPr>
             <a:r>
-              <a:rPr lang="en-US" sz="1050" b="1" spc="100" kern="0" dirty="0">
+              <a:rPr lang="en-US" sz="1200" b="1" spc="100" kern="0" dirty="0">
                 <a:solidFill>
                   <a:srgbClr val="E8A33D"/>
                 </a:solidFill>
@@ -11517,7 +15011,7 @@
               </a:rPr>
               <a:t>WHY AN ODD MEMBER COUNT</a:t>
             </a:r>
-            <a:endParaRPr lang="en-US" sz="1050" dirty="0"/>
+            <a:endParaRPr lang="en-US" sz="1200" dirty="0"/>
           </a:p>
         </p:txBody>
       </p:sp>
@@ -11698,7 +15192,7 @@
               <a:buNone/>
             </a:pPr>
             <a:r>
-              <a:rPr lang="en-US" sz="1000" u="sng" dirty="0">
+              <a:rPr lang="en-US" sz="1200" u="sng" dirty="0">
                 <a:solidFill>
                   <a:srgbClr val="8A939B"/>
                 </a:solidFill>
@@ -11719,7 +15213,7 @@
               <a:buNone/>
             </a:pPr>
             <a:r>
-              <a:rPr lang="en-US" sz="1000" dirty="0">
+              <a:rPr lang="en-US" sz="1200" dirty="0">
                 <a:solidFill>
                   <a:srgbClr val="8A939B"/>
                 </a:solidFill>
@@ -11727,9 +15221,9 @@
                 <a:ea typeface="Calibri" pitchFamily="34" charset="-122"/>
                 <a:cs typeface="Calibri" pitchFamily="34" charset="-120"/>
               </a:rPr>
-              <a:t>  ·  7</a:t>
-            </a:r>
-            <a:endParaRPr lang="en-US" sz="1000" dirty="0"/>
+              <a:t>  ·  9</a:t>
+            </a:r>
+            <a:endParaRPr lang="en-US" sz="1200" dirty="0"/>
           </a:p>
         </p:txBody>
       </p:sp>
@@ -11761,7 +15255,7 @@
               <a:buNone/>
             </a:pPr>
             <a:r>
-              <a:rPr lang="en-US" sz="1350" dirty="0">
+              <a:rPr lang="en-US" sz="1400" dirty="0">
                 <a:solidFill>
                   <a:srgbClr val="1F2429"/>
                 </a:solidFill>
@@ -11771,7 +15265,7 @@
               </a:rPr>
               <a:t>Writes always go to the primary — the only member allowed to accept them. Reads can be directed to secondaries too, controlled by the application's read preference:</a:t>
             </a:r>
-            <a:endParaRPr lang="en-US" sz="1350" dirty="0"/>
+            <a:endParaRPr lang="en-US" sz="1800" dirty="0"/>
           </a:p>
         </p:txBody>
       </p:sp>
@@ -11811,7 +15305,7 @@
                         <a:buNone/>
                       </a:pPr>
                       <a:r>
-                        <a:rPr lang="en-US" sz="1250" b="1" dirty="0">
+                        <a:rPr lang="en-US" sz="1400" b="1" dirty="0">
                           <a:solidFill>
                             <a:srgbClr val="FFFFFF"/>
                           </a:solidFill>
@@ -11821,7 +15315,7 @@
                         </a:rPr>
                         <a:t>Read preference</a:t>
                       </a:r>
-                      <a:endParaRPr lang="en-US" sz="1250" dirty="0">
+                      <a:endParaRPr lang="en-US" sz="1400" dirty="0">
                         <a:latin typeface="Calibri" charset="0"/>
                         <a:ea typeface="Calibri" charset="0"/>
                         <a:cs typeface="Calibri" charset="0"/>
@@ -11879,7 +15373,7 @@
                         <a:buNone/>
                       </a:pPr>
                       <a:r>
-                        <a:rPr lang="en-US" sz="1250" b="1" dirty="0">
+                        <a:rPr lang="en-US" sz="1400" b="1" dirty="0">
                           <a:solidFill>
                             <a:srgbClr val="FFFFFF"/>
                           </a:solidFill>
@@ -11889,7 +15383,7 @@
                         </a:rPr>
                         <a:t>Behavior</a:t>
                       </a:r>
-                      <a:endParaRPr lang="en-US" sz="1250" dirty="0">
+                      <a:endParaRPr lang="en-US" sz="1400" dirty="0">
                         <a:latin typeface="Calibri" charset="0"/>
                         <a:ea typeface="Calibri" charset="0"/>
                         <a:cs typeface="Calibri" charset="0"/>
@@ -11949,7 +15443,7 @@
                         <a:buNone/>
                       </a:pPr>
                       <a:r>
-                        <a:rPr lang="en-US" sz="1250" dirty="0">
+                        <a:rPr lang="en-US" sz="1400" dirty="0">
                           <a:solidFill>
                             <a:srgbClr val="1F2429"/>
                           </a:solidFill>
@@ -11959,7 +15453,7 @@
                         </a:rPr>
                         <a:t>primary (default)</a:t>
                       </a:r>
-                      <a:endParaRPr lang="en-US" sz="1250" dirty="0">
+                      <a:endParaRPr lang="en-US" sz="1400" dirty="0">
                         <a:latin typeface="Calibri" charset="0"/>
                         <a:ea typeface="Calibri" charset="0"/>
                         <a:cs typeface="Calibri" charset="0"/>
@@ -12017,7 +15511,7 @@
                         <a:buNone/>
                       </a:pPr>
                       <a:r>
-                        <a:rPr lang="en-US" sz="1250" dirty="0">
+                        <a:rPr lang="en-US" sz="1400" dirty="0">
                           <a:solidFill>
                             <a:srgbClr val="1F2429"/>
                           </a:solidFill>
@@ -12027,7 +15521,7 @@
                         </a:rPr>
                         <a:t>All reads go to the primary — always the most up-to-date data</a:t>
                       </a:r>
-                      <a:endParaRPr lang="en-US" sz="1250" dirty="0">
+                      <a:endParaRPr lang="en-US" sz="1400" dirty="0">
                         <a:latin typeface="Calibri" charset="0"/>
                         <a:ea typeface="Calibri" charset="0"/>
                         <a:cs typeface="Calibri" charset="0"/>
@@ -12087,7 +15581,7 @@
                         <a:buNone/>
                       </a:pPr>
                       <a:r>
-                        <a:rPr lang="en-US" sz="1250" dirty="0">
+                        <a:rPr lang="en-US" sz="1400" dirty="0">
                           <a:solidFill>
                             <a:srgbClr val="1F2429"/>
                           </a:solidFill>
@@ -12097,7 +15591,7 @@
                         </a:rPr>
                         <a:t>primaryPreferred</a:t>
                       </a:r>
-                      <a:endParaRPr lang="en-US" sz="1250" dirty="0">
+                      <a:endParaRPr lang="en-US" sz="1400" dirty="0">
                         <a:latin typeface="Calibri" charset="0"/>
                         <a:ea typeface="Calibri" charset="0"/>
                         <a:cs typeface="Calibri" charset="0"/>
@@ -12155,7 +15649,7 @@
                         <a:buNone/>
                       </a:pPr>
                       <a:r>
-                        <a:rPr lang="en-US" sz="1250" dirty="0">
+                        <a:rPr lang="en-US" sz="1400" dirty="0">
                           <a:solidFill>
                             <a:srgbClr val="1F2429"/>
                           </a:solidFill>
@@ -12165,7 +15659,7 @@
                         </a:rPr>
                         <a:t>Prefer the primary, fall back to a secondary if unreachable</a:t>
                       </a:r>
-                      <a:endParaRPr lang="en-US" sz="1250" dirty="0">
+                      <a:endParaRPr lang="en-US" sz="1400" dirty="0">
                         <a:latin typeface="Calibri" charset="0"/>
                         <a:ea typeface="Calibri" charset="0"/>
                         <a:cs typeface="Calibri" charset="0"/>
@@ -12225,7 +15719,7 @@
                         <a:buNone/>
                       </a:pPr>
                       <a:r>
-                        <a:rPr lang="en-US" sz="1250" dirty="0">
+                        <a:rPr lang="en-US" sz="1400" dirty="0">
                           <a:solidFill>
                             <a:srgbClr val="1F2429"/>
                           </a:solidFill>
@@ -12235,7 +15729,7 @@
                         </a:rPr>
                         <a:t>secondary</a:t>
                       </a:r>
-                      <a:endParaRPr lang="en-US" sz="1250" dirty="0">
+                      <a:endParaRPr lang="en-US" sz="1400" dirty="0">
                         <a:latin typeface="Calibri" charset="0"/>
                         <a:ea typeface="Calibri" charset="0"/>
                         <a:cs typeface="Calibri" charset="0"/>
@@ -12293,7 +15787,7 @@
                         <a:buNone/>
                       </a:pPr>
                       <a:r>
-                        <a:rPr lang="en-US" sz="1250" dirty="0">
+                        <a:rPr lang="en-US" sz="1400" dirty="0">
                           <a:solidFill>
                             <a:srgbClr val="1F2429"/>
                           </a:solidFill>
@@ -12303,7 +15797,7 @@
                         </a:rPr>
                         <a:t>All reads go to a secondary — spreads out load, may return stale data</a:t>
                       </a:r>
-                      <a:endParaRPr lang="en-US" sz="1250" dirty="0">
+                      <a:endParaRPr lang="en-US" sz="1400" dirty="0">
                         <a:latin typeface="Calibri" charset="0"/>
                         <a:ea typeface="Calibri" charset="0"/>
                         <a:cs typeface="Calibri" charset="0"/>
@@ -12363,7 +15857,7 @@
                         <a:buNone/>
                       </a:pPr>
                       <a:r>
-                        <a:rPr lang="en-US" sz="1250" dirty="0">
+                        <a:rPr lang="en-US" sz="1400" dirty="0">
                           <a:solidFill>
                             <a:srgbClr val="1F2429"/>
                           </a:solidFill>
@@ -12373,7 +15867,7 @@
                         </a:rPr>
                         <a:t>secondaryPreferred</a:t>
                       </a:r>
-                      <a:endParaRPr lang="en-US" sz="1250" dirty="0">
+                      <a:endParaRPr lang="en-US" sz="1400" dirty="0">
                         <a:latin typeface="Calibri" charset="0"/>
                         <a:ea typeface="Calibri" charset="0"/>
                         <a:cs typeface="Calibri" charset="0"/>
@@ -12431,7 +15925,7 @@
                         <a:buNone/>
                       </a:pPr>
                       <a:r>
-                        <a:rPr lang="en-US" sz="1250" dirty="0">
+                        <a:rPr lang="en-US" sz="1400" dirty="0">
                           <a:solidFill>
                             <a:srgbClr val="1F2429"/>
                           </a:solidFill>
@@ -12441,7 +15935,7 @@
                         </a:rPr>
                         <a:t>Prefer a secondary, fall back to the primary if none available</a:t>
                       </a:r>
-                      <a:endParaRPr lang="en-US" sz="1250" dirty="0">
+                      <a:endParaRPr lang="en-US" sz="1400" dirty="0">
                         <a:latin typeface="Calibri" charset="0"/>
                         <a:ea typeface="Calibri" charset="0"/>
                         <a:cs typeface="Calibri" charset="0"/>
@@ -12501,7 +15995,7 @@
                         <a:buNone/>
                       </a:pPr>
                       <a:r>
-                        <a:rPr lang="en-US" sz="1250" dirty="0">
+                        <a:rPr lang="en-US" sz="1400" dirty="0">
                           <a:solidFill>
                             <a:srgbClr val="1F2429"/>
                           </a:solidFill>
@@ -12511,7 +16005,7 @@
                         </a:rPr>
                         <a:t>nearest</a:t>
                       </a:r>
-                      <a:endParaRPr lang="en-US" sz="1250" dirty="0">
+                      <a:endParaRPr lang="en-US" sz="1400" dirty="0">
                         <a:latin typeface="Calibri" charset="0"/>
                         <a:ea typeface="Calibri" charset="0"/>
                         <a:cs typeface="Calibri" charset="0"/>
@@ -12569,7 +16063,7 @@
                         <a:buNone/>
                       </a:pPr>
                       <a:r>
-                        <a:rPr lang="en-US" sz="1250" dirty="0">
+                        <a:rPr lang="en-US" sz="1400" dirty="0">
                           <a:solidFill>
                             <a:srgbClr val="1F2429"/>
                           </a:solidFill>
@@ -12579,7 +16073,7 @@
                         </a:rPr>
                         <a:t>Route to whichever member has the lowest network latency</a:t>
                       </a:r>
-                      <a:endParaRPr lang="en-US" sz="1250" dirty="0">
+                      <a:endParaRPr lang="en-US" sz="1400" dirty="0">
                         <a:latin typeface="Calibri" charset="0"/>
                         <a:ea typeface="Calibri" charset="0"/>
                         <a:cs typeface="Calibri" charset="0"/>
@@ -12712,7 +16206,7 @@
               <a:buNone/>
             </a:pPr>
             <a:r>
-              <a:rPr lang="en-US" sz="1050" b="1" spc="100" kern="0" dirty="0">
+              <a:rPr lang="en-US" sz="1200" b="1" spc="100" kern="0" dirty="0">
                 <a:solidFill>
                   <a:srgbClr val="2FE6C4"/>
                 </a:solidFill>
@@ -12722,7 +16216,7 @@
               </a:rPr>
               <a:t>A TRADE-OFF, NOT A FREE WIN</a:t>
             </a:r>
-            <a:endParaRPr lang="en-US" sz="1050" dirty="0"/>
+            <a:endParaRPr lang="en-US" sz="1200" dirty="0"/>
           </a:p>
         </p:txBody>
       </p:sp>
@@ -12903,7 +16397,7 @@
               <a:buNone/>
             </a:pPr>
             <a:r>
-              <a:rPr lang="en-US" sz="1000" u="sng" dirty="0">
+              <a:rPr lang="en-US" sz="1200" u="sng" dirty="0">
                 <a:solidFill>
                   <a:srgbClr val="8A939B"/>
                 </a:solidFill>
@@ -12924,7 +16418,7 @@
               <a:buNone/>
             </a:pPr>
             <a:r>
-              <a:rPr lang="en-US" sz="1000" dirty="0">
+              <a:rPr lang="en-US" sz="1200" dirty="0">
                 <a:solidFill>
                   <a:srgbClr val="8A939B"/>
                 </a:solidFill>
@@ -12932,9 +16426,9 @@
                 <a:ea typeface="Calibri" pitchFamily="34" charset="-122"/>
                 <a:cs typeface="Calibri" pitchFamily="34" charset="-120"/>
               </a:rPr>
-              <a:t>  ·  8</a:t>
-            </a:r>
-            <a:endParaRPr lang="en-US" sz="1000" dirty="0"/>
+              <a:t>  ·  10</a:t>
+            </a:r>
+            <a:endParaRPr lang="en-US" sz="1200" dirty="0"/>
           </a:p>
         </p:txBody>
       </p:sp>
@@ -12966,7 +16460,7 @@
               <a:buNone/>
             </a:pPr>
             <a:r>
-              <a:rPr lang="en-US" sz="1450" dirty="0">
+              <a:rPr lang="en-US" sz="1400" dirty="0">
                 <a:solidFill>
                   <a:srgbClr val="1F2429"/>
                 </a:solidFill>
@@ -12976,7 +16470,7 @@
               </a:rPr>
               <a:t>Replication solves availability and read capacity — but every member of a replica set still holds the entire dataset, so it does nothing for a dataset too large, or a write volume too high, for any single server to hold or handle at all.</a:t>
             </a:r>
-            <a:endParaRPr lang="en-US" sz="1450" dirty="0"/>
+            <a:endParaRPr lang="en-US" sz="1800" dirty="0"/>
           </a:p>
         </p:txBody>
       </p:sp>
@@ -13059,7 +16553,7 @@
               <a:buNone/>
             </a:pPr>
             <a:r>
-              <a:rPr lang="en-US" sz="1050" b="1" spc="100" kern="0" dirty="0">
+              <a:rPr lang="en-US" sz="1200" b="1" spc="100" kern="0" dirty="0">
                 <a:solidFill>
                   <a:srgbClr val="2FE6C4"/>
                 </a:solidFill>
@@ -13069,7 +16563,7 @@
               </a:rPr>
               <a:t>SHARDING PARTITIONS, REPLICATION COPIES</a:t>
             </a:r>
-            <a:endParaRPr lang="en-US" sz="1050" dirty="0"/>
+            <a:endParaRPr lang="en-US" sz="1200" dirty="0"/>
           </a:p>
         </p:txBody>
       </p:sp>
@@ -13194,7 +16688,7 @@
               <a:buNone/>
             </a:pPr>
             <a:r>
-              <a:rPr lang="en-US" sz="1050" b="1" spc="100" kern="0" dirty="0">
+              <a:rPr lang="en-US" sz="1200" b="1" spc="100" kern="0" dirty="0">
                 <a:solidFill>
                   <a:srgbClr val="8B7FD9"/>
                 </a:solidFill>
@@ -13204,7 +16698,7 @@
               </a:rPr>
               <a:t>THE APPLICATION NEVER TALKS TO SHARDS DIRECTLY</a:t>
             </a:r>
-            <a:endParaRPr lang="en-US" sz="1050" dirty="0"/>
+            <a:endParaRPr lang="en-US" sz="1200" dirty="0"/>
           </a:p>
         </p:txBody>
       </p:sp>
@@ -13385,7 +16879,7 @@
               <a:buNone/>
             </a:pPr>
             <a:r>
-              <a:rPr lang="en-US" sz="1000" u="sng" dirty="0">
+              <a:rPr lang="en-US" sz="1200" u="sng" dirty="0">
                 <a:solidFill>
                   <a:srgbClr val="8A939B"/>
                 </a:solidFill>
@@ -13406,7 +16900,7 @@
               <a:buNone/>
             </a:pPr>
             <a:r>
-              <a:rPr lang="en-US" sz="1000" dirty="0">
+              <a:rPr lang="en-US" sz="1200" dirty="0">
                 <a:solidFill>
                   <a:srgbClr val="8A939B"/>
                 </a:solidFill>
@@ -13414,9 +16908,9 @@
                 <a:ea typeface="Calibri" pitchFamily="34" charset="-122"/>
                 <a:cs typeface="Calibri" pitchFamily="34" charset="-120"/>
               </a:rPr>
-              <a:t>  ·  9</a:t>
-            </a:r>
-            <a:endParaRPr lang="en-US" sz="1000" dirty="0"/>
+              <a:t>  ·  11</a:t>
+            </a:r>
+            <a:endParaRPr lang="en-US" sz="1200" dirty="0"/>
           </a:p>
         </p:txBody>
       </p:sp>
@@ -13499,7 +16993,7 @@
               <a:buNone/>
             </a:pPr>
             <a:r>
-              <a:rPr lang="en-US" sz="1400" b="1" dirty="0">
+              <a:rPr lang="en-US" sz="1800" b="1" dirty="0">
                 <a:solidFill>
                   <a:srgbClr val="1F2429"/>
                 </a:solidFill>
@@ -13509,7 +17003,7 @@
               </a:rPr>
               <a:t>Application</a:t>
             </a:r>
-            <a:endParaRPr lang="en-US" sz="1400" dirty="0"/>
+            <a:endParaRPr lang="en-US" sz="1800" dirty="0"/>
           </a:p>
         </p:txBody>
       </p:sp>
@@ -13541,7 +17035,7 @@
               <a:buNone/>
             </a:pPr>
             <a:r>
-              <a:rPr lang="en-US" sz="1100" dirty="0">
+              <a:rPr lang="en-US" sz="1200" dirty="0">
                 <a:solidFill>
                   <a:srgbClr val="6B7480"/>
                 </a:solidFill>
@@ -13551,7 +17045,7 @@
               </a:rPr>
               <a:t>Sends every query exactly as it would to a single mongod</a:t>
             </a:r>
-            <a:endParaRPr lang="en-US" sz="1100" dirty="0"/>
+            <a:endParaRPr lang="en-US" sz="1200" dirty="0"/>
           </a:p>
         </p:txBody>
       </p:sp>
@@ -13658,7 +17152,7 @@
               <a:buNone/>
             </a:pPr>
             <a:r>
-              <a:rPr lang="en-US" sz="1400" b="1" dirty="0">
+              <a:rPr lang="en-US" sz="1800" b="1" dirty="0">
                 <a:solidFill>
                   <a:srgbClr val="1F2429"/>
                 </a:solidFill>
@@ -13668,7 +17162,7 @@
               </a:rPr>
               <a:t>mongos (query router)</a:t>
             </a:r>
-            <a:endParaRPr lang="en-US" sz="1400" dirty="0"/>
+            <a:endParaRPr lang="en-US" sz="1800" dirty="0"/>
           </a:p>
         </p:txBody>
       </p:sp>
@@ -13700,7 +17194,7 @@
               <a:buNone/>
             </a:pPr>
             <a:r>
-              <a:rPr lang="en-US" sz="1100" dirty="0">
+              <a:rPr lang="en-US" sz="1200" dirty="0">
                 <a:solidFill>
                   <a:srgbClr val="6B7480"/>
                 </a:solidFill>
@@ -13710,7 +17204,7 @@
               </a:rPr>
               <a:t>Figures out which shard(s) hold the relevant data, consulting config server metadata</a:t>
             </a:r>
-            <a:endParaRPr lang="en-US" sz="1100" dirty="0"/>
+            <a:endParaRPr lang="en-US" sz="1200" dirty="0"/>
           </a:p>
         </p:txBody>
       </p:sp>
@@ -13793,7 +17287,7 @@
               <a:buNone/>
             </a:pPr>
             <a:r>
-              <a:rPr lang="en-US" sz="1350" b="1" dirty="0">
+              <a:rPr lang="en-US" sz="1800" b="1" dirty="0">
                 <a:solidFill>
                   <a:srgbClr val="1F2429"/>
                 </a:solidFill>
@@ -13803,7 +17297,7 @@
               </a:rPr>
               <a:t>Shard 1</a:t>
             </a:r>
-            <a:endParaRPr lang="en-US" sz="1350" dirty="0"/>
+            <a:endParaRPr lang="en-US" sz="1800" dirty="0"/>
           </a:p>
         </p:txBody>
       </p:sp>
@@ -13835,7 +17329,7 @@
               <a:buNone/>
             </a:pPr>
             <a:r>
-              <a:rPr lang="en-US" sz="1050" dirty="0">
+              <a:rPr lang="en-US" sz="1200" dirty="0">
                 <a:solidFill>
                   <a:srgbClr val="6B7480"/>
                 </a:solidFill>
@@ -13845,7 +17339,7 @@
               </a:rPr>
               <a:t>Holds one slice of the data — e.g. regNo A–H</a:t>
             </a:r>
-            <a:endParaRPr lang="en-US" sz="1050" dirty="0"/>
+            <a:endParaRPr lang="en-US" sz="1200" dirty="0"/>
           </a:p>
         </p:txBody>
       </p:sp>
@@ -13928,7 +17422,7 @@
               <a:buNone/>
             </a:pPr>
             <a:r>
-              <a:rPr lang="en-US" sz="1350" b="1" dirty="0">
+              <a:rPr lang="en-US" sz="1800" b="1" dirty="0">
                 <a:solidFill>
                   <a:srgbClr val="1F2429"/>
                 </a:solidFill>
@@ -13938,7 +17432,7 @@
               </a:rPr>
               <a:t>Shard 2</a:t>
             </a:r>
-            <a:endParaRPr lang="en-US" sz="1350" dirty="0"/>
+            <a:endParaRPr lang="en-US" sz="1800" dirty="0"/>
           </a:p>
         </p:txBody>
       </p:sp>
@@ -13970,7 +17464,7 @@
               <a:buNone/>
             </a:pPr>
             <a:r>
-              <a:rPr lang="en-US" sz="1050" dirty="0">
+              <a:rPr lang="en-US" sz="1200" dirty="0">
                 <a:solidFill>
                   <a:srgbClr val="6B7480"/>
                 </a:solidFill>
@@ -13980,7 +17474,7 @@
               </a:rPr>
               <a:t>Holds another slice — e.g. regNo I–P</a:t>
             </a:r>
-            <a:endParaRPr lang="en-US" sz="1050" dirty="0"/>
+            <a:endParaRPr lang="en-US" sz="1200" dirty="0"/>
           </a:p>
         </p:txBody>
       </p:sp>
@@ -14063,7 +17557,7 @@
               <a:buNone/>
             </a:pPr>
             <a:r>
-              <a:rPr lang="en-US" sz="1350" b="1" dirty="0">
+              <a:rPr lang="en-US" sz="1800" b="1" dirty="0">
                 <a:solidFill>
                   <a:srgbClr val="1F2429"/>
                 </a:solidFill>
@@ -14073,7 +17567,7 @@
               </a:rPr>
               <a:t>Shard 3</a:t>
             </a:r>
-            <a:endParaRPr lang="en-US" sz="1350" dirty="0"/>
+            <a:endParaRPr lang="en-US" sz="1800" dirty="0"/>
           </a:p>
         </p:txBody>
       </p:sp>
@@ -14105,7 +17599,7 @@
               <a:buNone/>
             </a:pPr>
             <a:r>
-              <a:rPr lang="en-US" sz="1050" dirty="0">
+              <a:rPr lang="en-US" sz="1200" dirty="0">
                 <a:solidFill>
                   <a:srgbClr val="6B7480"/>
                 </a:solidFill>
@@ -14115,7 +17609,7 @@
               </a:rPr>
               <a:t>Holds another slice — e.g. regNo Q–Z</a:t>
             </a:r>
-            <a:endParaRPr lang="en-US" sz="1050" dirty="0"/>
+            <a:endParaRPr lang="en-US" sz="1200" dirty="0"/>
           </a:p>
         </p:txBody>
       </p:sp>
@@ -14198,7 +17692,7 @@
               <a:buNone/>
             </a:pPr>
             <a:r>
-              <a:rPr lang="en-US" sz="1050" b="1" spc="100" kern="0" dirty="0">
+              <a:rPr lang="en-US" sz="1200" b="1" spc="100" kern="0" dirty="0">
                 <a:solidFill>
                   <a:srgbClr val="8B7FD9"/>
                 </a:solidFill>
@@ -14208,7 +17702,7 @@
               </a:rPr>
               <a:t>CONFIG SERVERS</a:t>
             </a:r>
-            <a:endParaRPr lang="en-US" sz="1050" dirty="0"/>
+            <a:endParaRPr lang="en-US" sz="1200" dirty="0"/>
           </a:p>
         </p:txBody>
       </p:sp>
